--- a/output/education/2026-04-09_behavioral-economics-mental-health-residents/behavioral-economics-mental-health-residents_slides_residents.pptx
+++ b/output/education/2026-04-09_behavioral-economics-mental-health-residents/behavioral-economics-mental-health-residents_slides_residents.pptx
@@ -3176,7 +3176,7 @@
         <p:spPr>
           <a:xfrm>
             <a:off x="457200" y="365760"/>
-            <a:ext cx="11430000" cy="822960"/>
+            <a:ext cx="11430000" cy="914400"/>
           </a:xfrm>
           <a:prstGeom prst="rect">
             <a:avLst/>
@@ -3191,7 +3191,7 @@
           <a:p>
             <a:pPr algn="l"/>
             <a:r>
-              <a:rPr sz="3000" b="1">
+              <a:rPr sz="3600" b="1">
                 <a:solidFill>
                   <a:srgbClr val="C76B8A"/>
                 </a:solidFill>
@@ -3210,8 +3210,8 @@
         </p:nvSpPr>
         <p:spPr>
           <a:xfrm>
-            <a:off x="457200" y="1143000"/>
-            <a:ext cx="11430000" cy="640080"/>
+            <a:off x="457200" y="1234440"/>
+            <a:ext cx="11430000" cy="731520"/>
           </a:xfrm>
           <a:prstGeom prst="rect">
             <a:avLst/>
@@ -3226,7 +3226,7 @@
           <a:p>
             <a:pPr algn="l"/>
             <a:r>
-              <a:rPr sz="1800" b="0">
+              <a:rPr sz="2000" b="0">
                 <a:solidFill>
                   <a:srgbClr val="FCF6F0"/>
                 </a:solidFill>
@@ -3245,8 +3245,8 @@
         </p:nvSpPr>
         <p:spPr>
           <a:xfrm>
-            <a:off x="548640" y="1828800"/>
-            <a:ext cx="10972800" cy="2743200"/>
+            <a:off x="457200" y="6492240"/>
+            <a:ext cx="9601200" cy="320040"/>
           </a:xfrm>
           <a:prstGeom prst="rect">
             <a:avLst/>
@@ -3261,13 +3261,13 @@
           <a:p>
             <a:pPr algn="l"/>
             <a:r>
-              <a:rPr sz="1400" b="0">
-                <a:solidFill>
-                  <a:srgbClr val="FCF6F0"/>
-                </a:solidFill>
-                <a:latin typeface="Yu Gothic"/>
-              </a:rPr>
-              <a:t>家庭医療科 勉強会 / 2026-04-09 / 20分</a:t>
+              <a:rPr sz="1000" b="0">
+                <a:solidFill>
+                  <a:srgbClr val="A08A9C"/>
+                </a:solidFill>
+                <a:latin typeface="Yu Gothic"/>
+              </a:rPr>
+              <a:t>藪医者の学び / 2026-04-09 / 行動経済学×メンタルヘルス</a:t>
             </a:r>
           </a:p>
         </p:txBody>
@@ -3280,7 +3280,7 @@
         </p:nvSpPr>
         <p:spPr>
           <a:xfrm>
-            <a:off x="11247120" y="6446520"/>
+            <a:off x="11247120" y="6492240"/>
             <a:ext cx="914400" cy="320040"/>
           </a:xfrm>
           <a:prstGeom prst="rect">
@@ -3296,55 +3296,20 @@
           <a:p>
             <a:pPr algn="r"/>
             <a:r>
-              <a:rPr sz="900" b="0">
+              <a:rPr sz="1000" b="0">
                 <a:solidFill>
                   <a:srgbClr val="A08A9C"/>
                 </a:solidFill>
                 <a:latin typeface="Yu Gothic"/>
               </a:rPr>
               <a:t>1 / 29</a:t>
-            </a:r>
-          </a:p>
-        </p:txBody>
-      </p:sp>
-      <p:sp>
-        <p:nvSpPr>
-          <p:cNvPr id="7" name="TextBox 6"/>
-          <p:cNvSpPr txBox="1"/>
-          <p:nvPr/>
-        </p:nvSpPr>
-        <p:spPr>
-          <a:xfrm>
-            <a:off x="457200" y="6446520"/>
-            <a:ext cx="7315200" cy="320040"/>
-          </a:xfrm>
-          <a:prstGeom prst="rect">
-            <a:avLst/>
-          </a:prstGeom>
-          <a:noFill/>
-        </p:spPr>
-        <p:txBody>
-          <a:bodyPr wrap="square" lIns="45720" rIns="45720" tIns="27432" bIns="27432">
-            <a:spAutoFit/>
-          </a:bodyPr>
-          <a:lstStyle/>
-          <a:p>
-            <a:pPr algn="l"/>
-            <a:r>
-              <a:rPr sz="900" b="0">
-                <a:solidFill>
-                  <a:srgbClr val="A08A9C"/>
-                </a:solidFill>
-                <a:latin typeface="Yu Gothic"/>
-              </a:rPr>
-              <a:t>家庭医療科 勉強会 / 2026-04-09</a:t>
             </a:r>
           </a:p>
         </p:txBody>
       </p:sp>
       <p:pic>
         <p:nvPicPr>
-          <p:cNvPr id="8" name="Picture 7" descr="image.png"/>
+          <p:cNvPr id="7" name="Picture 6" descr="image.png"/>
           <p:cNvPicPr>
             <a:picLocks noChangeAspect="1"/>
           </p:cNvPicPr>
@@ -3358,8 +3323,8 @@
         </p:blipFill>
         <p:spPr>
           <a:xfrm>
-            <a:off x="10424160" y="5212080"/>
-            <a:ext cx="1280160" cy="1280160"/>
+            <a:off x="10424160" y="5120640"/>
+            <a:ext cx="1371600" cy="1371600"/>
           </a:xfrm>
           <a:prstGeom prst="rect">
             <a:avLst/>
@@ -3368,13 +3333,13 @@
       </p:pic>
       <p:sp>
         <p:nvSpPr>
-          <p:cNvPr id="9" name="TextBox 8"/>
-          <p:cNvSpPr txBox="1"/>
-          <p:nvPr/>
-        </p:nvSpPr>
-        <p:spPr>
-          <a:xfrm>
-            <a:off x="10424160" y="4983480"/>
+          <p:cNvPr id="8" name="TextBox 7"/>
+          <p:cNvSpPr txBox="1"/>
+          <p:nvPr/>
+        </p:nvSpPr>
+        <p:spPr>
+          <a:xfrm>
+            <a:off x="10424160" y="4892040"/>
             <a:ext cx="1463040" cy="228600"/>
           </a:xfrm>
           <a:prstGeom prst="rect">
@@ -3390,7 +3355,7 @@
           <a:p>
             <a:pPr algn="l"/>
             <a:r>
-              <a:rPr sz="800" b="1">
+              <a:rPr sz="900" b="1">
                 <a:solidFill>
                   <a:srgbClr val="FCF6F0"/>
                 </a:solidFill>
@@ -3479,7 +3444,7 @@
         <p:spPr>
           <a:xfrm>
             <a:off x="457200" y="365760"/>
-            <a:ext cx="11430000" cy="822960"/>
+            <a:ext cx="11430000" cy="914400"/>
           </a:xfrm>
           <a:prstGeom prst="rect">
             <a:avLst/>
@@ -3494,7 +3459,7 @@
           <a:p>
             <a:pPr algn="l"/>
             <a:r>
-              <a:rPr sz="2600" b="1">
+              <a:rPr sz="3000" b="1">
                 <a:solidFill>
                   <a:srgbClr val="3D1E36"/>
                 </a:solidFill>
@@ -3513,8 +3478,8 @@
         </p:nvSpPr>
         <p:spPr>
           <a:xfrm>
-            <a:off x="548640" y="1371600"/>
-            <a:ext cx="10972800" cy="3200400"/>
+            <a:off x="548640" y="1463040"/>
+            <a:ext cx="10972800" cy="3566160"/>
           </a:xfrm>
           <a:prstGeom prst="rect">
             <a:avLst/>
@@ -3529,7 +3494,7 @@
           <a:p>
             <a:pPr algn="l"/>
             <a:r>
-              <a:rPr sz="1400" b="0">
+              <a:rPr sz="1800" b="0">
                 <a:solidFill>
                   <a:srgbClr val="2E1A2B"/>
                 </a:solidFill>
@@ -3548,8 +3513,8 @@
         </p:nvSpPr>
         <p:spPr>
           <a:xfrm>
-            <a:off x="548640" y="2743200"/>
-            <a:ext cx="10972800" cy="2286000"/>
+            <a:off x="548640" y="3108960"/>
+            <a:ext cx="10972800" cy="2377439"/>
           </a:xfrm>
           <a:prstGeom prst="rect">
             <a:avLst/>
@@ -3563,7 +3528,7 @@
           <a:lstStyle/>
           <a:p>
             <a:r>
-              <a:rPr sz="1400">
+              <a:rPr sz="1800">
                 <a:solidFill>
                   <a:srgbClr val="2E1A2B"/>
                 </a:solidFill>
@@ -3574,7 +3539,7 @@
           </a:p>
           <a:p>
             <a:r>
-              <a:rPr sz="1400">
+              <a:rPr sz="1800">
                 <a:solidFill>
                   <a:srgbClr val="2E1A2B"/>
                 </a:solidFill>
@@ -3585,7 +3550,7 @@
           </a:p>
           <a:p>
             <a:r>
-              <a:rPr sz="1400">
+              <a:rPr sz="1800">
                 <a:solidFill>
                   <a:srgbClr val="2E1A2B"/>
                 </a:solidFill>
@@ -3604,7 +3569,42 @@
         </p:nvSpPr>
         <p:spPr>
           <a:xfrm>
-            <a:off x="11247120" y="6446520"/>
+            <a:off x="457200" y="6492240"/>
+            <a:ext cx="9601200" cy="320040"/>
+          </a:xfrm>
+          <a:prstGeom prst="rect">
+            <a:avLst/>
+          </a:prstGeom>
+          <a:noFill/>
+        </p:spPr>
+        <p:txBody>
+          <a:bodyPr wrap="square" lIns="45720" rIns="45720" tIns="27432" bIns="27432">
+            <a:spAutoFit/>
+          </a:bodyPr>
+          <a:lstStyle/>
+          <a:p>
+            <a:pPr algn="l"/>
+            <a:r>
+              <a:rPr sz="1000" b="0">
+                <a:solidFill>
+                  <a:srgbClr val="A08A9C"/>
+                </a:solidFill>
+                <a:latin typeface="Yu Gothic"/>
+              </a:rPr>
+              <a:t>藪医者の学び / 2026-04-09 / 行動経済学×メンタルヘルス</a:t>
+            </a:r>
+          </a:p>
+        </p:txBody>
+      </p:sp>
+      <p:sp>
+        <p:nvSpPr>
+          <p:cNvPr id="7" name="TextBox 6"/>
+          <p:cNvSpPr txBox="1"/>
+          <p:nvPr/>
+        </p:nvSpPr>
+        <p:spPr>
+          <a:xfrm>
+            <a:off x="11247120" y="6492240"/>
             <a:ext cx="914400" cy="320040"/>
           </a:xfrm>
           <a:prstGeom prst="rect">
@@ -3620,48 +3620,13 @@
           <a:p>
             <a:pPr algn="r"/>
             <a:r>
-              <a:rPr sz="900" b="0">
+              <a:rPr sz="1000" b="0">
                 <a:solidFill>
                   <a:srgbClr val="A08A9C"/>
                 </a:solidFill>
                 <a:latin typeface="Yu Gothic"/>
               </a:rPr>
               <a:t>10 / 29</a:t>
-            </a:r>
-          </a:p>
-        </p:txBody>
-      </p:sp>
-      <p:sp>
-        <p:nvSpPr>
-          <p:cNvPr id="7" name="TextBox 6"/>
-          <p:cNvSpPr txBox="1"/>
-          <p:nvPr/>
-        </p:nvSpPr>
-        <p:spPr>
-          <a:xfrm>
-            <a:off x="457200" y="6446520"/>
-            <a:ext cx="7315200" cy="320040"/>
-          </a:xfrm>
-          <a:prstGeom prst="rect">
-            <a:avLst/>
-          </a:prstGeom>
-          <a:noFill/>
-        </p:spPr>
-        <p:txBody>
-          <a:bodyPr wrap="square" lIns="45720" rIns="45720" tIns="27432" bIns="27432">
-            <a:spAutoFit/>
-          </a:bodyPr>
-          <a:lstStyle/>
-          <a:p>
-            <a:pPr algn="l"/>
-            <a:r>
-              <a:rPr sz="900" b="0">
-                <a:solidFill>
-                  <a:srgbClr val="A08A9C"/>
-                </a:solidFill>
-                <a:latin typeface="Yu Gothic"/>
-              </a:rPr>
-              <a:t>家庭医療科 勉強会 / 2026-04-09</a:t>
             </a:r>
           </a:p>
         </p:txBody>
@@ -3744,7 +3709,7 @@
         <p:spPr>
           <a:xfrm>
             <a:off x="457200" y="365760"/>
-            <a:ext cx="11430000" cy="822960"/>
+            <a:ext cx="11430000" cy="914400"/>
           </a:xfrm>
           <a:prstGeom prst="rect">
             <a:avLst/>
@@ -3759,7 +3724,7 @@
           <a:p>
             <a:pPr algn="l"/>
             <a:r>
-              <a:rPr sz="2600" b="1">
+              <a:rPr sz="3000" b="1">
                 <a:solidFill>
                   <a:srgbClr val="3D1E36"/>
                 </a:solidFill>
@@ -3778,8 +3743,8 @@
         </p:nvSpPr>
         <p:spPr>
           <a:xfrm>
-            <a:off x="548640" y="1371600"/>
-            <a:ext cx="10972800" cy="3200400"/>
+            <a:off x="548640" y="1463040"/>
+            <a:ext cx="10972800" cy="3566160"/>
           </a:xfrm>
           <a:prstGeom prst="rect">
             <a:avLst/>
@@ -3794,7 +3759,7 @@
           <a:p>
             <a:pPr algn="l"/>
             <a:r>
-              <a:rPr sz="1400" b="0">
+              <a:rPr sz="1800" b="0">
                 <a:solidFill>
                   <a:srgbClr val="2E1A2B"/>
                 </a:solidFill>
@@ -3813,8 +3778,8 @@
         </p:nvSpPr>
         <p:spPr>
           <a:xfrm>
-            <a:off x="548640" y="2743200"/>
-            <a:ext cx="10972800" cy="2286000"/>
+            <a:off x="548640" y="3108960"/>
+            <a:ext cx="10972800" cy="2377439"/>
           </a:xfrm>
           <a:prstGeom prst="rect">
             <a:avLst/>
@@ -3828,7 +3793,7 @@
           <a:lstStyle/>
           <a:p>
             <a:r>
-              <a:rPr sz="1400">
+              <a:rPr sz="1800">
                 <a:solidFill>
                   <a:srgbClr val="2E1A2B"/>
                 </a:solidFill>
@@ -3839,7 +3804,7 @@
           </a:p>
           <a:p>
             <a:r>
-              <a:rPr sz="1400">
+              <a:rPr sz="1800">
                 <a:solidFill>
                   <a:srgbClr val="2E1A2B"/>
                 </a:solidFill>
@@ -3850,7 +3815,7 @@
           </a:p>
           <a:p>
             <a:r>
-              <a:rPr sz="1400">
+              <a:rPr sz="1800">
                 <a:solidFill>
                   <a:srgbClr val="2E1A2B"/>
                 </a:solidFill>
@@ -3861,7 +3826,7 @@
           </a:p>
           <a:p>
             <a:r>
-              <a:rPr sz="1400">
+              <a:rPr sz="1800">
                 <a:solidFill>
                   <a:srgbClr val="2E1A2B"/>
                 </a:solidFill>
@@ -3880,7 +3845,42 @@
         </p:nvSpPr>
         <p:spPr>
           <a:xfrm>
-            <a:off x="11247120" y="6446520"/>
+            <a:off x="457200" y="6492240"/>
+            <a:ext cx="9601200" cy="320040"/>
+          </a:xfrm>
+          <a:prstGeom prst="rect">
+            <a:avLst/>
+          </a:prstGeom>
+          <a:noFill/>
+        </p:spPr>
+        <p:txBody>
+          <a:bodyPr wrap="square" lIns="45720" rIns="45720" tIns="27432" bIns="27432">
+            <a:spAutoFit/>
+          </a:bodyPr>
+          <a:lstStyle/>
+          <a:p>
+            <a:pPr algn="l"/>
+            <a:r>
+              <a:rPr sz="1000" b="0">
+                <a:solidFill>
+                  <a:srgbClr val="A08A9C"/>
+                </a:solidFill>
+                <a:latin typeface="Yu Gothic"/>
+              </a:rPr>
+              <a:t>藪医者の学び / 2026-04-09 / 行動経済学×メンタルヘルス</a:t>
+            </a:r>
+          </a:p>
+        </p:txBody>
+      </p:sp>
+      <p:sp>
+        <p:nvSpPr>
+          <p:cNvPr id="7" name="TextBox 6"/>
+          <p:cNvSpPr txBox="1"/>
+          <p:nvPr/>
+        </p:nvSpPr>
+        <p:spPr>
+          <a:xfrm>
+            <a:off x="11247120" y="6492240"/>
             <a:ext cx="914400" cy="320040"/>
           </a:xfrm>
           <a:prstGeom prst="rect">
@@ -3896,48 +3896,13 @@
           <a:p>
             <a:pPr algn="r"/>
             <a:r>
-              <a:rPr sz="900" b="0">
+              <a:rPr sz="1000" b="0">
                 <a:solidFill>
                   <a:srgbClr val="A08A9C"/>
                 </a:solidFill>
                 <a:latin typeface="Yu Gothic"/>
               </a:rPr>
               <a:t>11 / 29</a:t>
-            </a:r>
-          </a:p>
-        </p:txBody>
-      </p:sp>
-      <p:sp>
-        <p:nvSpPr>
-          <p:cNvPr id="7" name="TextBox 6"/>
-          <p:cNvSpPr txBox="1"/>
-          <p:nvPr/>
-        </p:nvSpPr>
-        <p:spPr>
-          <a:xfrm>
-            <a:off x="457200" y="6446520"/>
-            <a:ext cx="7315200" cy="320040"/>
-          </a:xfrm>
-          <a:prstGeom prst="rect">
-            <a:avLst/>
-          </a:prstGeom>
-          <a:noFill/>
-        </p:spPr>
-        <p:txBody>
-          <a:bodyPr wrap="square" lIns="45720" rIns="45720" tIns="27432" bIns="27432">
-            <a:spAutoFit/>
-          </a:bodyPr>
-          <a:lstStyle/>
-          <a:p>
-            <a:pPr algn="l"/>
-            <a:r>
-              <a:rPr sz="900" b="0">
-                <a:solidFill>
-                  <a:srgbClr val="A08A9C"/>
-                </a:solidFill>
-                <a:latin typeface="Yu Gothic"/>
-              </a:rPr>
-              <a:t>家庭医療科 勉強会 / 2026-04-09</a:t>
             </a:r>
           </a:p>
         </p:txBody>
@@ -4020,7 +3985,7 @@
         <p:spPr>
           <a:xfrm>
             <a:off x="457200" y="365760"/>
-            <a:ext cx="11430000" cy="822960"/>
+            <a:ext cx="11430000" cy="914400"/>
           </a:xfrm>
           <a:prstGeom prst="rect">
             <a:avLst/>
@@ -4035,7 +4000,7 @@
           <a:p>
             <a:pPr algn="l"/>
             <a:r>
-              <a:rPr sz="2600" b="1">
+              <a:rPr sz="3000" b="1">
                 <a:solidFill>
                   <a:srgbClr val="3D1E36"/>
                 </a:solidFill>
@@ -4054,8 +4019,8 @@
         </p:nvSpPr>
         <p:spPr>
           <a:xfrm>
-            <a:off x="548640" y="1371600"/>
-            <a:ext cx="10972800" cy="3200400"/>
+            <a:off x="548640" y="1463040"/>
+            <a:ext cx="10972800" cy="3566160"/>
           </a:xfrm>
           <a:prstGeom prst="rect">
             <a:avLst/>
@@ -4070,7 +4035,7 @@
           <a:p>
             <a:pPr algn="l"/>
             <a:r>
-              <a:rPr sz="1400" b="0">
+              <a:rPr sz="1800" b="0">
                 <a:solidFill>
                   <a:srgbClr val="2E1A2B"/>
                 </a:solidFill>
@@ -4080,7 +4045,7 @@
             </a:r>
             <a:br/>
             <a:r>
-              <a:rPr sz="1400" b="0">
+              <a:rPr sz="1800" b="0">
                 <a:solidFill>
                   <a:srgbClr val="2E1A2B"/>
                 </a:solidFill>
@@ -4090,7 +4055,7 @@
             </a:r>
             <a:br/>
             <a:r>
-              <a:rPr sz="1400" b="0">
+              <a:rPr sz="1800" b="0">
                 <a:solidFill>
                   <a:srgbClr val="2E1A2B"/>
                 </a:solidFill>
@@ -4100,7 +4065,7 @@
             </a:r>
             <a:br/>
             <a:r>
-              <a:rPr sz="1400" b="0">
+              <a:rPr sz="1800" b="0">
                 <a:solidFill>
                   <a:srgbClr val="2E1A2B"/>
                 </a:solidFill>
@@ -4110,7 +4075,7 @@
             </a:r>
             <a:br/>
             <a:r>
-              <a:rPr sz="1400" b="0">
+              <a:rPr sz="1800" b="0">
                 <a:solidFill>
                   <a:srgbClr val="2E1A2B"/>
                 </a:solidFill>
@@ -4120,7 +4085,7 @@
             </a:r>
             <a:br/>
             <a:r>
-              <a:rPr sz="1400" b="0">
+              <a:rPr sz="1800" b="0">
                 <a:solidFill>
                   <a:srgbClr val="2E1A2B"/>
                 </a:solidFill>
@@ -4130,7 +4095,7 @@
             </a:r>
             <a:br/>
             <a:r>
-              <a:rPr sz="1400" b="0">
+              <a:rPr sz="1800" b="0">
                 <a:solidFill>
                   <a:srgbClr val="2E1A2B"/>
                 </a:solidFill>
@@ -4140,7 +4105,7 @@
             </a:r>
             <a:br/>
             <a:r>
-              <a:rPr sz="1400" b="0">
+              <a:rPr sz="1800" b="0">
                 <a:solidFill>
                   <a:srgbClr val="2E1A2B"/>
                 </a:solidFill>
@@ -4159,7 +4124,42 @@
         </p:nvSpPr>
         <p:spPr>
           <a:xfrm>
-            <a:off x="11247120" y="6446520"/>
+            <a:off x="457200" y="6492240"/>
+            <a:ext cx="9601200" cy="320040"/>
+          </a:xfrm>
+          <a:prstGeom prst="rect">
+            <a:avLst/>
+          </a:prstGeom>
+          <a:noFill/>
+        </p:spPr>
+        <p:txBody>
+          <a:bodyPr wrap="square" lIns="45720" rIns="45720" tIns="27432" bIns="27432">
+            <a:spAutoFit/>
+          </a:bodyPr>
+          <a:lstStyle/>
+          <a:p>
+            <a:pPr algn="l"/>
+            <a:r>
+              <a:rPr sz="1000" b="0">
+                <a:solidFill>
+                  <a:srgbClr val="A08A9C"/>
+                </a:solidFill>
+                <a:latin typeface="Yu Gothic"/>
+              </a:rPr>
+              <a:t>藪医者の学び / 2026-04-09 / 行動経済学×メンタルヘルス</a:t>
+            </a:r>
+          </a:p>
+        </p:txBody>
+      </p:sp>
+      <p:sp>
+        <p:nvSpPr>
+          <p:cNvPr id="6" name="TextBox 5"/>
+          <p:cNvSpPr txBox="1"/>
+          <p:nvPr/>
+        </p:nvSpPr>
+        <p:spPr>
+          <a:xfrm>
+            <a:off x="11247120" y="6492240"/>
             <a:ext cx="914400" cy="320040"/>
           </a:xfrm>
           <a:prstGeom prst="rect">
@@ -4175,48 +4175,13 @@
           <a:p>
             <a:pPr algn="r"/>
             <a:r>
-              <a:rPr sz="900" b="0">
+              <a:rPr sz="1000" b="0">
                 <a:solidFill>
                   <a:srgbClr val="A08A9C"/>
                 </a:solidFill>
                 <a:latin typeface="Yu Gothic"/>
               </a:rPr>
               <a:t>12 / 29</a:t>
-            </a:r>
-          </a:p>
-        </p:txBody>
-      </p:sp>
-      <p:sp>
-        <p:nvSpPr>
-          <p:cNvPr id="6" name="TextBox 5"/>
-          <p:cNvSpPr txBox="1"/>
-          <p:nvPr/>
-        </p:nvSpPr>
-        <p:spPr>
-          <a:xfrm>
-            <a:off x="457200" y="6446520"/>
-            <a:ext cx="7315200" cy="320040"/>
-          </a:xfrm>
-          <a:prstGeom prst="rect">
-            <a:avLst/>
-          </a:prstGeom>
-          <a:noFill/>
-        </p:spPr>
-        <p:txBody>
-          <a:bodyPr wrap="square" lIns="45720" rIns="45720" tIns="27432" bIns="27432">
-            <a:spAutoFit/>
-          </a:bodyPr>
-          <a:lstStyle/>
-          <a:p>
-            <a:pPr algn="l"/>
-            <a:r>
-              <a:rPr sz="900" b="0">
-                <a:solidFill>
-                  <a:srgbClr val="A08A9C"/>
-                </a:solidFill>
-                <a:latin typeface="Yu Gothic"/>
-              </a:rPr>
-              <a:t>家庭医療科 勉強会 / 2026-04-09</a:t>
             </a:r>
           </a:p>
         </p:txBody>
@@ -4299,7 +4264,7 @@
         <p:spPr>
           <a:xfrm>
             <a:off x="457200" y="365760"/>
-            <a:ext cx="11430000" cy="822960"/>
+            <a:ext cx="11430000" cy="914400"/>
           </a:xfrm>
           <a:prstGeom prst="rect">
             <a:avLst/>
@@ -4314,7 +4279,7 @@
           <a:p>
             <a:pPr algn="l"/>
             <a:r>
-              <a:rPr sz="2600" b="1">
+              <a:rPr sz="3000" b="1">
                 <a:solidFill>
                   <a:srgbClr val="3D1E36"/>
                 </a:solidFill>
@@ -4334,8 +4299,8 @@
           <p:nvPr/>
         </p:nvGraphicFramePr>
         <p:xfrm>
-          <a:off x="548640" y="1371600"/>
-          <a:ext cx="10972800" cy="2011680"/>
+          <a:off x="548640" y="1463040"/>
+          <a:ext cx="10972800" cy="2194560"/>
         </p:xfrm>
         <a:graphic>
           <a:graphicData uri="http://schemas.openxmlformats.org/drawingml/2006/table">
@@ -4347,14 +4312,14 @@
                 <a:gridCol w="5486400"/>
                 <a:gridCol w="5486400"/>
               </a:tblGrid>
-              <a:tr h="502920">
+              <a:tr h="548640">
                 <a:tc>
                   <a:txBody>
                     <a:bodyPr/>
                     <a:lstStyle/>
                     <a:p>
                       <a:r>
-                        <a:rPr sz="1200" b="1">
+                        <a:rPr sz="1400" b="1">
                           <a:solidFill>
                             <a:srgbClr val="FCF6F0"/>
                           </a:solidFill>
@@ -4376,7 +4341,7 @@
                     <a:lstStyle/>
                     <a:p>
                       <a:r>
-                        <a:rPr sz="1200" b="1">
+                        <a:rPr sz="1400" b="1">
                           <a:solidFill>
                             <a:srgbClr val="FCF6F0"/>
                           </a:solidFill>
@@ -4393,14 +4358,14 @@
                   </a:tcPr>
                 </a:tc>
               </a:tr>
-              <a:tr h="502920">
+              <a:tr h="548640">
                 <a:tc>
                   <a:txBody>
                     <a:bodyPr/>
                     <a:lstStyle/>
                     <a:p>
                       <a:r>
-                        <a:rPr sz="1200">
+                        <a:rPr sz="1400">
                           <a:solidFill>
                             <a:srgbClr val="2E1A2B"/>
                           </a:solidFill>
@@ -4422,7 +4387,7 @@
                     <a:lstStyle/>
                     <a:p>
                       <a:r>
-                        <a:rPr sz="1200">
+                        <a:rPr sz="1400">
                           <a:solidFill>
                             <a:srgbClr val="2E1A2B"/>
                           </a:solidFill>
@@ -4439,14 +4404,14 @@
                   </a:tcPr>
                 </a:tc>
               </a:tr>
-              <a:tr h="502920">
+              <a:tr h="548640">
                 <a:tc>
                   <a:txBody>
                     <a:bodyPr/>
                     <a:lstStyle/>
                     <a:p>
                       <a:r>
-                        <a:rPr sz="1200">
+                        <a:rPr sz="1400">
                           <a:solidFill>
                             <a:srgbClr val="2E1A2B"/>
                           </a:solidFill>
@@ -4468,7 +4433,7 @@
                     <a:lstStyle/>
                     <a:p>
                       <a:r>
-                        <a:rPr sz="1200">
+                        <a:rPr sz="1400">
                           <a:solidFill>
                             <a:srgbClr val="2E1A2B"/>
                           </a:solidFill>
@@ -4485,14 +4450,14 @@
                   </a:tcPr>
                 </a:tc>
               </a:tr>
-              <a:tr h="502920">
+              <a:tr h="548640">
                 <a:tc>
                   <a:txBody>
                     <a:bodyPr/>
                     <a:lstStyle/>
                     <a:p>
                       <a:r>
-                        <a:rPr sz="1200">
+                        <a:rPr sz="1400">
                           <a:solidFill>
                             <a:srgbClr val="2E1A2B"/>
                           </a:solidFill>
@@ -4514,7 +4479,7 @@
                     <a:lstStyle/>
                     <a:p>
                       <a:r>
-                        <a:rPr sz="1200">
+                        <a:rPr sz="1400">
                           <a:solidFill>
                             <a:srgbClr val="2E1A2B"/>
                           </a:solidFill>
@@ -4543,7 +4508,42 @@
         </p:nvSpPr>
         <p:spPr>
           <a:xfrm>
-            <a:off x="11247120" y="6446520"/>
+            <a:off x="457200" y="6492240"/>
+            <a:ext cx="9601200" cy="320040"/>
+          </a:xfrm>
+          <a:prstGeom prst="rect">
+            <a:avLst/>
+          </a:prstGeom>
+          <a:noFill/>
+        </p:spPr>
+        <p:txBody>
+          <a:bodyPr wrap="square" lIns="45720" rIns="45720" tIns="27432" bIns="27432">
+            <a:spAutoFit/>
+          </a:bodyPr>
+          <a:lstStyle/>
+          <a:p>
+            <a:pPr algn="l"/>
+            <a:r>
+              <a:rPr sz="1000" b="0">
+                <a:solidFill>
+                  <a:srgbClr val="A08A9C"/>
+                </a:solidFill>
+                <a:latin typeface="Yu Gothic"/>
+              </a:rPr>
+              <a:t>藪医者の学び / 2026-04-09 / 行動経済学×メンタルヘルス</a:t>
+            </a:r>
+          </a:p>
+        </p:txBody>
+      </p:sp>
+      <p:sp>
+        <p:nvSpPr>
+          <p:cNvPr id="6" name="TextBox 5"/>
+          <p:cNvSpPr txBox="1"/>
+          <p:nvPr/>
+        </p:nvSpPr>
+        <p:spPr>
+          <a:xfrm>
+            <a:off x="11247120" y="6492240"/>
             <a:ext cx="914400" cy="320040"/>
           </a:xfrm>
           <a:prstGeom prst="rect">
@@ -4559,48 +4559,13 @@
           <a:p>
             <a:pPr algn="r"/>
             <a:r>
-              <a:rPr sz="900" b="0">
+              <a:rPr sz="1000" b="0">
                 <a:solidFill>
                   <a:srgbClr val="A08A9C"/>
                 </a:solidFill>
                 <a:latin typeface="Yu Gothic"/>
               </a:rPr>
               <a:t>13 / 29</a:t>
-            </a:r>
-          </a:p>
-        </p:txBody>
-      </p:sp>
-      <p:sp>
-        <p:nvSpPr>
-          <p:cNvPr id="6" name="TextBox 5"/>
-          <p:cNvSpPr txBox="1"/>
-          <p:nvPr/>
-        </p:nvSpPr>
-        <p:spPr>
-          <a:xfrm>
-            <a:off x="457200" y="6446520"/>
-            <a:ext cx="7315200" cy="320040"/>
-          </a:xfrm>
-          <a:prstGeom prst="rect">
-            <a:avLst/>
-          </a:prstGeom>
-          <a:noFill/>
-        </p:spPr>
-        <p:txBody>
-          <a:bodyPr wrap="square" lIns="45720" rIns="45720" tIns="27432" bIns="27432">
-            <a:spAutoFit/>
-          </a:bodyPr>
-          <a:lstStyle/>
-          <a:p>
-            <a:pPr algn="l"/>
-            <a:r>
-              <a:rPr sz="900" b="0">
-                <a:solidFill>
-                  <a:srgbClr val="A08A9C"/>
-                </a:solidFill>
-                <a:latin typeface="Yu Gothic"/>
-              </a:rPr>
-              <a:t>家庭医療科 勉強会 / 2026-04-09</a:t>
             </a:r>
           </a:p>
         </p:txBody>
@@ -4683,7 +4648,7 @@
         <p:spPr>
           <a:xfrm>
             <a:off x="457200" y="365760"/>
-            <a:ext cx="11430000" cy="822960"/>
+            <a:ext cx="11430000" cy="914400"/>
           </a:xfrm>
           <a:prstGeom prst="rect">
             <a:avLst/>
@@ -4698,7 +4663,7 @@
           <a:p>
             <a:pPr algn="l"/>
             <a:r>
-              <a:rPr sz="2600" b="1">
+              <a:rPr sz="3000" b="1">
                 <a:solidFill>
                   <a:srgbClr val="C76B8A"/>
                 </a:solidFill>
@@ -4717,7 +4682,42 @@
         </p:nvSpPr>
         <p:spPr>
           <a:xfrm>
-            <a:off x="11247120" y="6446520"/>
+            <a:off x="457200" y="6492240"/>
+            <a:ext cx="9601200" cy="320040"/>
+          </a:xfrm>
+          <a:prstGeom prst="rect">
+            <a:avLst/>
+          </a:prstGeom>
+          <a:noFill/>
+        </p:spPr>
+        <p:txBody>
+          <a:bodyPr wrap="square" lIns="45720" rIns="45720" tIns="27432" bIns="27432">
+            <a:spAutoFit/>
+          </a:bodyPr>
+          <a:lstStyle/>
+          <a:p>
+            <a:pPr algn="l"/>
+            <a:r>
+              <a:rPr sz="1000" b="0">
+                <a:solidFill>
+                  <a:srgbClr val="A08A9C"/>
+                </a:solidFill>
+                <a:latin typeface="Yu Gothic"/>
+              </a:rPr>
+              <a:t>藪医者の学び / 2026-04-09 / 行動経済学×メンタルヘルス</a:t>
+            </a:r>
+          </a:p>
+        </p:txBody>
+      </p:sp>
+      <p:sp>
+        <p:nvSpPr>
+          <p:cNvPr id="5" name="TextBox 4"/>
+          <p:cNvSpPr txBox="1"/>
+          <p:nvPr/>
+        </p:nvSpPr>
+        <p:spPr>
+          <a:xfrm>
+            <a:off x="11247120" y="6492240"/>
             <a:ext cx="914400" cy="320040"/>
           </a:xfrm>
           <a:prstGeom prst="rect">
@@ -4733,48 +4733,13 @@
           <a:p>
             <a:pPr algn="r"/>
             <a:r>
-              <a:rPr sz="900" b="0">
+              <a:rPr sz="1000" b="0">
                 <a:solidFill>
                   <a:srgbClr val="A08A9C"/>
                 </a:solidFill>
                 <a:latin typeface="Yu Gothic"/>
               </a:rPr>
               <a:t>14 / 29</a:t>
-            </a:r>
-          </a:p>
-        </p:txBody>
-      </p:sp>
-      <p:sp>
-        <p:nvSpPr>
-          <p:cNvPr id="5" name="TextBox 4"/>
-          <p:cNvSpPr txBox="1"/>
-          <p:nvPr/>
-        </p:nvSpPr>
-        <p:spPr>
-          <a:xfrm>
-            <a:off x="457200" y="6446520"/>
-            <a:ext cx="7315200" cy="320040"/>
-          </a:xfrm>
-          <a:prstGeom prst="rect">
-            <a:avLst/>
-          </a:prstGeom>
-          <a:noFill/>
-        </p:spPr>
-        <p:txBody>
-          <a:bodyPr wrap="square" lIns="45720" rIns="45720" tIns="27432" bIns="27432">
-            <a:spAutoFit/>
-          </a:bodyPr>
-          <a:lstStyle/>
-          <a:p>
-            <a:pPr algn="l"/>
-            <a:r>
-              <a:rPr sz="900" b="0">
-                <a:solidFill>
-                  <a:srgbClr val="A08A9C"/>
-                </a:solidFill>
-                <a:latin typeface="Yu Gothic"/>
-              </a:rPr>
-              <a:t>家庭医療科 勉強会 / 2026-04-09</a:t>
             </a:r>
           </a:p>
         </p:txBody>
@@ -4857,7 +4822,7 @@
         <p:spPr>
           <a:xfrm>
             <a:off x="457200" y="365760"/>
-            <a:ext cx="11430000" cy="822960"/>
+            <a:ext cx="11430000" cy="914400"/>
           </a:xfrm>
           <a:prstGeom prst="rect">
             <a:avLst/>
@@ -4872,7 +4837,7 @@
           <a:p>
             <a:pPr algn="l"/>
             <a:r>
-              <a:rPr sz="2600" b="1">
+              <a:rPr sz="3000" b="1">
                 <a:solidFill>
                   <a:srgbClr val="3D1E36"/>
                 </a:solidFill>
@@ -4892,8 +4857,8 @@
           <p:nvPr/>
         </p:nvGraphicFramePr>
         <p:xfrm>
-          <a:off x="548640" y="1371600"/>
-          <a:ext cx="10972800" cy="2011680"/>
+          <a:off x="548640" y="1463040"/>
+          <a:ext cx="10972800" cy="2194560"/>
         </p:xfrm>
         <a:graphic>
           <a:graphicData uri="http://schemas.openxmlformats.org/drawingml/2006/table">
@@ -4905,14 +4870,14 @@
                 <a:gridCol w="5486400"/>
                 <a:gridCol w="5486400"/>
               </a:tblGrid>
-              <a:tr h="502920">
+              <a:tr h="548640">
                 <a:tc>
                   <a:txBody>
                     <a:bodyPr/>
                     <a:lstStyle/>
                     <a:p>
                       <a:r>
-                        <a:rPr sz="1200" b="1">
+                        <a:rPr sz="1400" b="1">
                           <a:solidFill>
                             <a:srgbClr val="FCF6F0"/>
                           </a:solidFill>
@@ -4934,7 +4899,7 @@
                     <a:lstStyle/>
                     <a:p>
                       <a:r>
-                        <a:rPr sz="1200" b="1">
+                        <a:rPr sz="1400" b="1">
                           <a:solidFill>
                             <a:srgbClr val="FCF6F0"/>
                           </a:solidFill>
@@ -4951,14 +4916,14 @@
                   </a:tcPr>
                 </a:tc>
               </a:tr>
-              <a:tr h="502920">
+              <a:tr h="548640">
                 <a:tc>
                   <a:txBody>
                     <a:bodyPr/>
                     <a:lstStyle/>
                     <a:p>
                       <a:r>
-                        <a:rPr sz="1200">
+                        <a:rPr sz="1400">
                           <a:solidFill>
                             <a:srgbClr val="2E1A2B"/>
                           </a:solidFill>
@@ -4980,7 +4945,7 @@
                     <a:lstStyle/>
                     <a:p>
                       <a:r>
-                        <a:rPr sz="1200">
+                        <a:rPr sz="1400">
                           <a:solidFill>
                             <a:srgbClr val="2E1A2B"/>
                           </a:solidFill>
@@ -4997,14 +4962,14 @@
                   </a:tcPr>
                 </a:tc>
               </a:tr>
-              <a:tr h="502920">
+              <a:tr h="548640">
                 <a:tc>
                   <a:txBody>
                     <a:bodyPr/>
                     <a:lstStyle/>
                     <a:p>
                       <a:r>
-                        <a:rPr sz="1200">
+                        <a:rPr sz="1400">
                           <a:solidFill>
                             <a:srgbClr val="2E1A2B"/>
                           </a:solidFill>
@@ -5026,7 +4991,7 @@
                     <a:lstStyle/>
                     <a:p>
                       <a:r>
-                        <a:rPr sz="1200">
+                        <a:rPr sz="1400">
                           <a:solidFill>
                             <a:srgbClr val="2E1A2B"/>
                           </a:solidFill>
@@ -5043,14 +5008,14 @@
                   </a:tcPr>
                 </a:tc>
               </a:tr>
-              <a:tr h="502920">
+              <a:tr h="548640">
                 <a:tc>
                   <a:txBody>
                     <a:bodyPr/>
                     <a:lstStyle/>
                     <a:p>
                       <a:r>
-                        <a:rPr sz="1200">
+                        <a:rPr sz="1400">
                           <a:solidFill>
                             <a:srgbClr val="2E1A2B"/>
                           </a:solidFill>
@@ -5072,7 +5037,7 @@
                     <a:lstStyle/>
                     <a:p>
                       <a:r>
-                        <a:rPr sz="1200">
+                        <a:rPr sz="1400">
                           <a:solidFill>
                             <a:srgbClr val="2E1A2B"/>
                           </a:solidFill>
@@ -5101,7 +5066,7 @@
         </p:nvSpPr>
         <p:spPr>
           <a:xfrm>
-            <a:off x="548640" y="3657600"/>
+            <a:off x="548640" y="3931920"/>
             <a:ext cx="10972800" cy="1371600"/>
           </a:xfrm>
           <a:prstGeom prst="rect">
@@ -5117,7 +5082,7 @@
           <a:p>
             <a:pPr algn="l"/>
             <a:r>
-              <a:rPr sz="1400" b="0">
+              <a:rPr sz="1800" b="0">
                 <a:solidFill>
                   <a:srgbClr val="2E1A2B"/>
                 </a:solidFill>
@@ -5136,7 +5101,42 @@
         </p:nvSpPr>
         <p:spPr>
           <a:xfrm>
-            <a:off x="11247120" y="6446520"/>
+            <a:off x="457200" y="6492240"/>
+            <a:ext cx="9601200" cy="320040"/>
+          </a:xfrm>
+          <a:prstGeom prst="rect">
+            <a:avLst/>
+          </a:prstGeom>
+          <a:noFill/>
+        </p:spPr>
+        <p:txBody>
+          <a:bodyPr wrap="square" lIns="45720" rIns="45720" tIns="27432" bIns="27432">
+            <a:spAutoFit/>
+          </a:bodyPr>
+          <a:lstStyle/>
+          <a:p>
+            <a:pPr algn="l"/>
+            <a:r>
+              <a:rPr sz="1000" b="0">
+                <a:solidFill>
+                  <a:srgbClr val="A08A9C"/>
+                </a:solidFill>
+                <a:latin typeface="Yu Gothic"/>
+              </a:rPr>
+              <a:t>藪医者の学び / 2026-04-09 / 行動経済学×メンタルヘルス</a:t>
+            </a:r>
+          </a:p>
+        </p:txBody>
+      </p:sp>
+      <p:sp>
+        <p:nvSpPr>
+          <p:cNvPr id="7" name="TextBox 6"/>
+          <p:cNvSpPr txBox="1"/>
+          <p:nvPr/>
+        </p:nvSpPr>
+        <p:spPr>
+          <a:xfrm>
+            <a:off x="11247120" y="6492240"/>
             <a:ext cx="914400" cy="320040"/>
           </a:xfrm>
           <a:prstGeom prst="rect">
@@ -5152,48 +5152,13 @@
           <a:p>
             <a:pPr algn="r"/>
             <a:r>
-              <a:rPr sz="900" b="0">
+              <a:rPr sz="1000" b="0">
                 <a:solidFill>
                   <a:srgbClr val="A08A9C"/>
                 </a:solidFill>
                 <a:latin typeface="Yu Gothic"/>
               </a:rPr>
               <a:t>15 / 29</a:t>
-            </a:r>
-          </a:p>
-        </p:txBody>
-      </p:sp>
-      <p:sp>
-        <p:nvSpPr>
-          <p:cNvPr id="7" name="TextBox 6"/>
-          <p:cNvSpPr txBox="1"/>
-          <p:nvPr/>
-        </p:nvSpPr>
-        <p:spPr>
-          <a:xfrm>
-            <a:off x="457200" y="6446520"/>
-            <a:ext cx="7315200" cy="320040"/>
-          </a:xfrm>
-          <a:prstGeom prst="rect">
-            <a:avLst/>
-          </a:prstGeom>
-          <a:noFill/>
-        </p:spPr>
-        <p:txBody>
-          <a:bodyPr wrap="square" lIns="45720" rIns="45720" tIns="27432" bIns="27432">
-            <a:spAutoFit/>
-          </a:bodyPr>
-          <a:lstStyle/>
-          <a:p>
-            <a:pPr algn="l"/>
-            <a:r>
-              <a:rPr sz="900" b="0">
-                <a:solidFill>
-                  <a:srgbClr val="A08A9C"/>
-                </a:solidFill>
-                <a:latin typeface="Yu Gothic"/>
-              </a:rPr>
-              <a:t>家庭医療科 勉強会 / 2026-04-09</a:t>
             </a:r>
           </a:p>
         </p:txBody>
@@ -5276,7 +5241,7 @@
         <p:spPr>
           <a:xfrm>
             <a:off x="457200" y="365760"/>
-            <a:ext cx="11430000" cy="822960"/>
+            <a:ext cx="11430000" cy="914400"/>
           </a:xfrm>
           <a:prstGeom prst="rect">
             <a:avLst/>
@@ -5291,7 +5256,7 @@
           <a:p>
             <a:pPr algn="l"/>
             <a:r>
-              <a:rPr sz="2600" b="1">
+              <a:rPr sz="3000" b="1">
                 <a:solidFill>
                   <a:srgbClr val="3D1E36"/>
                 </a:solidFill>
@@ -5310,8 +5275,8 @@
         </p:nvSpPr>
         <p:spPr>
           <a:xfrm>
-            <a:off x="548640" y="1371600"/>
-            <a:ext cx="10972800" cy="3200400"/>
+            <a:off x="548640" y="1463040"/>
+            <a:ext cx="10972800" cy="3566160"/>
           </a:xfrm>
           <a:prstGeom prst="rect">
             <a:avLst/>
@@ -5326,7 +5291,7 @@
           <a:p>
             <a:pPr algn="l"/>
             <a:r>
-              <a:rPr sz="1400" b="0">
+              <a:rPr sz="1800" b="0">
                 <a:solidFill>
                   <a:srgbClr val="2E1A2B"/>
                 </a:solidFill>
@@ -5336,7 +5301,7 @@
             </a:r>
             <a:br/>
             <a:r>
-              <a:rPr sz="1400" b="0">
+              <a:rPr sz="1800" b="0">
                 <a:solidFill>
                   <a:srgbClr val="2E1A2B"/>
                 </a:solidFill>
@@ -5346,7 +5311,7 @@
             </a:r>
             <a:br/>
             <a:r>
-              <a:rPr sz="1400" b="0">
+              <a:rPr sz="1800" b="0">
                 <a:solidFill>
                   <a:srgbClr val="2E1A2B"/>
                 </a:solidFill>
@@ -5356,7 +5321,7 @@
             </a:r>
             <a:br/>
             <a:r>
-              <a:rPr sz="1400" b="0">
+              <a:rPr sz="1800" b="0">
                 <a:solidFill>
                   <a:srgbClr val="2E1A2B"/>
                 </a:solidFill>
@@ -5375,7 +5340,42 @@
         </p:nvSpPr>
         <p:spPr>
           <a:xfrm>
-            <a:off x="11247120" y="6446520"/>
+            <a:off x="457200" y="6492240"/>
+            <a:ext cx="9601200" cy="320040"/>
+          </a:xfrm>
+          <a:prstGeom prst="rect">
+            <a:avLst/>
+          </a:prstGeom>
+          <a:noFill/>
+        </p:spPr>
+        <p:txBody>
+          <a:bodyPr wrap="square" lIns="45720" rIns="45720" tIns="27432" bIns="27432">
+            <a:spAutoFit/>
+          </a:bodyPr>
+          <a:lstStyle/>
+          <a:p>
+            <a:pPr algn="l"/>
+            <a:r>
+              <a:rPr sz="1000" b="0">
+                <a:solidFill>
+                  <a:srgbClr val="A08A9C"/>
+                </a:solidFill>
+                <a:latin typeface="Yu Gothic"/>
+              </a:rPr>
+              <a:t>藪医者の学び / 2026-04-09 / 行動経済学×メンタルヘルス</a:t>
+            </a:r>
+          </a:p>
+        </p:txBody>
+      </p:sp>
+      <p:sp>
+        <p:nvSpPr>
+          <p:cNvPr id="6" name="TextBox 5"/>
+          <p:cNvSpPr txBox="1"/>
+          <p:nvPr/>
+        </p:nvSpPr>
+        <p:spPr>
+          <a:xfrm>
+            <a:off x="11247120" y="6492240"/>
             <a:ext cx="914400" cy="320040"/>
           </a:xfrm>
           <a:prstGeom prst="rect">
@@ -5391,48 +5391,13 @@
           <a:p>
             <a:pPr algn="r"/>
             <a:r>
-              <a:rPr sz="900" b="0">
+              <a:rPr sz="1000" b="0">
                 <a:solidFill>
                   <a:srgbClr val="A08A9C"/>
                 </a:solidFill>
                 <a:latin typeface="Yu Gothic"/>
               </a:rPr>
               <a:t>16 / 29</a:t>
-            </a:r>
-          </a:p>
-        </p:txBody>
-      </p:sp>
-      <p:sp>
-        <p:nvSpPr>
-          <p:cNvPr id="6" name="TextBox 5"/>
-          <p:cNvSpPr txBox="1"/>
-          <p:nvPr/>
-        </p:nvSpPr>
-        <p:spPr>
-          <a:xfrm>
-            <a:off x="457200" y="6446520"/>
-            <a:ext cx="7315200" cy="320040"/>
-          </a:xfrm>
-          <a:prstGeom prst="rect">
-            <a:avLst/>
-          </a:prstGeom>
-          <a:noFill/>
-        </p:spPr>
-        <p:txBody>
-          <a:bodyPr wrap="square" lIns="45720" rIns="45720" tIns="27432" bIns="27432">
-            <a:spAutoFit/>
-          </a:bodyPr>
-          <a:lstStyle/>
-          <a:p>
-            <a:pPr algn="l"/>
-            <a:r>
-              <a:rPr sz="900" b="0">
-                <a:solidFill>
-                  <a:srgbClr val="A08A9C"/>
-                </a:solidFill>
-                <a:latin typeface="Yu Gothic"/>
-              </a:rPr>
-              <a:t>家庭医療科 勉強会 / 2026-04-09</a:t>
             </a:r>
           </a:p>
         </p:txBody>
@@ -5515,7 +5480,7 @@
         <p:spPr>
           <a:xfrm>
             <a:off x="457200" y="365760"/>
-            <a:ext cx="11430000" cy="822960"/>
+            <a:ext cx="11430000" cy="914400"/>
           </a:xfrm>
           <a:prstGeom prst="rect">
             <a:avLst/>
@@ -5530,7 +5495,7 @@
           <a:p>
             <a:pPr algn="l"/>
             <a:r>
-              <a:rPr sz="2600" b="1">
+              <a:rPr sz="3000" b="1">
                 <a:solidFill>
                   <a:srgbClr val="3D1E36"/>
                 </a:solidFill>
@@ -5549,8 +5514,8 @@
         </p:nvSpPr>
         <p:spPr>
           <a:xfrm>
-            <a:off x="548640" y="1371600"/>
-            <a:ext cx="10972800" cy="3200400"/>
+            <a:off x="548640" y="1463040"/>
+            <a:ext cx="10972800" cy="3566160"/>
           </a:xfrm>
           <a:prstGeom prst="rect">
             <a:avLst/>
@@ -5565,7 +5530,7 @@
           <a:p>
             <a:pPr algn="l"/>
             <a:r>
-              <a:rPr sz="1400" b="0">
+              <a:rPr sz="1800" b="0">
                 <a:solidFill>
                   <a:srgbClr val="2E1A2B"/>
                 </a:solidFill>
@@ -5575,7 +5540,7 @@
             </a:r>
             <a:br/>
             <a:r>
-              <a:rPr sz="1400" b="0">
+              <a:rPr sz="1800" b="0">
                 <a:solidFill>
                   <a:srgbClr val="2E1A2B"/>
                 </a:solidFill>
@@ -5585,7 +5550,7 @@
             </a:r>
             <a:br/>
             <a:r>
-              <a:rPr sz="1400" b="0">
+              <a:rPr sz="1800" b="0">
                 <a:solidFill>
                   <a:srgbClr val="2E1A2B"/>
                 </a:solidFill>
@@ -5595,7 +5560,7 @@
             </a:r>
             <a:br/>
             <a:r>
-              <a:rPr sz="1400" b="0">
+              <a:rPr sz="1800" b="0">
                 <a:solidFill>
                   <a:srgbClr val="2E1A2B"/>
                 </a:solidFill>
@@ -5605,7 +5570,7 @@
             </a:r>
             <a:br/>
             <a:r>
-              <a:rPr sz="1400" b="0">
+              <a:rPr sz="1800" b="0">
                 <a:solidFill>
                   <a:srgbClr val="2E1A2B"/>
                 </a:solidFill>
@@ -5624,7 +5589,42 @@
         </p:nvSpPr>
         <p:spPr>
           <a:xfrm>
-            <a:off x="11247120" y="6446520"/>
+            <a:off x="457200" y="6492240"/>
+            <a:ext cx="9601200" cy="320040"/>
+          </a:xfrm>
+          <a:prstGeom prst="rect">
+            <a:avLst/>
+          </a:prstGeom>
+          <a:noFill/>
+        </p:spPr>
+        <p:txBody>
+          <a:bodyPr wrap="square" lIns="45720" rIns="45720" tIns="27432" bIns="27432">
+            <a:spAutoFit/>
+          </a:bodyPr>
+          <a:lstStyle/>
+          <a:p>
+            <a:pPr algn="l"/>
+            <a:r>
+              <a:rPr sz="1000" b="0">
+                <a:solidFill>
+                  <a:srgbClr val="A08A9C"/>
+                </a:solidFill>
+                <a:latin typeface="Yu Gothic"/>
+              </a:rPr>
+              <a:t>藪医者の学び / 2026-04-09 / 行動経済学×メンタルヘルス</a:t>
+            </a:r>
+          </a:p>
+        </p:txBody>
+      </p:sp>
+      <p:sp>
+        <p:nvSpPr>
+          <p:cNvPr id="6" name="TextBox 5"/>
+          <p:cNvSpPr txBox="1"/>
+          <p:nvPr/>
+        </p:nvSpPr>
+        <p:spPr>
+          <a:xfrm>
+            <a:off x="11247120" y="6492240"/>
             <a:ext cx="914400" cy="320040"/>
           </a:xfrm>
           <a:prstGeom prst="rect">
@@ -5640,48 +5640,13 @@
           <a:p>
             <a:pPr algn="r"/>
             <a:r>
-              <a:rPr sz="900" b="0">
+              <a:rPr sz="1000" b="0">
                 <a:solidFill>
                   <a:srgbClr val="A08A9C"/>
                 </a:solidFill>
                 <a:latin typeface="Yu Gothic"/>
               </a:rPr>
               <a:t>17 / 29</a:t>
-            </a:r>
-          </a:p>
-        </p:txBody>
-      </p:sp>
-      <p:sp>
-        <p:nvSpPr>
-          <p:cNvPr id="6" name="TextBox 5"/>
-          <p:cNvSpPr txBox="1"/>
-          <p:nvPr/>
-        </p:nvSpPr>
-        <p:spPr>
-          <a:xfrm>
-            <a:off x="457200" y="6446520"/>
-            <a:ext cx="7315200" cy="320040"/>
-          </a:xfrm>
-          <a:prstGeom prst="rect">
-            <a:avLst/>
-          </a:prstGeom>
-          <a:noFill/>
-        </p:spPr>
-        <p:txBody>
-          <a:bodyPr wrap="square" lIns="45720" rIns="45720" tIns="27432" bIns="27432">
-            <a:spAutoFit/>
-          </a:bodyPr>
-          <a:lstStyle/>
-          <a:p>
-            <a:pPr algn="l"/>
-            <a:r>
-              <a:rPr sz="900" b="0">
-                <a:solidFill>
-                  <a:srgbClr val="A08A9C"/>
-                </a:solidFill>
-                <a:latin typeface="Yu Gothic"/>
-              </a:rPr>
-              <a:t>家庭医療科 勉強会 / 2026-04-09</a:t>
             </a:r>
           </a:p>
         </p:txBody>
@@ -5764,7 +5729,7 @@
         <p:spPr>
           <a:xfrm>
             <a:off x="457200" y="365760"/>
-            <a:ext cx="11430000" cy="822960"/>
+            <a:ext cx="11430000" cy="914400"/>
           </a:xfrm>
           <a:prstGeom prst="rect">
             <a:avLst/>
@@ -5779,7 +5744,7 @@
           <a:p>
             <a:pPr algn="l"/>
             <a:r>
-              <a:rPr sz="2600" b="1">
+              <a:rPr sz="3000" b="1">
                 <a:solidFill>
                   <a:srgbClr val="C76B8A"/>
                 </a:solidFill>
@@ -5798,7 +5763,42 @@
         </p:nvSpPr>
         <p:spPr>
           <a:xfrm>
-            <a:off x="11247120" y="6446520"/>
+            <a:off x="457200" y="6492240"/>
+            <a:ext cx="9601200" cy="320040"/>
+          </a:xfrm>
+          <a:prstGeom prst="rect">
+            <a:avLst/>
+          </a:prstGeom>
+          <a:noFill/>
+        </p:spPr>
+        <p:txBody>
+          <a:bodyPr wrap="square" lIns="45720" rIns="45720" tIns="27432" bIns="27432">
+            <a:spAutoFit/>
+          </a:bodyPr>
+          <a:lstStyle/>
+          <a:p>
+            <a:pPr algn="l"/>
+            <a:r>
+              <a:rPr sz="1000" b="0">
+                <a:solidFill>
+                  <a:srgbClr val="A08A9C"/>
+                </a:solidFill>
+                <a:latin typeface="Yu Gothic"/>
+              </a:rPr>
+              <a:t>藪医者の学び / 2026-04-09 / 行動経済学×メンタルヘルス</a:t>
+            </a:r>
+          </a:p>
+        </p:txBody>
+      </p:sp>
+      <p:sp>
+        <p:nvSpPr>
+          <p:cNvPr id="5" name="TextBox 4"/>
+          <p:cNvSpPr txBox="1"/>
+          <p:nvPr/>
+        </p:nvSpPr>
+        <p:spPr>
+          <a:xfrm>
+            <a:off x="11247120" y="6492240"/>
             <a:ext cx="914400" cy="320040"/>
           </a:xfrm>
           <a:prstGeom prst="rect">
@@ -5814,48 +5814,13 @@
           <a:p>
             <a:pPr algn="r"/>
             <a:r>
-              <a:rPr sz="900" b="0">
+              <a:rPr sz="1000" b="0">
                 <a:solidFill>
                   <a:srgbClr val="A08A9C"/>
                 </a:solidFill>
                 <a:latin typeface="Yu Gothic"/>
               </a:rPr>
               <a:t>18 / 29</a:t>
-            </a:r>
-          </a:p>
-        </p:txBody>
-      </p:sp>
-      <p:sp>
-        <p:nvSpPr>
-          <p:cNvPr id="5" name="TextBox 4"/>
-          <p:cNvSpPr txBox="1"/>
-          <p:nvPr/>
-        </p:nvSpPr>
-        <p:spPr>
-          <a:xfrm>
-            <a:off x="457200" y="6446520"/>
-            <a:ext cx="7315200" cy="320040"/>
-          </a:xfrm>
-          <a:prstGeom prst="rect">
-            <a:avLst/>
-          </a:prstGeom>
-          <a:noFill/>
-        </p:spPr>
-        <p:txBody>
-          <a:bodyPr wrap="square" lIns="45720" rIns="45720" tIns="27432" bIns="27432">
-            <a:spAutoFit/>
-          </a:bodyPr>
-          <a:lstStyle/>
-          <a:p>
-            <a:pPr algn="l"/>
-            <a:r>
-              <a:rPr sz="900" b="0">
-                <a:solidFill>
-                  <a:srgbClr val="A08A9C"/>
-                </a:solidFill>
-                <a:latin typeface="Yu Gothic"/>
-              </a:rPr>
-              <a:t>家庭医療科 勉強会 / 2026-04-09</a:t>
             </a:r>
           </a:p>
         </p:txBody>
@@ -5938,7 +5903,7 @@
         <p:spPr>
           <a:xfrm>
             <a:off x="457200" y="365760"/>
-            <a:ext cx="11430000" cy="822960"/>
+            <a:ext cx="11430000" cy="914400"/>
           </a:xfrm>
           <a:prstGeom prst="rect">
             <a:avLst/>
@@ -5953,7 +5918,7 @@
           <a:p>
             <a:pPr algn="l"/>
             <a:r>
-              <a:rPr sz="2600" b="1">
+              <a:rPr sz="3000" b="1">
                 <a:solidFill>
                   <a:srgbClr val="3D1E36"/>
                 </a:solidFill>
@@ -5972,8 +5937,8 @@
         </p:nvSpPr>
         <p:spPr>
           <a:xfrm>
-            <a:off x="548640" y="1371600"/>
-            <a:ext cx="10972800" cy="3200400"/>
+            <a:off x="548640" y="1463040"/>
+            <a:ext cx="10972800" cy="3566160"/>
           </a:xfrm>
           <a:prstGeom prst="rect">
             <a:avLst/>
@@ -5988,7 +5953,7 @@
           <a:p>
             <a:pPr algn="l"/>
             <a:r>
-              <a:rPr sz="1400" b="0">
+              <a:rPr sz="1800" b="0">
                 <a:solidFill>
                   <a:srgbClr val="2E1A2B"/>
                 </a:solidFill>
@@ -5998,7 +5963,7 @@
             </a:r>
             <a:br/>
             <a:r>
-              <a:rPr sz="1400" b="0">
+              <a:rPr sz="1800" b="0">
                 <a:solidFill>
                   <a:srgbClr val="2E1A2B"/>
                 </a:solidFill>
@@ -6017,8 +5982,8 @@
         </p:nvSpPr>
         <p:spPr>
           <a:xfrm>
-            <a:off x="548640" y="2743200"/>
-            <a:ext cx="10972800" cy="2286000"/>
+            <a:off x="548640" y="3108960"/>
+            <a:ext cx="10972800" cy="2377439"/>
           </a:xfrm>
           <a:prstGeom prst="rect">
             <a:avLst/>
@@ -6032,7 +5997,7 @@
           <a:lstStyle/>
           <a:p>
             <a:r>
-              <a:rPr sz="1400">
+              <a:rPr sz="1800">
                 <a:solidFill>
                   <a:srgbClr val="2E1A2B"/>
                 </a:solidFill>
@@ -6043,7 +6008,7 @@
           </a:p>
           <a:p>
             <a:r>
-              <a:rPr sz="1400">
+              <a:rPr sz="1800">
                 <a:solidFill>
                   <a:srgbClr val="2E1A2B"/>
                 </a:solidFill>
@@ -6054,7 +6019,7 @@
           </a:p>
           <a:p>
             <a:r>
-              <a:rPr sz="1400">
+              <a:rPr sz="1800">
                 <a:solidFill>
                   <a:srgbClr val="2E1A2B"/>
                 </a:solidFill>
@@ -6065,7 +6030,7 @@
           </a:p>
           <a:p>
             <a:r>
-              <a:rPr sz="1400">
+              <a:rPr sz="1800">
                 <a:solidFill>
                   <a:srgbClr val="2E1A2B"/>
                 </a:solidFill>
@@ -6084,7 +6049,42 @@
         </p:nvSpPr>
         <p:spPr>
           <a:xfrm>
-            <a:off x="11247120" y="6446520"/>
+            <a:off x="457200" y="6492240"/>
+            <a:ext cx="9601200" cy="320040"/>
+          </a:xfrm>
+          <a:prstGeom prst="rect">
+            <a:avLst/>
+          </a:prstGeom>
+          <a:noFill/>
+        </p:spPr>
+        <p:txBody>
+          <a:bodyPr wrap="square" lIns="45720" rIns="45720" tIns="27432" bIns="27432">
+            <a:spAutoFit/>
+          </a:bodyPr>
+          <a:lstStyle/>
+          <a:p>
+            <a:pPr algn="l"/>
+            <a:r>
+              <a:rPr sz="1000" b="0">
+                <a:solidFill>
+                  <a:srgbClr val="A08A9C"/>
+                </a:solidFill>
+                <a:latin typeface="Yu Gothic"/>
+              </a:rPr>
+              <a:t>藪医者の学び / 2026-04-09 / 行動経済学×メンタルヘルス</a:t>
+            </a:r>
+          </a:p>
+        </p:txBody>
+      </p:sp>
+      <p:sp>
+        <p:nvSpPr>
+          <p:cNvPr id="7" name="TextBox 6"/>
+          <p:cNvSpPr txBox="1"/>
+          <p:nvPr/>
+        </p:nvSpPr>
+        <p:spPr>
+          <a:xfrm>
+            <a:off x="11247120" y="6492240"/>
             <a:ext cx="914400" cy="320040"/>
           </a:xfrm>
           <a:prstGeom prst="rect">
@@ -6100,48 +6100,13 @@
           <a:p>
             <a:pPr algn="r"/>
             <a:r>
-              <a:rPr sz="900" b="0">
+              <a:rPr sz="1000" b="0">
                 <a:solidFill>
                   <a:srgbClr val="A08A9C"/>
                 </a:solidFill>
                 <a:latin typeface="Yu Gothic"/>
               </a:rPr>
               <a:t>19 / 29</a:t>
-            </a:r>
-          </a:p>
-        </p:txBody>
-      </p:sp>
-      <p:sp>
-        <p:nvSpPr>
-          <p:cNvPr id="7" name="TextBox 6"/>
-          <p:cNvSpPr txBox="1"/>
-          <p:nvPr/>
-        </p:nvSpPr>
-        <p:spPr>
-          <a:xfrm>
-            <a:off x="457200" y="6446520"/>
-            <a:ext cx="7315200" cy="320040"/>
-          </a:xfrm>
-          <a:prstGeom prst="rect">
-            <a:avLst/>
-          </a:prstGeom>
-          <a:noFill/>
-        </p:spPr>
-        <p:txBody>
-          <a:bodyPr wrap="square" lIns="45720" rIns="45720" tIns="27432" bIns="27432">
-            <a:spAutoFit/>
-          </a:bodyPr>
-          <a:lstStyle/>
-          <a:p>
-            <a:pPr algn="l"/>
-            <a:r>
-              <a:rPr sz="900" b="0">
-                <a:solidFill>
-                  <a:srgbClr val="A08A9C"/>
-                </a:solidFill>
-                <a:latin typeface="Yu Gothic"/>
-              </a:rPr>
-              <a:t>家庭医療科 勉強会 / 2026-04-09</a:t>
             </a:r>
           </a:p>
         </p:txBody>
@@ -6224,7 +6189,7 @@
         <p:spPr>
           <a:xfrm>
             <a:off x="457200" y="365760"/>
-            <a:ext cx="11430000" cy="822960"/>
+            <a:ext cx="11430000" cy="914400"/>
           </a:xfrm>
           <a:prstGeom prst="rect">
             <a:avLst/>
@@ -6239,7 +6204,7 @@
           <a:p>
             <a:pPr algn="l"/>
             <a:r>
-              <a:rPr sz="2600" b="1">
+              <a:rPr sz="3000" b="1">
                 <a:solidFill>
                   <a:srgbClr val="3D1E36"/>
                 </a:solidFill>
@@ -6258,8 +6223,8 @@
         </p:nvSpPr>
         <p:spPr>
           <a:xfrm>
-            <a:off x="548640" y="1371600"/>
-            <a:ext cx="10972800" cy="3200400"/>
+            <a:off x="548640" y="1463040"/>
+            <a:ext cx="10972800" cy="3566160"/>
           </a:xfrm>
           <a:prstGeom prst="rect">
             <a:avLst/>
@@ -6274,7 +6239,7 @@
           <a:p>
             <a:pPr algn="l"/>
             <a:r>
-              <a:rPr sz="1400" b="0">
+              <a:rPr sz="1800" b="0">
                 <a:solidFill>
                   <a:srgbClr val="2E1A2B"/>
                 </a:solidFill>
@@ -6284,7 +6249,7 @@
             </a:r>
             <a:br/>
             <a:r>
-              <a:rPr sz="1400" b="0">
+              <a:rPr sz="1800" b="0">
                 <a:solidFill>
                   <a:srgbClr val="2E1A2B"/>
                 </a:solidFill>
@@ -6294,7 +6259,7 @@
             </a:r>
             <a:br/>
             <a:r>
-              <a:rPr sz="1400" b="0">
+              <a:rPr sz="1800" b="0">
                 <a:solidFill>
                   <a:srgbClr val="2E1A2B"/>
                 </a:solidFill>
@@ -6304,7 +6269,7 @@
             </a:r>
             <a:br/>
             <a:r>
-              <a:rPr sz="1400" b="0">
+              <a:rPr sz="1800" b="0">
                 <a:solidFill>
                   <a:srgbClr val="2E1A2B"/>
                 </a:solidFill>
@@ -6314,7 +6279,7 @@
             </a:r>
             <a:br/>
             <a:r>
-              <a:rPr sz="1400" b="0">
+              <a:rPr sz="1800" b="0">
                 <a:solidFill>
                   <a:srgbClr val="2E1A2B"/>
                 </a:solidFill>
@@ -6333,7 +6298,42 @@
         </p:nvSpPr>
         <p:spPr>
           <a:xfrm>
-            <a:off x="11247120" y="6446520"/>
+            <a:off x="457200" y="6492240"/>
+            <a:ext cx="9601200" cy="320040"/>
+          </a:xfrm>
+          <a:prstGeom prst="rect">
+            <a:avLst/>
+          </a:prstGeom>
+          <a:noFill/>
+        </p:spPr>
+        <p:txBody>
+          <a:bodyPr wrap="square" lIns="45720" rIns="45720" tIns="27432" bIns="27432">
+            <a:spAutoFit/>
+          </a:bodyPr>
+          <a:lstStyle/>
+          <a:p>
+            <a:pPr algn="l"/>
+            <a:r>
+              <a:rPr sz="1000" b="0">
+                <a:solidFill>
+                  <a:srgbClr val="A08A9C"/>
+                </a:solidFill>
+                <a:latin typeface="Yu Gothic"/>
+              </a:rPr>
+              <a:t>藪医者の学び / 2026-04-09 / 行動経済学×メンタルヘルス</a:t>
+            </a:r>
+          </a:p>
+        </p:txBody>
+      </p:sp>
+      <p:sp>
+        <p:nvSpPr>
+          <p:cNvPr id="6" name="TextBox 5"/>
+          <p:cNvSpPr txBox="1"/>
+          <p:nvPr/>
+        </p:nvSpPr>
+        <p:spPr>
+          <a:xfrm>
+            <a:off x="11247120" y="6492240"/>
             <a:ext cx="914400" cy="320040"/>
           </a:xfrm>
           <a:prstGeom prst="rect">
@@ -6349,48 +6349,13 @@
           <a:p>
             <a:pPr algn="r"/>
             <a:r>
-              <a:rPr sz="900" b="0">
+              <a:rPr sz="1000" b="0">
                 <a:solidFill>
                   <a:srgbClr val="A08A9C"/>
                 </a:solidFill>
                 <a:latin typeface="Yu Gothic"/>
               </a:rPr>
               <a:t>2 / 29</a:t>
-            </a:r>
-          </a:p>
-        </p:txBody>
-      </p:sp>
-      <p:sp>
-        <p:nvSpPr>
-          <p:cNvPr id="6" name="TextBox 5"/>
-          <p:cNvSpPr txBox="1"/>
-          <p:nvPr/>
-        </p:nvSpPr>
-        <p:spPr>
-          <a:xfrm>
-            <a:off x="457200" y="6446520"/>
-            <a:ext cx="7315200" cy="320040"/>
-          </a:xfrm>
-          <a:prstGeom prst="rect">
-            <a:avLst/>
-          </a:prstGeom>
-          <a:noFill/>
-        </p:spPr>
-        <p:txBody>
-          <a:bodyPr wrap="square" lIns="45720" rIns="45720" tIns="27432" bIns="27432">
-            <a:spAutoFit/>
-          </a:bodyPr>
-          <a:lstStyle/>
-          <a:p>
-            <a:pPr algn="l"/>
-            <a:r>
-              <a:rPr sz="900" b="0">
-                <a:solidFill>
-                  <a:srgbClr val="A08A9C"/>
-                </a:solidFill>
-                <a:latin typeface="Yu Gothic"/>
-              </a:rPr>
-              <a:t>家庭医療科 勉強会 / 2026-04-09</a:t>
             </a:r>
           </a:p>
         </p:txBody>
@@ -6473,7 +6438,7 @@
         <p:spPr>
           <a:xfrm>
             <a:off x="457200" y="365760"/>
-            <a:ext cx="11430000" cy="822960"/>
+            <a:ext cx="11430000" cy="914400"/>
           </a:xfrm>
           <a:prstGeom prst="rect">
             <a:avLst/>
@@ -6488,7 +6453,7 @@
           <a:p>
             <a:pPr algn="l"/>
             <a:r>
-              <a:rPr sz="2600" b="1">
+              <a:rPr sz="3000" b="1">
                 <a:solidFill>
                   <a:srgbClr val="3D1E36"/>
                 </a:solidFill>
@@ -6507,8 +6472,8 @@
         </p:nvSpPr>
         <p:spPr>
           <a:xfrm>
-            <a:off x="548640" y="1371600"/>
-            <a:ext cx="10972800" cy="3200400"/>
+            <a:off x="548640" y="1463040"/>
+            <a:ext cx="10972800" cy="3566160"/>
           </a:xfrm>
           <a:prstGeom prst="rect">
             <a:avLst/>
@@ -6523,7 +6488,7 @@
           <a:p>
             <a:pPr algn="l"/>
             <a:r>
-              <a:rPr sz="1400" b="0">
+              <a:rPr sz="1800" b="0">
                 <a:solidFill>
                   <a:srgbClr val="2E1A2B"/>
                 </a:solidFill>
@@ -6533,7 +6498,7 @@
             </a:r>
             <a:br/>
             <a:r>
-              <a:rPr sz="1400" b="0">
+              <a:rPr sz="1800" b="0">
                 <a:solidFill>
                   <a:srgbClr val="2E1A2B"/>
                 </a:solidFill>
@@ -6552,8 +6517,8 @@
         </p:nvSpPr>
         <p:spPr>
           <a:xfrm>
-            <a:off x="548640" y="2743200"/>
-            <a:ext cx="10972800" cy="2286000"/>
+            <a:off x="548640" y="3108960"/>
+            <a:ext cx="10972800" cy="2377439"/>
           </a:xfrm>
           <a:prstGeom prst="rect">
             <a:avLst/>
@@ -6567,7 +6532,7 @@
           <a:lstStyle/>
           <a:p>
             <a:r>
-              <a:rPr sz="1400">
+              <a:rPr sz="1800">
                 <a:solidFill>
                   <a:srgbClr val="2E1A2B"/>
                 </a:solidFill>
@@ -6578,7 +6543,7 @@
           </a:p>
           <a:p>
             <a:r>
-              <a:rPr sz="1400">
+              <a:rPr sz="1800">
                 <a:solidFill>
                   <a:srgbClr val="2E1A2B"/>
                 </a:solidFill>
@@ -6589,7 +6554,7 @@
           </a:p>
           <a:p>
             <a:r>
-              <a:rPr sz="1400">
+              <a:rPr sz="1800">
                 <a:solidFill>
                   <a:srgbClr val="2E1A2B"/>
                 </a:solidFill>
@@ -6600,7 +6565,7 @@
           </a:p>
           <a:p>
             <a:r>
-              <a:rPr sz="1400">
+              <a:rPr sz="1800">
                 <a:solidFill>
                   <a:srgbClr val="2E1A2B"/>
                 </a:solidFill>
@@ -6619,7 +6584,42 @@
         </p:nvSpPr>
         <p:spPr>
           <a:xfrm>
-            <a:off x="11247120" y="6446520"/>
+            <a:off x="457200" y="6492240"/>
+            <a:ext cx="9601200" cy="320040"/>
+          </a:xfrm>
+          <a:prstGeom prst="rect">
+            <a:avLst/>
+          </a:prstGeom>
+          <a:noFill/>
+        </p:spPr>
+        <p:txBody>
+          <a:bodyPr wrap="square" lIns="45720" rIns="45720" tIns="27432" bIns="27432">
+            <a:spAutoFit/>
+          </a:bodyPr>
+          <a:lstStyle/>
+          <a:p>
+            <a:pPr algn="l"/>
+            <a:r>
+              <a:rPr sz="1000" b="0">
+                <a:solidFill>
+                  <a:srgbClr val="A08A9C"/>
+                </a:solidFill>
+                <a:latin typeface="Yu Gothic"/>
+              </a:rPr>
+              <a:t>藪医者の学び / 2026-04-09 / 行動経済学×メンタルヘルス</a:t>
+            </a:r>
+          </a:p>
+        </p:txBody>
+      </p:sp>
+      <p:sp>
+        <p:nvSpPr>
+          <p:cNvPr id="7" name="TextBox 6"/>
+          <p:cNvSpPr txBox="1"/>
+          <p:nvPr/>
+        </p:nvSpPr>
+        <p:spPr>
+          <a:xfrm>
+            <a:off x="11247120" y="6492240"/>
             <a:ext cx="914400" cy="320040"/>
           </a:xfrm>
           <a:prstGeom prst="rect">
@@ -6635,48 +6635,13 @@
           <a:p>
             <a:pPr algn="r"/>
             <a:r>
-              <a:rPr sz="900" b="0">
+              <a:rPr sz="1000" b="0">
                 <a:solidFill>
                   <a:srgbClr val="A08A9C"/>
                 </a:solidFill>
                 <a:latin typeface="Yu Gothic"/>
               </a:rPr>
               <a:t>20 / 29</a:t>
-            </a:r>
-          </a:p>
-        </p:txBody>
-      </p:sp>
-      <p:sp>
-        <p:nvSpPr>
-          <p:cNvPr id="7" name="TextBox 6"/>
-          <p:cNvSpPr txBox="1"/>
-          <p:nvPr/>
-        </p:nvSpPr>
-        <p:spPr>
-          <a:xfrm>
-            <a:off x="457200" y="6446520"/>
-            <a:ext cx="7315200" cy="320040"/>
-          </a:xfrm>
-          <a:prstGeom prst="rect">
-            <a:avLst/>
-          </a:prstGeom>
-          <a:noFill/>
-        </p:spPr>
-        <p:txBody>
-          <a:bodyPr wrap="square" lIns="45720" rIns="45720" tIns="27432" bIns="27432">
-            <a:spAutoFit/>
-          </a:bodyPr>
-          <a:lstStyle/>
-          <a:p>
-            <a:pPr algn="l"/>
-            <a:r>
-              <a:rPr sz="900" b="0">
-                <a:solidFill>
-                  <a:srgbClr val="A08A9C"/>
-                </a:solidFill>
-                <a:latin typeface="Yu Gothic"/>
-              </a:rPr>
-              <a:t>家庭医療科 勉強会 / 2026-04-09</a:t>
             </a:r>
           </a:p>
         </p:txBody>
@@ -6759,7 +6724,7 @@
         <p:spPr>
           <a:xfrm>
             <a:off x="457200" y="365760"/>
-            <a:ext cx="11430000" cy="822960"/>
+            <a:ext cx="11430000" cy="914400"/>
           </a:xfrm>
           <a:prstGeom prst="rect">
             <a:avLst/>
@@ -6774,7 +6739,7 @@
           <a:p>
             <a:pPr algn="l"/>
             <a:r>
-              <a:rPr sz="2600" b="1">
+              <a:rPr sz="3000" b="1">
                 <a:solidFill>
                   <a:srgbClr val="C76B8A"/>
                 </a:solidFill>
@@ -6793,7 +6758,42 @@
         </p:nvSpPr>
         <p:spPr>
           <a:xfrm>
-            <a:off x="11247120" y="6446520"/>
+            <a:off x="457200" y="6492240"/>
+            <a:ext cx="9601200" cy="320040"/>
+          </a:xfrm>
+          <a:prstGeom prst="rect">
+            <a:avLst/>
+          </a:prstGeom>
+          <a:noFill/>
+        </p:spPr>
+        <p:txBody>
+          <a:bodyPr wrap="square" lIns="45720" rIns="45720" tIns="27432" bIns="27432">
+            <a:spAutoFit/>
+          </a:bodyPr>
+          <a:lstStyle/>
+          <a:p>
+            <a:pPr algn="l"/>
+            <a:r>
+              <a:rPr sz="1000" b="0">
+                <a:solidFill>
+                  <a:srgbClr val="A08A9C"/>
+                </a:solidFill>
+                <a:latin typeface="Yu Gothic"/>
+              </a:rPr>
+              <a:t>藪医者の学び / 2026-04-09 / 行動経済学×メンタルヘルス</a:t>
+            </a:r>
+          </a:p>
+        </p:txBody>
+      </p:sp>
+      <p:sp>
+        <p:nvSpPr>
+          <p:cNvPr id="5" name="TextBox 4"/>
+          <p:cNvSpPr txBox="1"/>
+          <p:nvPr/>
+        </p:nvSpPr>
+        <p:spPr>
+          <a:xfrm>
+            <a:off x="11247120" y="6492240"/>
             <a:ext cx="914400" cy="320040"/>
           </a:xfrm>
           <a:prstGeom prst="rect">
@@ -6809,48 +6809,13 @@
           <a:p>
             <a:pPr algn="r"/>
             <a:r>
-              <a:rPr sz="900" b="0">
+              <a:rPr sz="1000" b="0">
                 <a:solidFill>
                   <a:srgbClr val="A08A9C"/>
                 </a:solidFill>
                 <a:latin typeface="Yu Gothic"/>
               </a:rPr>
               <a:t>21 / 29</a:t>
-            </a:r>
-          </a:p>
-        </p:txBody>
-      </p:sp>
-      <p:sp>
-        <p:nvSpPr>
-          <p:cNvPr id="5" name="TextBox 4"/>
-          <p:cNvSpPr txBox="1"/>
-          <p:nvPr/>
-        </p:nvSpPr>
-        <p:spPr>
-          <a:xfrm>
-            <a:off x="457200" y="6446520"/>
-            <a:ext cx="7315200" cy="320040"/>
-          </a:xfrm>
-          <a:prstGeom prst="rect">
-            <a:avLst/>
-          </a:prstGeom>
-          <a:noFill/>
-        </p:spPr>
-        <p:txBody>
-          <a:bodyPr wrap="square" lIns="45720" rIns="45720" tIns="27432" bIns="27432">
-            <a:spAutoFit/>
-          </a:bodyPr>
-          <a:lstStyle/>
-          <a:p>
-            <a:pPr algn="l"/>
-            <a:r>
-              <a:rPr sz="900" b="0">
-                <a:solidFill>
-                  <a:srgbClr val="A08A9C"/>
-                </a:solidFill>
-                <a:latin typeface="Yu Gothic"/>
-              </a:rPr>
-              <a:t>家庭医療科 勉強会 / 2026-04-09</a:t>
             </a:r>
           </a:p>
         </p:txBody>
@@ -6933,7 +6898,7 @@
         <p:spPr>
           <a:xfrm>
             <a:off x="457200" y="365760"/>
-            <a:ext cx="11430000" cy="822960"/>
+            <a:ext cx="11430000" cy="914400"/>
           </a:xfrm>
           <a:prstGeom prst="rect">
             <a:avLst/>
@@ -6948,7 +6913,7 @@
           <a:p>
             <a:pPr algn="l"/>
             <a:r>
-              <a:rPr sz="2600" b="1">
+              <a:rPr sz="3000" b="1">
                 <a:solidFill>
                   <a:srgbClr val="3D1E36"/>
                 </a:solidFill>
@@ -6967,8 +6932,8 @@
         </p:nvSpPr>
         <p:spPr>
           <a:xfrm>
-            <a:off x="548640" y="1371600"/>
-            <a:ext cx="10972800" cy="3200400"/>
+            <a:off x="548640" y="1463040"/>
+            <a:ext cx="10972800" cy="3566160"/>
           </a:xfrm>
           <a:prstGeom prst="rect">
             <a:avLst/>
@@ -6983,7 +6948,7 @@
           <a:p>
             <a:pPr algn="l"/>
             <a:r>
-              <a:rPr sz="1400" b="0">
+              <a:rPr sz="1800" b="0">
                 <a:solidFill>
                   <a:srgbClr val="2E1A2B"/>
                 </a:solidFill>
@@ -6993,7 +6958,7 @@
             </a:r>
             <a:br/>
             <a:r>
-              <a:rPr sz="1400" b="0">
+              <a:rPr sz="1800" b="0">
                 <a:solidFill>
                   <a:srgbClr val="2E1A2B"/>
                 </a:solidFill>
@@ -7012,8 +6977,8 @@
         </p:nvSpPr>
         <p:spPr>
           <a:xfrm>
-            <a:off x="548640" y="2743200"/>
-            <a:ext cx="10972800" cy="2286000"/>
+            <a:off x="548640" y="3108960"/>
+            <a:ext cx="10972800" cy="2377439"/>
           </a:xfrm>
           <a:prstGeom prst="rect">
             <a:avLst/>
@@ -7027,7 +6992,7 @@
           <a:lstStyle/>
           <a:p>
             <a:r>
-              <a:rPr sz="1400">
+              <a:rPr sz="1800">
                 <a:solidFill>
                   <a:srgbClr val="2E1A2B"/>
                 </a:solidFill>
@@ -7038,7 +7003,7 @@
           </a:p>
           <a:p>
             <a:r>
-              <a:rPr sz="1400">
+              <a:rPr sz="1800">
                 <a:solidFill>
                   <a:srgbClr val="2E1A2B"/>
                 </a:solidFill>
@@ -7049,7 +7014,7 @@
           </a:p>
           <a:p>
             <a:r>
-              <a:rPr sz="1400">
+              <a:rPr sz="1800">
                 <a:solidFill>
                   <a:srgbClr val="2E1A2B"/>
                 </a:solidFill>
@@ -7068,7 +7033,42 @@
         </p:nvSpPr>
         <p:spPr>
           <a:xfrm>
-            <a:off x="11247120" y="6446520"/>
+            <a:off x="457200" y="6492240"/>
+            <a:ext cx="9601200" cy="320040"/>
+          </a:xfrm>
+          <a:prstGeom prst="rect">
+            <a:avLst/>
+          </a:prstGeom>
+          <a:noFill/>
+        </p:spPr>
+        <p:txBody>
+          <a:bodyPr wrap="square" lIns="45720" rIns="45720" tIns="27432" bIns="27432">
+            <a:spAutoFit/>
+          </a:bodyPr>
+          <a:lstStyle/>
+          <a:p>
+            <a:pPr algn="l"/>
+            <a:r>
+              <a:rPr sz="1000" b="0">
+                <a:solidFill>
+                  <a:srgbClr val="A08A9C"/>
+                </a:solidFill>
+                <a:latin typeface="Yu Gothic"/>
+              </a:rPr>
+              <a:t>藪医者の学び / 2026-04-09 / 行動経済学×メンタルヘルス</a:t>
+            </a:r>
+          </a:p>
+        </p:txBody>
+      </p:sp>
+      <p:sp>
+        <p:nvSpPr>
+          <p:cNvPr id="7" name="TextBox 6"/>
+          <p:cNvSpPr txBox="1"/>
+          <p:nvPr/>
+        </p:nvSpPr>
+        <p:spPr>
+          <a:xfrm>
+            <a:off x="11247120" y="6492240"/>
             <a:ext cx="914400" cy="320040"/>
           </a:xfrm>
           <a:prstGeom prst="rect">
@@ -7084,48 +7084,13 @@
           <a:p>
             <a:pPr algn="r"/>
             <a:r>
-              <a:rPr sz="900" b="0">
+              <a:rPr sz="1000" b="0">
                 <a:solidFill>
                   <a:srgbClr val="A08A9C"/>
                 </a:solidFill>
                 <a:latin typeface="Yu Gothic"/>
               </a:rPr>
               <a:t>22 / 29</a:t>
-            </a:r>
-          </a:p>
-        </p:txBody>
-      </p:sp>
-      <p:sp>
-        <p:nvSpPr>
-          <p:cNvPr id="7" name="TextBox 6"/>
-          <p:cNvSpPr txBox="1"/>
-          <p:nvPr/>
-        </p:nvSpPr>
-        <p:spPr>
-          <a:xfrm>
-            <a:off x="457200" y="6446520"/>
-            <a:ext cx="7315200" cy="320040"/>
-          </a:xfrm>
-          <a:prstGeom prst="rect">
-            <a:avLst/>
-          </a:prstGeom>
-          <a:noFill/>
-        </p:spPr>
-        <p:txBody>
-          <a:bodyPr wrap="square" lIns="45720" rIns="45720" tIns="27432" bIns="27432">
-            <a:spAutoFit/>
-          </a:bodyPr>
-          <a:lstStyle/>
-          <a:p>
-            <a:pPr algn="l"/>
-            <a:r>
-              <a:rPr sz="900" b="0">
-                <a:solidFill>
-                  <a:srgbClr val="A08A9C"/>
-                </a:solidFill>
-                <a:latin typeface="Yu Gothic"/>
-              </a:rPr>
-              <a:t>家庭医療科 勉強会 / 2026-04-09</a:t>
             </a:r>
           </a:p>
         </p:txBody>
@@ -7208,7 +7173,7 @@
         <p:spPr>
           <a:xfrm>
             <a:off x="457200" y="365760"/>
-            <a:ext cx="11430000" cy="822960"/>
+            <a:ext cx="11430000" cy="914400"/>
           </a:xfrm>
           <a:prstGeom prst="rect">
             <a:avLst/>
@@ -7223,7 +7188,7 @@
           <a:p>
             <a:pPr algn="l"/>
             <a:r>
-              <a:rPr sz="2600" b="1">
+              <a:rPr sz="3000" b="1">
                 <a:solidFill>
                   <a:srgbClr val="3D1E36"/>
                 </a:solidFill>
@@ -7242,8 +7207,8 @@
         </p:nvSpPr>
         <p:spPr>
           <a:xfrm>
-            <a:off x="548640" y="1371600"/>
-            <a:ext cx="10972800" cy="3200400"/>
+            <a:off x="548640" y="1463040"/>
+            <a:ext cx="10972800" cy="3566160"/>
           </a:xfrm>
           <a:prstGeom prst="rect">
             <a:avLst/>
@@ -7258,7 +7223,7 @@
           <a:p>
             <a:pPr algn="l"/>
             <a:r>
-              <a:rPr sz="1400" b="0">
+              <a:rPr sz="1800" b="0">
                 <a:solidFill>
                   <a:srgbClr val="2E1A2B"/>
                 </a:solidFill>
@@ -7268,7 +7233,7 @@
             </a:r>
             <a:br/>
             <a:r>
-              <a:rPr sz="1400" b="0">
+              <a:rPr sz="1800" b="0">
                 <a:solidFill>
                   <a:srgbClr val="2E1A2B"/>
                 </a:solidFill>
@@ -7278,7 +7243,7 @@
             </a:r>
             <a:br/>
             <a:r>
-              <a:rPr sz="1400" b="0">
+              <a:rPr sz="1800" b="0">
                 <a:solidFill>
                   <a:srgbClr val="2E1A2B"/>
                 </a:solidFill>
@@ -7297,8 +7262,8 @@
         </p:nvSpPr>
         <p:spPr>
           <a:xfrm>
-            <a:off x="548640" y="2743200"/>
-            <a:ext cx="10972800" cy="2286000"/>
+            <a:off x="548640" y="3108960"/>
+            <a:ext cx="10972800" cy="2377439"/>
           </a:xfrm>
           <a:prstGeom prst="rect">
             <a:avLst/>
@@ -7312,7 +7277,7 @@
           <a:lstStyle/>
           <a:p>
             <a:r>
-              <a:rPr sz="1400">
+              <a:rPr sz="1800">
                 <a:solidFill>
                   <a:srgbClr val="2E1A2B"/>
                 </a:solidFill>
@@ -7323,7 +7288,7 @@
           </a:p>
           <a:p>
             <a:r>
-              <a:rPr sz="1400">
+              <a:rPr sz="1800">
                 <a:solidFill>
                   <a:srgbClr val="2E1A2B"/>
                 </a:solidFill>
@@ -7334,7 +7299,7 @@
           </a:p>
           <a:p>
             <a:r>
-              <a:rPr sz="1400">
+              <a:rPr sz="1800">
                 <a:solidFill>
                   <a:srgbClr val="2E1A2B"/>
                 </a:solidFill>
@@ -7353,7 +7318,42 @@
         </p:nvSpPr>
         <p:spPr>
           <a:xfrm>
-            <a:off x="11247120" y="6446520"/>
+            <a:off x="457200" y="6492240"/>
+            <a:ext cx="9601200" cy="320040"/>
+          </a:xfrm>
+          <a:prstGeom prst="rect">
+            <a:avLst/>
+          </a:prstGeom>
+          <a:noFill/>
+        </p:spPr>
+        <p:txBody>
+          <a:bodyPr wrap="square" lIns="45720" rIns="45720" tIns="27432" bIns="27432">
+            <a:spAutoFit/>
+          </a:bodyPr>
+          <a:lstStyle/>
+          <a:p>
+            <a:pPr algn="l"/>
+            <a:r>
+              <a:rPr sz="1000" b="0">
+                <a:solidFill>
+                  <a:srgbClr val="A08A9C"/>
+                </a:solidFill>
+                <a:latin typeface="Yu Gothic"/>
+              </a:rPr>
+              <a:t>藪医者の学び / 2026-04-09 / 行動経済学×メンタルヘルス</a:t>
+            </a:r>
+          </a:p>
+        </p:txBody>
+      </p:sp>
+      <p:sp>
+        <p:nvSpPr>
+          <p:cNvPr id="7" name="TextBox 6"/>
+          <p:cNvSpPr txBox="1"/>
+          <p:nvPr/>
+        </p:nvSpPr>
+        <p:spPr>
+          <a:xfrm>
+            <a:off x="11247120" y="6492240"/>
             <a:ext cx="914400" cy="320040"/>
           </a:xfrm>
           <a:prstGeom prst="rect">
@@ -7369,48 +7369,13 @@
           <a:p>
             <a:pPr algn="r"/>
             <a:r>
-              <a:rPr sz="900" b="0">
+              <a:rPr sz="1000" b="0">
                 <a:solidFill>
                   <a:srgbClr val="A08A9C"/>
                 </a:solidFill>
                 <a:latin typeface="Yu Gothic"/>
               </a:rPr>
               <a:t>23 / 29</a:t>
-            </a:r>
-          </a:p>
-        </p:txBody>
-      </p:sp>
-      <p:sp>
-        <p:nvSpPr>
-          <p:cNvPr id="7" name="TextBox 6"/>
-          <p:cNvSpPr txBox="1"/>
-          <p:nvPr/>
-        </p:nvSpPr>
-        <p:spPr>
-          <a:xfrm>
-            <a:off x="457200" y="6446520"/>
-            <a:ext cx="7315200" cy="320040"/>
-          </a:xfrm>
-          <a:prstGeom prst="rect">
-            <a:avLst/>
-          </a:prstGeom>
-          <a:noFill/>
-        </p:spPr>
-        <p:txBody>
-          <a:bodyPr wrap="square" lIns="45720" rIns="45720" tIns="27432" bIns="27432">
-            <a:spAutoFit/>
-          </a:bodyPr>
-          <a:lstStyle/>
-          <a:p>
-            <a:pPr algn="l"/>
-            <a:r>
-              <a:rPr sz="900" b="0">
-                <a:solidFill>
-                  <a:srgbClr val="A08A9C"/>
-                </a:solidFill>
-                <a:latin typeface="Yu Gothic"/>
-              </a:rPr>
-              <a:t>家庭医療科 勉強会 / 2026-04-09</a:t>
             </a:r>
           </a:p>
         </p:txBody>
@@ -7493,7 +7458,7 @@
         <p:spPr>
           <a:xfrm>
             <a:off x="457200" y="365760"/>
-            <a:ext cx="11430000" cy="822960"/>
+            <a:ext cx="11430000" cy="914400"/>
           </a:xfrm>
           <a:prstGeom prst="rect">
             <a:avLst/>
@@ -7508,7 +7473,7 @@
           <a:p>
             <a:pPr algn="l"/>
             <a:r>
-              <a:rPr sz="2600" b="1">
+              <a:rPr sz="3000" b="1">
                 <a:solidFill>
                   <a:srgbClr val="3D1E36"/>
                 </a:solidFill>
@@ -7527,8 +7492,8 @@
         </p:nvSpPr>
         <p:spPr>
           <a:xfrm>
-            <a:off x="548640" y="1371600"/>
-            <a:ext cx="10972800" cy="3200400"/>
+            <a:off x="548640" y="1463040"/>
+            <a:ext cx="10972800" cy="3566160"/>
           </a:xfrm>
           <a:prstGeom prst="rect">
             <a:avLst/>
@@ -7543,7 +7508,7 @@
           <a:p>
             <a:pPr algn="l"/>
             <a:r>
-              <a:rPr sz="1400" b="0">
+              <a:rPr sz="1800" b="0">
                 <a:solidFill>
                   <a:srgbClr val="2E1A2B"/>
                 </a:solidFill>
@@ -7553,7 +7518,7 @@
             </a:r>
             <a:br/>
             <a:r>
-              <a:rPr sz="1400" b="0">
+              <a:rPr sz="1800" b="0">
                 <a:solidFill>
                   <a:srgbClr val="2E1A2B"/>
                 </a:solidFill>
@@ -7572,8 +7537,8 @@
         </p:nvSpPr>
         <p:spPr>
           <a:xfrm>
-            <a:off x="548640" y="2743200"/>
-            <a:ext cx="10972800" cy="2286000"/>
+            <a:off x="548640" y="3108960"/>
+            <a:ext cx="10972800" cy="2377439"/>
           </a:xfrm>
           <a:prstGeom prst="rect">
             <a:avLst/>
@@ -7587,7 +7552,7 @@
           <a:lstStyle/>
           <a:p>
             <a:r>
-              <a:rPr sz="1400">
+              <a:rPr sz="1800">
                 <a:solidFill>
                   <a:srgbClr val="2E1A2B"/>
                 </a:solidFill>
@@ -7598,7 +7563,7 @@
           </a:p>
           <a:p>
             <a:r>
-              <a:rPr sz="1400">
+              <a:rPr sz="1800">
                 <a:solidFill>
                   <a:srgbClr val="2E1A2B"/>
                 </a:solidFill>
@@ -7609,7 +7574,7 @@
           </a:p>
           <a:p>
             <a:r>
-              <a:rPr sz="1400">
+              <a:rPr sz="1800">
                 <a:solidFill>
                   <a:srgbClr val="2E1A2B"/>
                 </a:solidFill>
@@ -7628,7 +7593,42 @@
         </p:nvSpPr>
         <p:spPr>
           <a:xfrm>
-            <a:off x="11247120" y="6446520"/>
+            <a:off x="457200" y="6492240"/>
+            <a:ext cx="9601200" cy="320040"/>
+          </a:xfrm>
+          <a:prstGeom prst="rect">
+            <a:avLst/>
+          </a:prstGeom>
+          <a:noFill/>
+        </p:spPr>
+        <p:txBody>
+          <a:bodyPr wrap="square" lIns="45720" rIns="45720" tIns="27432" bIns="27432">
+            <a:spAutoFit/>
+          </a:bodyPr>
+          <a:lstStyle/>
+          <a:p>
+            <a:pPr algn="l"/>
+            <a:r>
+              <a:rPr sz="1000" b="0">
+                <a:solidFill>
+                  <a:srgbClr val="A08A9C"/>
+                </a:solidFill>
+                <a:latin typeface="Yu Gothic"/>
+              </a:rPr>
+              <a:t>藪医者の学び / 2026-04-09 / 行動経済学×メンタルヘルス</a:t>
+            </a:r>
+          </a:p>
+        </p:txBody>
+      </p:sp>
+      <p:sp>
+        <p:nvSpPr>
+          <p:cNvPr id="7" name="TextBox 6"/>
+          <p:cNvSpPr txBox="1"/>
+          <p:nvPr/>
+        </p:nvSpPr>
+        <p:spPr>
+          <a:xfrm>
+            <a:off x="11247120" y="6492240"/>
             <a:ext cx="914400" cy="320040"/>
           </a:xfrm>
           <a:prstGeom prst="rect">
@@ -7644,48 +7644,13 @@
           <a:p>
             <a:pPr algn="r"/>
             <a:r>
-              <a:rPr sz="900" b="0">
+              <a:rPr sz="1000" b="0">
                 <a:solidFill>
                   <a:srgbClr val="A08A9C"/>
                 </a:solidFill>
                 <a:latin typeface="Yu Gothic"/>
               </a:rPr>
               <a:t>24 / 29</a:t>
-            </a:r>
-          </a:p>
-        </p:txBody>
-      </p:sp>
-      <p:sp>
-        <p:nvSpPr>
-          <p:cNvPr id="7" name="TextBox 6"/>
-          <p:cNvSpPr txBox="1"/>
-          <p:nvPr/>
-        </p:nvSpPr>
-        <p:spPr>
-          <a:xfrm>
-            <a:off x="457200" y="6446520"/>
-            <a:ext cx="7315200" cy="320040"/>
-          </a:xfrm>
-          <a:prstGeom prst="rect">
-            <a:avLst/>
-          </a:prstGeom>
-          <a:noFill/>
-        </p:spPr>
-        <p:txBody>
-          <a:bodyPr wrap="square" lIns="45720" rIns="45720" tIns="27432" bIns="27432">
-            <a:spAutoFit/>
-          </a:bodyPr>
-          <a:lstStyle/>
-          <a:p>
-            <a:pPr algn="l"/>
-            <a:r>
-              <a:rPr sz="900" b="0">
-                <a:solidFill>
-                  <a:srgbClr val="A08A9C"/>
-                </a:solidFill>
-                <a:latin typeface="Yu Gothic"/>
-              </a:rPr>
-              <a:t>家庭医療科 勉強会 / 2026-04-09</a:t>
             </a:r>
           </a:p>
         </p:txBody>
@@ -7768,7 +7733,7 @@
         <p:spPr>
           <a:xfrm>
             <a:off x="457200" y="365760"/>
-            <a:ext cx="11430000" cy="822960"/>
+            <a:ext cx="11430000" cy="914400"/>
           </a:xfrm>
           <a:prstGeom prst="rect">
             <a:avLst/>
@@ -7783,7 +7748,7 @@
           <a:p>
             <a:pPr algn="l"/>
             <a:r>
-              <a:rPr sz="2600" b="1">
+              <a:rPr sz="3000" b="1">
                 <a:solidFill>
                   <a:srgbClr val="3D1E36"/>
                 </a:solidFill>
@@ -7802,8 +7767,8 @@
         </p:nvSpPr>
         <p:spPr>
           <a:xfrm>
-            <a:off x="548640" y="1371600"/>
-            <a:ext cx="10972800" cy="3200400"/>
+            <a:off x="548640" y="1463040"/>
+            <a:ext cx="10972800" cy="3566160"/>
           </a:xfrm>
           <a:prstGeom prst="rect">
             <a:avLst/>
@@ -7818,7 +7783,7 @@
           <a:p>
             <a:pPr algn="l"/>
             <a:r>
-              <a:rPr sz="1400" b="0">
+              <a:rPr sz="1800" b="0">
                 <a:solidFill>
                   <a:srgbClr val="2E1A2B"/>
                 </a:solidFill>
@@ -7828,7 +7793,7 @@
             </a:r>
             <a:br/>
             <a:r>
-              <a:rPr sz="1400" b="0">
+              <a:rPr sz="1800" b="0">
                 <a:solidFill>
                   <a:srgbClr val="2E1A2B"/>
                 </a:solidFill>
@@ -7838,7 +7803,7 @@
             </a:r>
             <a:br/>
             <a:r>
-              <a:rPr sz="1400" b="0">
+              <a:rPr sz="1800" b="0">
                 <a:solidFill>
                   <a:srgbClr val="2E1A2B"/>
                 </a:solidFill>
@@ -7848,7 +7813,7 @@
             </a:r>
             <a:br/>
             <a:r>
-              <a:rPr sz="1400" b="0">
+              <a:rPr sz="1800" b="0">
                 <a:solidFill>
                   <a:srgbClr val="2E1A2B"/>
                 </a:solidFill>
@@ -7858,7 +7823,7 @@
             </a:r>
             <a:br/>
             <a:r>
-              <a:rPr sz="1400" b="0">
+              <a:rPr sz="1800" b="0">
                 <a:solidFill>
                   <a:srgbClr val="2E1A2B"/>
                 </a:solidFill>
@@ -7877,7 +7842,42 @@
         </p:nvSpPr>
         <p:spPr>
           <a:xfrm>
-            <a:off x="11247120" y="6446520"/>
+            <a:off x="457200" y="6492240"/>
+            <a:ext cx="9601200" cy="320040"/>
+          </a:xfrm>
+          <a:prstGeom prst="rect">
+            <a:avLst/>
+          </a:prstGeom>
+          <a:noFill/>
+        </p:spPr>
+        <p:txBody>
+          <a:bodyPr wrap="square" lIns="45720" rIns="45720" tIns="27432" bIns="27432">
+            <a:spAutoFit/>
+          </a:bodyPr>
+          <a:lstStyle/>
+          <a:p>
+            <a:pPr algn="l"/>
+            <a:r>
+              <a:rPr sz="1000" b="0">
+                <a:solidFill>
+                  <a:srgbClr val="A08A9C"/>
+                </a:solidFill>
+                <a:latin typeface="Yu Gothic"/>
+              </a:rPr>
+              <a:t>藪医者の学び / 2026-04-09 / 行動経済学×メンタルヘルス</a:t>
+            </a:r>
+          </a:p>
+        </p:txBody>
+      </p:sp>
+      <p:sp>
+        <p:nvSpPr>
+          <p:cNvPr id="6" name="TextBox 5"/>
+          <p:cNvSpPr txBox="1"/>
+          <p:nvPr/>
+        </p:nvSpPr>
+        <p:spPr>
+          <a:xfrm>
+            <a:off x="11247120" y="6492240"/>
             <a:ext cx="914400" cy="320040"/>
           </a:xfrm>
           <a:prstGeom prst="rect">
@@ -7893,48 +7893,13 @@
           <a:p>
             <a:pPr algn="r"/>
             <a:r>
-              <a:rPr sz="900" b="0">
+              <a:rPr sz="1000" b="0">
                 <a:solidFill>
                   <a:srgbClr val="A08A9C"/>
                 </a:solidFill>
                 <a:latin typeface="Yu Gothic"/>
               </a:rPr>
               <a:t>25 / 29</a:t>
-            </a:r>
-          </a:p>
-        </p:txBody>
-      </p:sp>
-      <p:sp>
-        <p:nvSpPr>
-          <p:cNvPr id="6" name="TextBox 5"/>
-          <p:cNvSpPr txBox="1"/>
-          <p:nvPr/>
-        </p:nvSpPr>
-        <p:spPr>
-          <a:xfrm>
-            <a:off x="457200" y="6446520"/>
-            <a:ext cx="7315200" cy="320040"/>
-          </a:xfrm>
-          <a:prstGeom prst="rect">
-            <a:avLst/>
-          </a:prstGeom>
-          <a:noFill/>
-        </p:spPr>
-        <p:txBody>
-          <a:bodyPr wrap="square" lIns="45720" rIns="45720" tIns="27432" bIns="27432">
-            <a:spAutoFit/>
-          </a:bodyPr>
-          <a:lstStyle/>
-          <a:p>
-            <a:pPr algn="l"/>
-            <a:r>
-              <a:rPr sz="900" b="0">
-                <a:solidFill>
-                  <a:srgbClr val="A08A9C"/>
-                </a:solidFill>
-                <a:latin typeface="Yu Gothic"/>
-              </a:rPr>
-              <a:t>家庭医療科 勉強会 / 2026-04-09</a:t>
             </a:r>
           </a:p>
         </p:txBody>
@@ -8017,7 +7982,7 @@
         <p:spPr>
           <a:xfrm>
             <a:off x="457200" y="365760"/>
-            <a:ext cx="11430000" cy="822960"/>
+            <a:ext cx="11430000" cy="914400"/>
           </a:xfrm>
           <a:prstGeom prst="rect">
             <a:avLst/>
@@ -8032,7 +7997,7 @@
           <a:p>
             <a:pPr algn="l"/>
             <a:r>
-              <a:rPr sz="2600" b="1">
+              <a:rPr sz="3000" b="1">
                 <a:solidFill>
                   <a:srgbClr val="3D1E36"/>
                 </a:solidFill>
@@ -8051,8 +8016,8 @@
         </p:nvSpPr>
         <p:spPr>
           <a:xfrm>
-            <a:off x="548640" y="1371600"/>
-            <a:ext cx="10972800" cy="3200400"/>
+            <a:off x="548640" y="1463040"/>
+            <a:ext cx="10972800" cy="3566160"/>
           </a:xfrm>
           <a:prstGeom prst="rect">
             <a:avLst/>
@@ -8067,7 +8032,7 @@
           <a:p>
             <a:pPr algn="l"/>
             <a:r>
-              <a:rPr sz="1400" b="0">
+              <a:rPr sz="1800" b="0">
                 <a:solidFill>
                   <a:srgbClr val="2E1A2B"/>
                 </a:solidFill>
@@ -8086,8 +8051,8 @@
         </p:nvSpPr>
         <p:spPr>
           <a:xfrm>
-            <a:off x="548640" y="2743200"/>
-            <a:ext cx="10972800" cy="2286000"/>
+            <a:off x="548640" y="3108960"/>
+            <a:ext cx="10972800" cy="2377439"/>
           </a:xfrm>
           <a:prstGeom prst="rect">
             <a:avLst/>
@@ -8101,7 +8066,7 @@
           <a:lstStyle/>
           <a:p>
             <a:r>
-              <a:rPr sz="1400">
+              <a:rPr sz="1800">
                 <a:solidFill>
                   <a:srgbClr val="2E1A2B"/>
                 </a:solidFill>
@@ -8112,7 +8077,7 @@
           </a:p>
           <a:p>
             <a:r>
-              <a:rPr sz="1400">
+              <a:rPr sz="1800">
                 <a:solidFill>
                   <a:srgbClr val="2E1A2B"/>
                 </a:solidFill>
@@ -8123,7 +8088,7 @@
           </a:p>
           <a:p>
             <a:r>
-              <a:rPr sz="1400">
+              <a:rPr sz="1800">
                 <a:solidFill>
                   <a:srgbClr val="2E1A2B"/>
                 </a:solidFill>
@@ -8142,7 +8107,42 @@
         </p:nvSpPr>
         <p:spPr>
           <a:xfrm>
-            <a:off x="11247120" y="6446520"/>
+            <a:off x="457200" y="6492240"/>
+            <a:ext cx="9601200" cy="320040"/>
+          </a:xfrm>
+          <a:prstGeom prst="rect">
+            <a:avLst/>
+          </a:prstGeom>
+          <a:noFill/>
+        </p:spPr>
+        <p:txBody>
+          <a:bodyPr wrap="square" lIns="45720" rIns="45720" tIns="27432" bIns="27432">
+            <a:spAutoFit/>
+          </a:bodyPr>
+          <a:lstStyle/>
+          <a:p>
+            <a:pPr algn="l"/>
+            <a:r>
+              <a:rPr sz="1000" b="0">
+                <a:solidFill>
+                  <a:srgbClr val="A08A9C"/>
+                </a:solidFill>
+                <a:latin typeface="Yu Gothic"/>
+              </a:rPr>
+              <a:t>藪医者の学び / 2026-04-09 / 行動経済学×メンタルヘルス</a:t>
+            </a:r>
+          </a:p>
+        </p:txBody>
+      </p:sp>
+      <p:sp>
+        <p:nvSpPr>
+          <p:cNvPr id="7" name="TextBox 6"/>
+          <p:cNvSpPr txBox="1"/>
+          <p:nvPr/>
+        </p:nvSpPr>
+        <p:spPr>
+          <a:xfrm>
+            <a:off x="11247120" y="6492240"/>
             <a:ext cx="914400" cy="320040"/>
           </a:xfrm>
           <a:prstGeom prst="rect">
@@ -8158,48 +8158,13 @@
           <a:p>
             <a:pPr algn="r"/>
             <a:r>
-              <a:rPr sz="900" b="0">
+              <a:rPr sz="1000" b="0">
                 <a:solidFill>
                   <a:srgbClr val="A08A9C"/>
                 </a:solidFill>
                 <a:latin typeface="Yu Gothic"/>
               </a:rPr>
               <a:t>26 / 29</a:t>
-            </a:r>
-          </a:p>
-        </p:txBody>
-      </p:sp>
-      <p:sp>
-        <p:nvSpPr>
-          <p:cNvPr id="7" name="TextBox 6"/>
-          <p:cNvSpPr txBox="1"/>
-          <p:nvPr/>
-        </p:nvSpPr>
-        <p:spPr>
-          <a:xfrm>
-            <a:off x="457200" y="6446520"/>
-            <a:ext cx="7315200" cy="320040"/>
-          </a:xfrm>
-          <a:prstGeom prst="rect">
-            <a:avLst/>
-          </a:prstGeom>
-          <a:noFill/>
-        </p:spPr>
-        <p:txBody>
-          <a:bodyPr wrap="square" lIns="45720" rIns="45720" tIns="27432" bIns="27432">
-            <a:spAutoFit/>
-          </a:bodyPr>
-          <a:lstStyle/>
-          <a:p>
-            <a:pPr algn="l"/>
-            <a:r>
-              <a:rPr sz="900" b="0">
-                <a:solidFill>
-                  <a:srgbClr val="A08A9C"/>
-                </a:solidFill>
-                <a:latin typeface="Yu Gothic"/>
-              </a:rPr>
-              <a:t>家庭医療科 勉強会 / 2026-04-09</a:t>
             </a:r>
           </a:p>
         </p:txBody>
@@ -8282,7 +8247,7 @@
         <p:spPr>
           <a:xfrm>
             <a:off x="457200" y="365760"/>
-            <a:ext cx="11430000" cy="822960"/>
+            <a:ext cx="11430000" cy="914400"/>
           </a:xfrm>
           <a:prstGeom prst="rect">
             <a:avLst/>
@@ -8297,7 +8262,7 @@
           <a:p>
             <a:pPr algn="l"/>
             <a:r>
-              <a:rPr sz="2600" b="1">
+              <a:rPr sz="3000" b="1">
                 <a:solidFill>
                   <a:srgbClr val="3D1E36"/>
                 </a:solidFill>
@@ -8316,8 +8281,8 @@
         </p:nvSpPr>
         <p:spPr>
           <a:xfrm>
-            <a:off x="548640" y="1371600"/>
-            <a:ext cx="10972800" cy="3200400"/>
+            <a:off x="548640" y="1463040"/>
+            <a:ext cx="10972800" cy="3566160"/>
           </a:xfrm>
           <a:prstGeom prst="rect">
             <a:avLst/>
@@ -8332,7 +8297,7 @@
           <a:p>
             <a:pPr algn="l"/>
             <a:r>
-              <a:rPr sz="1400" b="0">
+              <a:rPr sz="1800" b="0">
                 <a:solidFill>
                   <a:srgbClr val="2E1A2B"/>
                 </a:solidFill>
@@ -8342,7 +8307,7 @@
             </a:r>
             <a:br/>
             <a:r>
-              <a:rPr sz="1400" b="0">
+              <a:rPr sz="1800" b="0">
                 <a:solidFill>
                   <a:srgbClr val="2E1A2B"/>
                 </a:solidFill>
@@ -8361,8 +8326,8 @@
         </p:nvSpPr>
         <p:spPr>
           <a:xfrm>
-            <a:off x="548640" y="2743200"/>
-            <a:ext cx="10972800" cy="2286000"/>
+            <a:off x="548640" y="3108960"/>
+            <a:ext cx="10972800" cy="2377439"/>
           </a:xfrm>
           <a:prstGeom prst="rect">
             <a:avLst/>
@@ -8376,7 +8341,7 @@
           <a:lstStyle/>
           <a:p>
             <a:r>
-              <a:rPr sz="1400">
+              <a:rPr sz="1800">
                 <a:solidFill>
                   <a:srgbClr val="2E1A2B"/>
                 </a:solidFill>
@@ -8387,7 +8352,7 @@
           </a:p>
           <a:p>
             <a:r>
-              <a:rPr sz="1400">
+              <a:rPr sz="1800">
                 <a:solidFill>
                   <a:srgbClr val="2E1A2B"/>
                 </a:solidFill>
@@ -8398,7 +8363,7 @@
           </a:p>
           <a:p>
             <a:r>
-              <a:rPr sz="1400">
+              <a:rPr sz="1800">
                 <a:solidFill>
                   <a:srgbClr val="2E1A2B"/>
                 </a:solidFill>
@@ -8409,7 +8374,7 @@
           </a:p>
           <a:p>
             <a:r>
-              <a:rPr sz="1400">
+              <a:rPr sz="1800">
                 <a:solidFill>
                   <a:srgbClr val="2E1A2B"/>
                 </a:solidFill>
@@ -8420,7 +8385,7 @@
           </a:p>
           <a:p>
             <a:r>
-              <a:rPr sz="1400">
+              <a:rPr sz="1800">
                 <a:solidFill>
                   <a:srgbClr val="2E1A2B"/>
                 </a:solidFill>
@@ -8431,7 +8396,7 @@
           </a:p>
           <a:p>
             <a:r>
-              <a:rPr sz="1400">
+              <a:rPr sz="1800">
                 <a:solidFill>
                   <a:srgbClr val="2E1A2B"/>
                 </a:solidFill>
@@ -8450,7 +8415,42 @@
         </p:nvSpPr>
         <p:spPr>
           <a:xfrm>
-            <a:off x="11247120" y="6446520"/>
+            <a:off x="457200" y="6492240"/>
+            <a:ext cx="9601200" cy="320040"/>
+          </a:xfrm>
+          <a:prstGeom prst="rect">
+            <a:avLst/>
+          </a:prstGeom>
+          <a:noFill/>
+        </p:spPr>
+        <p:txBody>
+          <a:bodyPr wrap="square" lIns="45720" rIns="45720" tIns="27432" bIns="27432">
+            <a:spAutoFit/>
+          </a:bodyPr>
+          <a:lstStyle/>
+          <a:p>
+            <a:pPr algn="l"/>
+            <a:r>
+              <a:rPr sz="1000" b="0">
+                <a:solidFill>
+                  <a:srgbClr val="A08A9C"/>
+                </a:solidFill>
+                <a:latin typeface="Yu Gothic"/>
+              </a:rPr>
+              <a:t>藪医者の学び / 2026-04-09 / 行動経済学×メンタルヘルス</a:t>
+            </a:r>
+          </a:p>
+        </p:txBody>
+      </p:sp>
+      <p:sp>
+        <p:nvSpPr>
+          <p:cNvPr id="7" name="TextBox 6"/>
+          <p:cNvSpPr txBox="1"/>
+          <p:nvPr/>
+        </p:nvSpPr>
+        <p:spPr>
+          <a:xfrm>
+            <a:off x="11247120" y="6492240"/>
             <a:ext cx="914400" cy="320040"/>
           </a:xfrm>
           <a:prstGeom prst="rect">
@@ -8466,48 +8466,13 @@
           <a:p>
             <a:pPr algn="r"/>
             <a:r>
-              <a:rPr sz="900" b="0">
+              <a:rPr sz="1000" b="0">
                 <a:solidFill>
                   <a:srgbClr val="A08A9C"/>
                 </a:solidFill>
                 <a:latin typeface="Yu Gothic"/>
               </a:rPr>
               <a:t>27 / 29</a:t>
-            </a:r>
-          </a:p>
-        </p:txBody>
-      </p:sp>
-      <p:sp>
-        <p:nvSpPr>
-          <p:cNvPr id="7" name="TextBox 6"/>
-          <p:cNvSpPr txBox="1"/>
-          <p:nvPr/>
-        </p:nvSpPr>
-        <p:spPr>
-          <a:xfrm>
-            <a:off x="457200" y="6446520"/>
-            <a:ext cx="7315200" cy="320040"/>
-          </a:xfrm>
-          <a:prstGeom prst="rect">
-            <a:avLst/>
-          </a:prstGeom>
-          <a:noFill/>
-        </p:spPr>
-        <p:txBody>
-          <a:bodyPr wrap="square" lIns="45720" rIns="45720" tIns="27432" bIns="27432">
-            <a:spAutoFit/>
-          </a:bodyPr>
-          <a:lstStyle/>
-          <a:p>
-            <a:pPr algn="l"/>
-            <a:r>
-              <a:rPr sz="900" b="0">
-                <a:solidFill>
-                  <a:srgbClr val="A08A9C"/>
-                </a:solidFill>
-                <a:latin typeface="Yu Gothic"/>
-              </a:rPr>
-              <a:t>家庭医療科 勉強会 / 2026-04-09</a:t>
             </a:r>
           </a:p>
         </p:txBody>
@@ -8590,7 +8555,7 @@
         <p:spPr>
           <a:xfrm>
             <a:off x="457200" y="365760"/>
-            <a:ext cx="11430000" cy="822960"/>
+            <a:ext cx="11430000" cy="914400"/>
           </a:xfrm>
           <a:prstGeom prst="rect">
             <a:avLst/>
@@ -8605,7 +8570,7 @@
           <a:p>
             <a:pPr algn="l"/>
             <a:r>
-              <a:rPr sz="2600" b="1">
+              <a:rPr sz="3000" b="1">
                 <a:solidFill>
                   <a:srgbClr val="3D1E36"/>
                 </a:solidFill>
@@ -8624,8 +8589,8 @@
         </p:nvSpPr>
         <p:spPr>
           <a:xfrm>
-            <a:off x="548640" y="1371600"/>
-            <a:ext cx="10972800" cy="3200400"/>
+            <a:off x="548640" y="1463040"/>
+            <a:ext cx="10972800" cy="3566160"/>
           </a:xfrm>
           <a:prstGeom prst="rect">
             <a:avLst/>
@@ -8640,7 +8605,7 @@
           <a:p>
             <a:pPr algn="l"/>
             <a:r>
-              <a:rPr sz="1400" b="0">
+              <a:rPr sz="1800" b="0">
                 <a:solidFill>
                   <a:srgbClr val="2E1A2B"/>
                 </a:solidFill>
@@ -8659,8 +8624,8 @@
         </p:nvSpPr>
         <p:spPr>
           <a:xfrm>
-            <a:off x="548640" y="2743200"/>
-            <a:ext cx="10972800" cy="2286000"/>
+            <a:off x="548640" y="3108960"/>
+            <a:ext cx="10972800" cy="2377439"/>
           </a:xfrm>
           <a:prstGeom prst="rect">
             <a:avLst/>
@@ -8674,7 +8639,7 @@
           <a:lstStyle/>
           <a:p>
             <a:r>
-              <a:rPr sz="1400">
+              <a:rPr sz="1800">
                 <a:solidFill>
                   <a:srgbClr val="2E1A2B"/>
                 </a:solidFill>
@@ -8685,7 +8650,7 @@
           </a:p>
           <a:p>
             <a:r>
-              <a:rPr sz="1400">
+              <a:rPr sz="1800">
                 <a:solidFill>
                   <a:srgbClr val="2E1A2B"/>
                 </a:solidFill>
@@ -8696,7 +8661,7 @@
           </a:p>
           <a:p>
             <a:r>
-              <a:rPr sz="1400">
+              <a:rPr sz="1800">
                 <a:solidFill>
                   <a:srgbClr val="2E1A2B"/>
                 </a:solidFill>
@@ -8707,7 +8672,7 @@
           </a:p>
           <a:p>
             <a:r>
-              <a:rPr sz="1400">
+              <a:rPr sz="1800">
                 <a:solidFill>
                   <a:srgbClr val="2E1A2B"/>
                 </a:solidFill>
@@ -8726,7 +8691,42 @@
         </p:nvSpPr>
         <p:spPr>
           <a:xfrm>
-            <a:off x="11247120" y="6446520"/>
+            <a:off x="457200" y="6492240"/>
+            <a:ext cx="9601200" cy="320040"/>
+          </a:xfrm>
+          <a:prstGeom prst="rect">
+            <a:avLst/>
+          </a:prstGeom>
+          <a:noFill/>
+        </p:spPr>
+        <p:txBody>
+          <a:bodyPr wrap="square" lIns="45720" rIns="45720" tIns="27432" bIns="27432">
+            <a:spAutoFit/>
+          </a:bodyPr>
+          <a:lstStyle/>
+          <a:p>
+            <a:pPr algn="l"/>
+            <a:r>
+              <a:rPr sz="1000" b="0">
+                <a:solidFill>
+                  <a:srgbClr val="A08A9C"/>
+                </a:solidFill>
+                <a:latin typeface="Yu Gothic"/>
+              </a:rPr>
+              <a:t>藪医者の学び / 2026-04-09 / 行動経済学×メンタルヘルス</a:t>
+            </a:r>
+          </a:p>
+        </p:txBody>
+      </p:sp>
+      <p:sp>
+        <p:nvSpPr>
+          <p:cNvPr id="7" name="TextBox 6"/>
+          <p:cNvSpPr txBox="1"/>
+          <p:nvPr/>
+        </p:nvSpPr>
+        <p:spPr>
+          <a:xfrm>
+            <a:off x="11247120" y="6492240"/>
             <a:ext cx="914400" cy="320040"/>
           </a:xfrm>
           <a:prstGeom prst="rect">
@@ -8742,48 +8742,13 @@
           <a:p>
             <a:pPr algn="r"/>
             <a:r>
-              <a:rPr sz="900" b="0">
+              <a:rPr sz="1000" b="0">
                 <a:solidFill>
                   <a:srgbClr val="A08A9C"/>
                 </a:solidFill>
                 <a:latin typeface="Yu Gothic"/>
               </a:rPr>
               <a:t>28 / 29</a:t>
-            </a:r>
-          </a:p>
-        </p:txBody>
-      </p:sp>
-      <p:sp>
-        <p:nvSpPr>
-          <p:cNvPr id="7" name="TextBox 6"/>
-          <p:cNvSpPr txBox="1"/>
-          <p:nvPr/>
-        </p:nvSpPr>
-        <p:spPr>
-          <a:xfrm>
-            <a:off x="457200" y="6446520"/>
-            <a:ext cx="7315200" cy="320040"/>
-          </a:xfrm>
-          <a:prstGeom prst="rect">
-            <a:avLst/>
-          </a:prstGeom>
-          <a:noFill/>
-        </p:spPr>
-        <p:txBody>
-          <a:bodyPr wrap="square" lIns="45720" rIns="45720" tIns="27432" bIns="27432">
-            <a:spAutoFit/>
-          </a:bodyPr>
-          <a:lstStyle/>
-          <a:p>
-            <a:pPr algn="l"/>
-            <a:r>
-              <a:rPr sz="900" b="0">
-                <a:solidFill>
-                  <a:srgbClr val="A08A9C"/>
-                </a:solidFill>
-                <a:latin typeface="Yu Gothic"/>
-              </a:rPr>
-              <a:t>家庭医療科 勉強会 / 2026-04-09</a:t>
             </a:r>
           </a:p>
         </p:txBody>
@@ -8865,8 +8830,8 @@
         </p:nvSpPr>
         <p:spPr>
           <a:xfrm>
-            <a:off x="548640" y="1371600"/>
-            <a:ext cx="10972800" cy="3200400"/>
+            <a:off x="548640" y="1463040"/>
+            <a:ext cx="10972800" cy="3566160"/>
           </a:xfrm>
           <a:prstGeom prst="rect">
             <a:avLst/>
@@ -8881,7 +8846,7 @@
           <a:p>
             <a:pPr algn="l"/>
             <a:r>
-              <a:rPr sz="1400" b="0">
+              <a:rPr sz="1800" b="0">
                 <a:solidFill>
                   <a:srgbClr val="2E1A2B"/>
                 </a:solidFill>
@@ -8900,7 +8865,42 @@
         </p:nvSpPr>
         <p:spPr>
           <a:xfrm>
-            <a:off x="11247120" y="6446520"/>
+            <a:off x="457200" y="6492240"/>
+            <a:ext cx="9601200" cy="320040"/>
+          </a:xfrm>
+          <a:prstGeom prst="rect">
+            <a:avLst/>
+          </a:prstGeom>
+          <a:noFill/>
+        </p:spPr>
+        <p:txBody>
+          <a:bodyPr wrap="square" lIns="45720" rIns="45720" tIns="27432" bIns="27432">
+            <a:spAutoFit/>
+          </a:bodyPr>
+          <a:lstStyle/>
+          <a:p>
+            <a:pPr algn="l"/>
+            <a:r>
+              <a:rPr sz="1000" b="0">
+                <a:solidFill>
+                  <a:srgbClr val="A08A9C"/>
+                </a:solidFill>
+                <a:latin typeface="Yu Gothic"/>
+              </a:rPr>
+              <a:t>藪医者の学び / 2026-04-09 / 行動経済学×メンタルヘルス</a:t>
+            </a:r>
+          </a:p>
+        </p:txBody>
+      </p:sp>
+      <p:sp>
+        <p:nvSpPr>
+          <p:cNvPr id="5" name="TextBox 4"/>
+          <p:cNvSpPr txBox="1"/>
+          <p:nvPr/>
+        </p:nvSpPr>
+        <p:spPr>
+          <a:xfrm>
+            <a:off x="11247120" y="6492240"/>
             <a:ext cx="914400" cy="320040"/>
           </a:xfrm>
           <a:prstGeom prst="rect">
@@ -8916,48 +8916,13 @@
           <a:p>
             <a:pPr algn="r"/>
             <a:r>
-              <a:rPr sz="900" b="0">
+              <a:rPr sz="1000" b="0">
                 <a:solidFill>
                   <a:srgbClr val="A08A9C"/>
                 </a:solidFill>
                 <a:latin typeface="Yu Gothic"/>
               </a:rPr>
               <a:t>29 / 29</a:t>
-            </a:r>
-          </a:p>
-        </p:txBody>
-      </p:sp>
-      <p:sp>
-        <p:nvSpPr>
-          <p:cNvPr id="5" name="TextBox 4"/>
-          <p:cNvSpPr txBox="1"/>
-          <p:nvPr/>
-        </p:nvSpPr>
-        <p:spPr>
-          <a:xfrm>
-            <a:off x="457200" y="6446520"/>
-            <a:ext cx="7315200" cy="320040"/>
-          </a:xfrm>
-          <a:prstGeom prst="rect">
-            <a:avLst/>
-          </a:prstGeom>
-          <a:noFill/>
-        </p:spPr>
-        <p:txBody>
-          <a:bodyPr wrap="square" lIns="45720" rIns="45720" tIns="27432" bIns="27432">
-            <a:spAutoFit/>
-          </a:bodyPr>
-          <a:lstStyle/>
-          <a:p>
-            <a:pPr algn="l"/>
-            <a:r>
-              <a:rPr sz="900" b="0">
-                <a:solidFill>
-                  <a:srgbClr val="A08A9C"/>
-                </a:solidFill>
-                <a:latin typeface="Yu Gothic"/>
-              </a:rPr>
-              <a:t>家庭医療科 勉強会 / 2026-04-09</a:t>
             </a:r>
           </a:p>
         </p:txBody>
@@ -8978,8 +8943,8 @@
         </p:blipFill>
         <p:spPr>
           <a:xfrm>
-            <a:off x="10424160" y="5212080"/>
-            <a:ext cx="1280160" cy="1280160"/>
+            <a:off x="10424160" y="5120640"/>
+            <a:ext cx="1371600" cy="1371600"/>
           </a:xfrm>
           <a:prstGeom prst="rect">
             <a:avLst/>
@@ -8994,7 +8959,7 @@
         </p:nvSpPr>
         <p:spPr>
           <a:xfrm>
-            <a:off x="10424160" y="4983480"/>
+            <a:off x="10424160" y="4892040"/>
             <a:ext cx="1463040" cy="228600"/>
           </a:xfrm>
           <a:prstGeom prst="rect">
@@ -9010,7 +8975,7 @@
           <a:p>
             <a:pPr algn="l"/>
             <a:r>
-              <a:rPr sz="800" b="1">
+              <a:rPr sz="900" b="1">
                 <a:solidFill>
                   <a:srgbClr val="2E1A2B"/>
                 </a:solidFill>
@@ -9099,7 +9064,7 @@
         <p:spPr>
           <a:xfrm>
             <a:off x="457200" y="365760"/>
-            <a:ext cx="11430000" cy="822960"/>
+            <a:ext cx="11430000" cy="914400"/>
           </a:xfrm>
           <a:prstGeom prst="rect">
             <a:avLst/>
@@ -9114,7 +9079,7 @@
           <a:p>
             <a:pPr algn="l"/>
             <a:r>
-              <a:rPr sz="2600" b="1">
+              <a:rPr sz="3000" b="1">
                 <a:solidFill>
                   <a:srgbClr val="3D1E36"/>
                 </a:solidFill>
@@ -9133,8 +9098,8 @@
         </p:nvSpPr>
         <p:spPr>
           <a:xfrm>
-            <a:off x="548640" y="1371600"/>
-            <a:ext cx="10972800" cy="3657600"/>
+            <a:off x="548640" y="1463040"/>
+            <a:ext cx="10972800" cy="4023360"/>
           </a:xfrm>
           <a:prstGeom prst="rect">
             <a:avLst/>
@@ -9148,7 +9113,7 @@
           <a:lstStyle/>
           <a:p>
             <a:r>
-              <a:rPr sz="1400">
+              <a:rPr sz="1800">
                 <a:solidFill>
                   <a:srgbClr val="2E1A2B"/>
                 </a:solidFill>
@@ -9159,7 +9124,7 @@
           </a:p>
           <a:p>
             <a:r>
-              <a:rPr sz="1400">
+              <a:rPr sz="1800">
                 <a:solidFill>
                   <a:srgbClr val="2E1A2B"/>
                 </a:solidFill>
@@ -9170,7 +9135,7 @@
           </a:p>
           <a:p>
             <a:r>
-              <a:rPr sz="1400">
+              <a:rPr sz="1800">
                 <a:solidFill>
                   <a:srgbClr val="2E1A2B"/>
                 </a:solidFill>
@@ -9181,7 +9146,7 @@
           </a:p>
           <a:p>
             <a:r>
-              <a:rPr sz="1400">
+              <a:rPr sz="1800">
                 <a:solidFill>
                   <a:srgbClr val="2E1A2B"/>
                 </a:solidFill>
@@ -9192,7 +9157,7 @@
           </a:p>
           <a:p>
             <a:r>
-              <a:rPr sz="1400">
+              <a:rPr sz="1800">
                 <a:solidFill>
                   <a:srgbClr val="2E1A2B"/>
                 </a:solidFill>
@@ -9203,7 +9168,7 @@
           </a:p>
           <a:p>
             <a:r>
-              <a:rPr sz="1400">
+              <a:rPr sz="1800">
                 <a:solidFill>
                   <a:srgbClr val="2E1A2B"/>
                 </a:solidFill>
@@ -9222,7 +9187,42 @@
         </p:nvSpPr>
         <p:spPr>
           <a:xfrm>
-            <a:off x="11247120" y="6446520"/>
+            <a:off x="457200" y="6492240"/>
+            <a:ext cx="9601200" cy="320040"/>
+          </a:xfrm>
+          <a:prstGeom prst="rect">
+            <a:avLst/>
+          </a:prstGeom>
+          <a:noFill/>
+        </p:spPr>
+        <p:txBody>
+          <a:bodyPr wrap="square" lIns="45720" rIns="45720" tIns="27432" bIns="27432">
+            <a:spAutoFit/>
+          </a:bodyPr>
+          <a:lstStyle/>
+          <a:p>
+            <a:pPr algn="l"/>
+            <a:r>
+              <a:rPr sz="1000" b="0">
+                <a:solidFill>
+                  <a:srgbClr val="A08A9C"/>
+                </a:solidFill>
+                <a:latin typeface="Yu Gothic"/>
+              </a:rPr>
+              <a:t>藪医者の学び / 2026-04-09 / 行動経済学×メンタルヘルス</a:t>
+            </a:r>
+          </a:p>
+        </p:txBody>
+      </p:sp>
+      <p:sp>
+        <p:nvSpPr>
+          <p:cNvPr id="6" name="TextBox 5"/>
+          <p:cNvSpPr txBox="1"/>
+          <p:nvPr/>
+        </p:nvSpPr>
+        <p:spPr>
+          <a:xfrm>
+            <a:off x="11247120" y="6492240"/>
             <a:ext cx="914400" cy="320040"/>
           </a:xfrm>
           <a:prstGeom prst="rect">
@@ -9238,48 +9238,13 @@
           <a:p>
             <a:pPr algn="r"/>
             <a:r>
-              <a:rPr sz="900" b="0">
+              <a:rPr sz="1000" b="0">
                 <a:solidFill>
                   <a:srgbClr val="A08A9C"/>
                 </a:solidFill>
                 <a:latin typeface="Yu Gothic"/>
               </a:rPr>
               <a:t>3 / 29</a:t>
-            </a:r>
-          </a:p>
-        </p:txBody>
-      </p:sp>
-      <p:sp>
-        <p:nvSpPr>
-          <p:cNvPr id="6" name="TextBox 5"/>
-          <p:cNvSpPr txBox="1"/>
-          <p:nvPr/>
-        </p:nvSpPr>
-        <p:spPr>
-          <a:xfrm>
-            <a:off x="457200" y="6446520"/>
-            <a:ext cx="7315200" cy="320040"/>
-          </a:xfrm>
-          <a:prstGeom prst="rect">
-            <a:avLst/>
-          </a:prstGeom>
-          <a:noFill/>
-        </p:spPr>
-        <p:txBody>
-          <a:bodyPr wrap="square" lIns="45720" rIns="45720" tIns="27432" bIns="27432">
-            <a:spAutoFit/>
-          </a:bodyPr>
-          <a:lstStyle/>
-          <a:p>
-            <a:pPr algn="l"/>
-            <a:r>
-              <a:rPr sz="900" b="0">
-                <a:solidFill>
-                  <a:srgbClr val="A08A9C"/>
-                </a:solidFill>
-                <a:latin typeface="Yu Gothic"/>
-              </a:rPr>
-              <a:t>家庭医療科 勉強会 / 2026-04-09</a:t>
             </a:r>
           </a:p>
         </p:txBody>
@@ -9362,7 +9327,7 @@
         <p:spPr>
           <a:xfrm>
             <a:off x="457200" y="365760"/>
-            <a:ext cx="11430000" cy="822960"/>
+            <a:ext cx="11430000" cy="914400"/>
           </a:xfrm>
           <a:prstGeom prst="rect">
             <a:avLst/>
@@ -9377,7 +9342,7 @@
           <a:p>
             <a:pPr algn="l"/>
             <a:r>
-              <a:rPr sz="2600" b="1">
+              <a:rPr sz="3000" b="1">
                 <a:solidFill>
                   <a:srgbClr val="C76B8A"/>
                 </a:solidFill>
@@ -9396,7 +9361,42 @@
         </p:nvSpPr>
         <p:spPr>
           <a:xfrm>
-            <a:off x="11247120" y="6446520"/>
+            <a:off x="457200" y="6492240"/>
+            <a:ext cx="9601200" cy="320040"/>
+          </a:xfrm>
+          <a:prstGeom prst="rect">
+            <a:avLst/>
+          </a:prstGeom>
+          <a:noFill/>
+        </p:spPr>
+        <p:txBody>
+          <a:bodyPr wrap="square" lIns="45720" rIns="45720" tIns="27432" bIns="27432">
+            <a:spAutoFit/>
+          </a:bodyPr>
+          <a:lstStyle/>
+          <a:p>
+            <a:pPr algn="l"/>
+            <a:r>
+              <a:rPr sz="1000" b="0">
+                <a:solidFill>
+                  <a:srgbClr val="A08A9C"/>
+                </a:solidFill>
+                <a:latin typeface="Yu Gothic"/>
+              </a:rPr>
+              <a:t>藪医者の学び / 2026-04-09 / 行動経済学×メンタルヘルス</a:t>
+            </a:r>
+          </a:p>
+        </p:txBody>
+      </p:sp>
+      <p:sp>
+        <p:nvSpPr>
+          <p:cNvPr id="5" name="TextBox 4"/>
+          <p:cNvSpPr txBox="1"/>
+          <p:nvPr/>
+        </p:nvSpPr>
+        <p:spPr>
+          <a:xfrm>
+            <a:off x="11247120" y="6492240"/>
             <a:ext cx="914400" cy="320040"/>
           </a:xfrm>
           <a:prstGeom prst="rect">
@@ -9412,48 +9412,13 @@
           <a:p>
             <a:pPr algn="r"/>
             <a:r>
-              <a:rPr sz="900" b="0">
+              <a:rPr sz="1000" b="0">
                 <a:solidFill>
                   <a:srgbClr val="A08A9C"/>
                 </a:solidFill>
                 <a:latin typeface="Yu Gothic"/>
               </a:rPr>
               <a:t>4 / 29</a:t>
-            </a:r>
-          </a:p>
-        </p:txBody>
-      </p:sp>
-      <p:sp>
-        <p:nvSpPr>
-          <p:cNvPr id="5" name="TextBox 4"/>
-          <p:cNvSpPr txBox="1"/>
-          <p:nvPr/>
-        </p:nvSpPr>
-        <p:spPr>
-          <a:xfrm>
-            <a:off x="457200" y="6446520"/>
-            <a:ext cx="7315200" cy="320040"/>
-          </a:xfrm>
-          <a:prstGeom prst="rect">
-            <a:avLst/>
-          </a:prstGeom>
-          <a:noFill/>
-        </p:spPr>
-        <p:txBody>
-          <a:bodyPr wrap="square" lIns="45720" rIns="45720" tIns="27432" bIns="27432">
-            <a:spAutoFit/>
-          </a:bodyPr>
-          <a:lstStyle/>
-          <a:p>
-            <a:pPr algn="l"/>
-            <a:r>
-              <a:rPr sz="900" b="0">
-                <a:solidFill>
-                  <a:srgbClr val="A08A9C"/>
-                </a:solidFill>
-                <a:latin typeface="Yu Gothic"/>
-              </a:rPr>
-              <a:t>家庭医療科 勉強会 / 2026-04-09</a:t>
             </a:r>
           </a:p>
         </p:txBody>
@@ -9536,7 +9501,7 @@
         <p:spPr>
           <a:xfrm>
             <a:off x="457200" y="365760"/>
-            <a:ext cx="11430000" cy="822960"/>
+            <a:ext cx="11430000" cy="914400"/>
           </a:xfrm>
           <a:prstGeom prst="rect">
             <a:avLst/>
@@ -9551,7 +9516,7 @@
           <a:p>
             <a:pPr algn="l"/>
             <a:r>
-              <a:rPr sz="2600" b="1">
+              <a:rPr sz="3000" b="1">
                 <a:solidFill>
                   <a:srgbClr val="3D1E36"/>
                 </a:solidFill>
@@ -9570,8 +9535,8 @@
         </p:nvSpPr>
         <p:spPr>
           <a:xfrm>
-            <a:off x="548640" y="1371600"/>
-            <a:ext cx="10972800" cy="3200400"/>
+            <a:off x="548640" y="1463040"/>
+            <a:ext cx="10972800" cy="3566160"/>
           </a:xfrm>
           <a:prstGeom prst="rect">
             <a:avLst/>
@@ -9586,7 +9551,7 @@
           <a:p>
             <a:pPr algn="l"/>
             <a:r>
-              <a:rPr sz="1400" b="0">
+              <a:rPr sz="1800" b="0">
                 <a:solidFill>
                   <a:srgbClr val="2E1A2B"/>
                 </a:solidFill>
@@ -9596,7 +9561,7 @@
             </a:r>
             <a:br/>
             <a:r>
-              <a:rPr sz="1400" b="0">
+              <a:rPr sz="1800" b="0">
                 <a:solidFill>
                   <a:srgbClr val="2E1A2B"/>
                 </a:solidFill>
@@ -9615,8 +9580,8 @@
         </p:nvSpPr>
         <p:spPr>
           <a:xfrm>
-            <a:off x="548640" y="2743200"/>
-            <a:ext cx="10972800" cy="2286000"/>
+            <a:off x="548640" y="3108960"/>
+            <a:ext cx="10972800" cy="2377439"/>
           </a:xfrm>
           <a:prstGeom prst="rect">
             <a:avLst/>
@@ -9630,7 +9595,7 @@
           <a:lstStyle/>
           <a:p>
             <a:r>
-              <a:rPr sz="1400">
+              <a:rPr sz="1800">
                 <a:solidFill>
                   <a:srgbClr val="2E1A2B"/>
                 </a:solidFill>
@@ -9641,7 +9606,7 @@
           </a:p>
           <a:p>
             <a:r>
-              <a:rPr sz="1400">
+              <a:rPr sz="1800">
                 <a:solidFill>
                   <a:srgbClr val="2E1A2B"/>
                 </a:solidFill>
@@ -9652,7 +9617,7 @@
           </a:p>
           <a:p>
             <a:r>
-              <a:rPr sz="1400">
+              <a:rPr sz="1800">
                 <a:solidFill>
                   <a:srgbClr val="2E1A2B"/>
                 </a:solidFill>
@@ -9663,7 +9628,7 @@
           </a:p>
           <a:p>
             <a:r>
-              <a:rPr sz="1400">
+              <a:rPr sz="1800">
                 <a:solidFill>
                   <a:srgbClr val="2E1A2B"/>
                 </a:solidFill>
@@ -9674,7 +9639,7 @@
           </a:p>
           <a:p>
             <a:r>
-              <a:rPr sz="1400">
+              <a:rPr sz="1800">
                 <a:solidFill>
                   <a:srgbClr val="2E1A2B"/>
                 </a:solidFill>
@@ -9693,7 +9658,42 @@
         </p:nvSpPr>
         <p:spPr>
           <a:xfrm>
-            <a:off x="11247120" y="6446520"/>
+            <a:off x="457200" y="6492240"/>
+            <a:ext cx="9601200" cy="320040"/>
+          </a:xfrm>
+          <a:prstGeom prst="rect">
+            <a:avLst/>
+          </a:prstGeom>
+          <a:noFill/>
+        </p:spPr>
+        <p:txBody>
+          <a:bodyPr wrap="square" lIns="45720" rIns="45720" tIns="27432" bIns="27432">
+            <a:spAutoFit/>
+          </a:bodyPr>
+          <a:lstStyle/>
+          <a:p>
+            <a:pPr algn="l"/>
+            <a:r>
+              <a:rPr sz="1000" b="0">
+                <a:solidFill>
+                  <a:srgbClr val="A08A9C"/>
+                </a:solidFill>
+                <a:latin typeface="Yu Gothic"/>
+              </a:rPr>
+              <a:t>藪医者の学び / 2026-04-09 / 行動経済学×メンタルヘルス</a:t>
+            </a:r>
+          </a:p>
+        </p:txBody>
+      </p:sp>
+      <p:sp>
+        <p:nvSpPr>
+          <p:cNvPr id="7" name="TextBox 6"/>
+          <p:cNvSpPr txBox="1"/>
+          <p:nvPr/>
+        </p:nvSpPr>
+        <p:spPr>
+          <a:xfrm>
+            <a:off x="11247120" y="6492240"/>
             <a:ext cx="914400" cy="320040"/>
           </a:xfrm>
           <a:prstGeom prst="rect">
@@ -9709,48 +9709,13 @@
           <a:p>
             <a:pPr algn="r"/>
             <a:r>
-              <a:rPr sz="900" b="0">
+              <a:rPr sz="1000" b="0">
                 <a:solidFill>
                   <a:srgbClr val="A08A9C"/>
                 </a:solidFill>
                 <a:latin typeface="Yu Gothic"/>
               </a:rPr>
               <a:t>5 / 29</a:t>
-            </a:r>
-          </a:p>
-        </p:txBody>
-      </p:sp>
-      <p:sp>
-        <p:nvSpPr>
-          <p:cNvPr id="7" name="TextBox 6"/>
-          <p:cNvSpPr txBox="1"/>
-          <p:nvPr/>
-        </p:nvSpPr>
-        <p:spPr>
-          <a:xfrm>
-            <a:off x="457200" y="6446520"/>
-            <a:ext cx="7315200" cy="320040"/>
-          </a:xfrm>
-          <a:prstGeom prst="rect">
-            <a:avLst/>
-          </a:prstGeom>
-          <a:noFill/>
-        </p:spPr>
-        <p:txBody>
-          <a:bodyPr wrap="square" lIns="45720" rIns="45720" tIns="27432" bIns="27432">
-            <a:spAutoFit/>
-          </a:bodyPr>
-          <a:lstStyle/>
-          <a:p>
-            <a:pPr algn="l"/>
-            <a:r>
-              <a:rPr sz="900" b="0">
-                <a:solidFill>
-                  <a:srgbClr val="A08A9C"/>
-                </a:solidFill>
-                <a:latin typeface="Yu Gothic"/>
-              </a:rPr>
-              <a:t>家庭医療科 勉強会 / 2026-04-09</a:t>
             </a:r>
           </a:p>
         </p:txBody>
@@ -9833,7 +9798,7 @@
         <p:spPr>
           <a:xfrm>
             <a:off x="457200" y="365760"/>
-            <a:ext cx="11430000" cy="822960"/>
+            <a:ext cx="11430000" cy="914400"/>
           </a:xfrm>
           <a:prstGeom prst="rect">
             <a:avLst/>
@@ -9848,7 +9813,7 @@
           <a:p>
             <a:pPr algn="l"/>
             <a:r>
-              <a:rPr sz="2600" b="1">
+              <a:rPr sz="3000" b="1">
                 <a:solidFill>
                   <a:srgbClr val="3D1E36"/>
                 </a:solidFill>
@@ -9867,8 +9832,8 @@
         </p:nvSpPr>
         <p:spPr>
           <a:xfrm>
-            <a:off x="548640" y="1371600"/>
-            <a:ext cx="10972800" cy="3200400"/>
+            <a:off x="548640" y="1463040"/>
+            <a:ext cx="10972800" cy="3566160"/>
           </a:xfrm>
           <a:prstGeom prst="rect">
             <a:avLst/>
@@ -9883,7 +9848,7 @@
           <a:p>
             <a:pPr algn="l"/>
             <a:r>
-              <a:rPr sz="1400" b="0">
+              <a:rPr sz="1800" b="0">
                 <a:solidFill>
                   <a:srgbClr val="2E1A2B"/>
                 </a:solidFill>
@@ -9893,7 +9858,7 @@
             </a:r>
             <a:br/>
             <a:r>
-              <a:rPr sz="1400" b="0">
+              <a:rPr sz="1800" b="0">
                 <a:solidFill>
                   <a:srgbClr val="2E1A2B"/>
                 </a:solidFill>
@@ -9903,7 +9868,7 @@
             </a:r>
             <a:br/>
             <a:r>
-              <a:rPr sz="1400" b="0">
+              <a:rPr sz="1800" b="0">
                 <a:solidFill>
                   <a:srgbClr val="2E1A2B"/>
                 </a:solidFill>
@@ -9922,8 +9887,8 @@
         </p:nvSpPr>
         <p:spPr>
           <a:xfrm>
-            <a:off x="548640" y="2743200"/>
-            <a:ext cx="10972800" cy="2286000"/>
+            <a:off x="548640" y="3108960"/>
+            <a:ext cx="10972800" cy="2377439"/>
           </a:xfrm>
           <a:prstGeom prst="rect">
             <a:avLst/>
@@ -9937,7 +9902,7 @@
           <a:lstStyle/>
           <a:p>
             <a:r>
-              <a:rPr sz="1400">
+              <a:rPr sz="1800">
                 <a:solidFill>
                   <a:srgbClr val="2E1A2B"/>
                 </a:solidFill>
@@ -9948,7 +9913,7 @@
           </a:p>
           <a:p>
             <a:r>
-              <a:rPr sz="1400">
+              <a:rPr sz="1800">
                 <a:solidFill>
                   <a:srgbClr val="2E1A2B"/>
                 </a:solidFill>
@@ -9959,7 +9924,7 @@
           </a:p>
           <a:p>
             <a:r>
-              <a:rPr sz="1400">
+              <a:rPr sz="1800">
                 <a:solidFill>
                   <a:srgbClr val="2E1A2B"/>
                 </a:solidFill>
@@ -9978,7 +9943,42 @@
         </p:nvSpPr>
         <p:spPr>
           <a:xfrm>
-            <a:off x="11247120" y="6446520"/>
+            <a:off x="457200" y="6492240"/>
+            <a:ext cx="9601200" cy="320040"/>
+          </a:xfrm>
+          <a:prstGeom prst="rect">
+            <a:avLst/>
+          </a:prstGeom>
+          <a:noFill/>
+        </p:spPr>
+        <p:txBody>
+          <a:bodyPr wrap="square" lIns="45720" rIns="45720" tIns="27432" bIns="27432">
+            <a:spAutoFit/>
+          </a:bodyPr>
+          <a:lstStyle/>
+          <a:p>
+            <a:pPr algn="l"/>
+            <a:r>
+              <a:rPr sz="1000" b="0">
+                <a:solidFill>
+                  <a:srgbClr val="A08A9C"/>
+                </a:solidFill>
+                <a:latin typeface="Yu Gothic"/>
+              </a:rPr>
+              <a:t>藪医者の学び / 2026-04-09 / 行動経済学×メンタルヘルス</a:t>
+            </a:r>
+          </a:p>
+        </p:txBody>
+      </p:sp>
+      <p:sp>
+        <p:nvSpPr>
+          <p:cNvPr id="7" name="TextBox 6"/>
+          <p:cNvSpPr txBox="1"/>
+          <p:nvPr/>
+        </p:nvSpPr>
+        <p:spPr>
+          <a:xfrm>
+            <a:off x="11247120" y="6492240"/>
             <a:ext cx="914400" cy="320040"/>
           </a:xfrm>
           <a:prstGeom prst="rect">
@@ -9994,48 +9994,13 @@
           <a:p>
             <a:pPr algn="r"/>
             <a:r>
-              <a:rPr sz="900" b="0">
+              <a:rPr sz="1000" b="0">
                 <a:solidFill>
                   <a:srgbClr val="A08A9C"/>
                 </a:solidFill>
                 <a:latin typeface="Yu Gothic"/>
               </a:rPr>
               <a:t>6 / 29</a:t>
-            </a:r>
-          </a:p>
-        </p:txBody>
-      </p:sp>
-      <p:sp>
-        <p:nvSpPr>
-          <p:cNvPr id="7" name="TextBox 6"/>
-          <p:cNvSpPr txBox="1"/>
-          <p:nvPr/>
-        </p:nvSpPr>
-        <p:spPr>
-          <a:xfrm>
-            <a:off x="457200" y="6446520"/>
-            <a:ext cx="7315200" cy="320040"/>
-          </a:xfrm>
-          <a:prstGeom prst="rect">
-            <a:avLst/>
-          </a:prstGeom>
-          <a:noFill/>
-        </p:spPr>
-        <p:txBody>
-          <a:bodyPr wrap="square" lIns="45720" rIns="45720" tIns="27432" bIns="27432">
-            <a:spAutoFit/>
-          </a:bodyPr>
-          <a:lstStyle/>
-          <a:p>
-            <a:pPr algn="l"/>
-            <a:r>
-              <a:rPr sz="900" b="0">
-                <a:solidFill>
-                  <a:srgbClr val="A08A9C"/>
-                </a:solidFill>
-                <a:latin typeface="Yu Gothic"/>
-              </a:rPr>
-              <a:t>家庭医療科 勉強会 / 2026-04-09</a:t>
             </a:r>
           </a:p>
         </p:txBody>
@@ -10118,7 +10083,7 @@
         <p:spPr>
           <a:xfrm>
             <a:off x="457200" y="365760"/>
-            <a:ext cx="11430000" cy="822960"/>
+            <a:ext cx="11430000" cy="914400"/>
           </a:xfrm>
           <a:prstGeom prst="rect">
             <a:avLst/>
@@ -10133,7 +10098,7 @@
           <a:p>
             <a:pPr algn="l"/>
             <a:r>
-              <a:rPr sz="2600" b="1">
+              <a:rPr sz="3000" b="1">
                 <a:solidFill>
                   <a:srgbClr val="3D1E36"/>
                 </a:solidFill>
@@ -10153,8 +10118,8 @@
           <p:nvPr/>
         </p:nvGraphicFramePr>
         <p:xfrm>
-          <a:off x="548640" y="1371600"/>
-          <a:ext cx="10972800" cy="2011680"/>
+          <a:off x="548640" y="1463040"/>
+          <a:ext cx="10972800" cy="2194560"/>
         </p:xfrm>
         <a:graphic>
           <a:graphicData uri="http://schemas.openxmlformats.org/drawingml/2006/table">
@@ -10166,14 +10131,14 @@
                 <a:gridCol w="5486400"/>
                 <a:gridCol w="5486400"/>
               </a:tblGrid>
-              <a:tr h="502920">
+              <a:tr h="548640">
                 <a:tc>
                   <a:txBody>
                     <a:bodyPr/>
                     <a:lstStyle/>
                     <a:p>
                       <a:r>
-                        <a:rPr sz="1200" b="1">
+                        <a:rPr sz="1400" b="1">
                           <a:solidFill>
                             <a:srgbClr val="FCF6F0"/>
                           </a:solidFill>
@@ -10195,7 +10160,7 @@
                     <a:lstStyle/>
                     <a:p>
                       <a:r>
-                        <a:rPr sz="1200" b="1">
+                        <a:rPr sz="1400" b="1">
                           <a:solidFill>
                             <a:srgbClr val="FCF6F0"/>
                           </a:solidFill>
@@ -10212,14 +10177,14 @@
                   </a:tcPr>
                 </a:tc>
               </a:tr>
-              <a:tr h="502920">
+              <a:tr h="548640">
                 <a:tc>
                   <a:txBody>
                     <a:bodyPr/>
                     <a:lstStyle/>
                     <a:p>
                       <a:r>
-                        <a:rPr sz="1200">
+                        <a:rPr sz="1400">
                           <a:solidFill>
                             <a:srgbClr val="2E1A2B"/>
                           </a:solidFill>
@@ -10241,7 +10206,7 @@
                     <a:lstStyle/>
                     <a:p>
                       <a:r>
-                        <a:rPr sz="1200">
+                        <a:rPr sz="1400">
                           <a:solidFill>
                             <a:srgbClr val="2E1A2B"/>
                           </a:solidFill>
@@ -10258,14 +10223,14 @@
                   </a:tcPr>
                 </a:tc>
               </a:tr>
-              <a:tr h="502920">
+              <a:tr h="548640">
                 <a:tc>
                   <a:txBody>
                     <a:bodyPr/>
                     <a:lstStyle/>
                     <a:p>
                       <a:r>
-                        <a:rPr sz="1200">
+                        <a:rPr sz="1400">
                           <a:solidFill>
                             <a:srgbClr val="2E1A2B"/>
                           </a:solidFill>
@@ -10287,7 +10252,7 @@
                     <a:lstStyle/>
                     <a:p>
                       <a:r>
-                        <a:rPr sz="1200">
+                        <a:rPr sz="1400">
                           <a:solidFill>
                             <a:srgbClr val="2E1A2B"/>
                           </a:solidFill>
@@ -10304,14 +10269,14 @@
                   </a:tcPr>
                 </a:tc>
               </a:tr>
-              <a:tr h="502920">
+              <a:tr h="548640">
                 <a:tc>
                   <a:txBody>
                     <a:bodyPr/>
                     <a:lstStyle/>
                     <a:p>
                       <a:r>
-                        <a:rPr sz="1200">
+                        <a:rPr sz="1400">
                           <a:solidFill>
                             <a:srgbClr val="2E1A2B"/>
                           </a:solidFill>
@@ -10333,7 +10298,7 @@
                     <a:lstStyle/>
                     <a:p>
                       <a:r>
-                        <a:rPr sz="1200">
+                        <a:rPr sz="1400">
                           <a:solidFill>
                             <a:srgbClr val="2E1A2B"/>
                           </a:solidFill>
@@ -10362,7 +10327,7 @@
         </p:nvSpPr>
         <p:spPr>
           <a:xfrm>
-            <a:off x="548640" y="3657600"/>
+            <a:off x="548640" y="3931920"/>
             <a:ext cx="10972800" cy="1371600"/>
           </a:xfrm>
           <a:prstGeom prst="rect">
@@ -10378,7 +10343,7 @@
           <a:p>
             <a:pPr algn="l"/>
             <a:r>
-              <a:rPr sz="1400" b="0">
+              <a:rPr sz="1800" b="0">
                 <a:solidFill>
                   <a:srgbClr val="2E1A2B"/>
                 </a:solidFill>
@@ -10388,7 +10353,7 @@
             </a:r>
             <a:br/>
             <a:r>
-              <a:rPr sz="1400" b="0">
+              <a:rPr sz="1800" b="0">
                 <a:solidFill>
                   <a:srgbClr val="2E1A2B"/>
                 </a:solidFill>
@@ -10407,7 +10372,42 @@
         </p:nvSpPr>
         <p:spPr>
           <a:xfrm>
-            <a:off x="11247120" y="6446520"/>
+            <a:off x="457200" y="6492240"/>
+            <a:ext cx="9601200" cy="320040"/>
+          </a:xfrm>
+          <a:prstGeom prst="rect">
+            <a:avLst/>
+          </a:prstGeom>
+          <a:noFill/>
+        </p:spPr>
+        <p:txBody>
+          <a:bodyPr wrap="square" lIns="45720" rIns="45720" tIns="27432" bIns="27432">
+            <a:spAutoFit/>
+          </a:bodyPr>
+          <a:lstStyle/>
+          <a:p>
+            <a:pPr algn="l"/>
+            <a:r>
+              <a:rPr sz="1000" b="0">
+                <a:solidFill>
+                  <a:srgbClr val="A08A9C"/>
+                </a:solidFill>
+                <a:latin typeface="Yu Gothic"/>
+              </a:rPr>
+              <a:t>藪医者の学び / 2026-04-09 / 行動経済学×メンタルヘルス</a:t>
+            </a:r>
+          </a:p>
+        </p:txBody>
+      </p:sp>
+      <p:sp>
+        <p:nvSpPr>
+          <p:cNvPr id="7" name="TextBox 6"/>
+          <p:cNvSpPr txBox="1"/>
+          <p:nvPr/>
+        </p:nvSpPr>
+        <p:spPr>
+          <a:xfrm>
+            <a:off x="11247120" y="6492240"/>
             <a:ext cx="914400" cy="320040"/>
           </a:xfrm>
           <a:prstGeom prst="rect">
@@ -10423,48 +10423,13 @@
           <a:p>
             <a:pPr algn="r"/>
             <a:r>
-              <a:rPr sz="900" b="0">
+              <a:rPr sz="1000" b="0">
                 <a:solidFill>
                   <a:srgbClr val="A08A9C"/>
                 </a:solidFill>
                 <a:latin typeface="Yu Gothic"/>
               </a:rPr>
               <a:t>7 / 29</a:t>
-            </a:r>
-          </a:p>
-        </p:txBody>
-      </p:sp>
-      <p:sp>
-        <p:nvSpPr>
-          <p:cNvPr id="7" name="TextBox 6"/>
-          <p:cNvSpPr txBox="1"/>
-          <p:nvPr/>
-        </p:nvSpPr>
-        <p:spPr>
-          <a:xfrm>
-            <a:off x="457200" y="6446520"/>
-            <a:ext cx="7315200" cy="320040"/>
-          </a:xfrm>
-          <a:prstGeom prst="rect">
-            <a:avLst/>
-          </a:prstGeom>
-          <a:noFill/>
-        </p:spPr>
-        <p:txBody>
-          <a:bodyPr wrap="square" lIns="45720" rIns="45720" tIns="27432" bIns="27432">
-            <a:spAutoFit/>
-          </a:bodyPr>
-          <a:lstStyle/>
-          <a:p>
-            <a:pPr algn="l"/>
-            <a:r>
-              <a:rPr sz="900" b="0">
-                <a:solidFill>
-                  <a:srgbClr val="A08A9C"/>
-                </a:solidFill>
-                <a:latin typeface="Yu Gothic"/>
-              </a:rPr>
-              <a:t>家庭医療科 勉強会 / 2026-04-09</a:t>
             </a:r>
           </a:p>
         </p:txBody>
@@ -10547,7 +10512,7 @@
         <p:spPr>
           <a:xfrm>
             <a:off x="457200" y="365760"/>
-            <a:ext cx="11430000" cy="822960"/>
+            <a:ext cx="11430000" cy="914400"/>
           </a:xfrm>
           <a:prstGeom prst="rect">
             <a:avLst/>
@@ -10562,7 +10527,7 @@
           <a:p>
             <a:pPr algn="l"/>
             <a:r>
-              <a:rPr sz="2600" b="1">
+              <a:rPr sz="3000" b="1">
                 <a:solidFill>
                   <a:srgbClr val="C76B8A"/>
                 </a:solidFill>
@@ -10581,7 +10546,42 @@
         </p:nvSpPr>
         <p:spPr>
           <a:xfrm>
-            <a:off x="11247120" y="6446520"/>
+            <a:off x="457200" y="6492240"/>
+            <a:ext cx="9601200" cy="320040"/>
+          </a:xfrm>
+          <a:prstGeom prst="rect">
+            <a:avLst/>
+          </a:prstGeom>
+          <a:noFill/>
+        </p:spPr>
+        <p:txBody>
+          <a:bodyPr wrap="square" lIns="45720" rIns="45720" tIns="27432" bIns="27432">
+            <a:spAutoFit/>
+          </a:bodyPr>
+          <a:lstStyle/>
+          <a:p>
+            <a:pPr algn="l"/>
+            <a:r>
+              <a:rPr sz="1000" b="0">
+                <a:solidFill>
+                  <a:srgbClr val="A08A9C"/>
+                </a:solidFill>
+                <a:latin typeface="Yu Gothic"/>
+              </a:rPr>
+              <a:t>藪医者の学び / 2026-04-09 / 行動経済学×メンタルヘルス</a:t>
+            </a:r>
+          </a:p>
+        </p:txBody>
+      </p:sp>
+      <p:sp>
+        <p:nvSpPr>
+          <p:cNvPr id="5" name="TextBox 4"/>
+          <p:cNvSpPr txBox="1"/>
+          <p:nvPr/>
+        </p:nvSpPr>
+        <p:spPr>
+          <a:xfrm>
+            <a:off x="11247120" y="6492240"/>
             <a:ext cx="914400" cy="320040"/>
           </a:xfrm>
           <a:prstGeom prst="rect">
@@ -10597,48 +10597,13 @@
           <a:p>
             <a:pPr algn="r"/>
             <a:r>
-              <a:rPr sz="900" b="0">
+              <a:rPr sz="1000" b="0">
                 <a:solidFill>
                   <a:srgbClr val="A08A9C"/>
                 </a:solidFill>
                 <a:latin typeface="Yu Gothic"/>
               </a:rPr>
               <a:t>8 / 29</a:t>
-            </a:r>
-          </a:p>
-        </p:txBody>
-      </p:sp>
-      <p:sp>
-        <p:nvSpPr>
-          <p:cNvPr id="5" name="TextBox 4"/>
-          <p:cNvSpPr txBox="1"/>
-          <p:nvPr/>
-        </p:nvSpPr>
-        <p:spPr>
-          <a:xfrm>
-            <a:off x="457200" y="6446520"/>
-            <a:ext cx="7315200" cy="320040"/>
-          </a:xfrm>
-          <a:prstGeom prst="rect">
-            <a:avLst/>
-          </a:prstGeom>
-          <a:noFill/>
-        </p:spPr>
-        <p:txBody>
-          <a:bodyPr wrap="square" lIns="45720" rIns="45720" tIns="27432" bIns="27432">
-            <a:spAutoFit/>
-          </a:bodyPr>
-          <a:lstStyle/>
-          <a:p>
-            <a:pPr algn="l"/>
-            <a:r>
-              <a:rPr sz="900" b="0">
-                <a:solidFill>
-                  <a:srgbClr val="A08A9C"/>
-                </a:solidFill>
-                <a:latin typeface="Yu Gothic"/>
-              </a:rPr>
-              <a:t>家庭医療科 勉強会 / 2026-04-09</a:t>
             </a:r>
           </a:p>
         </p:txBody>
@@ -10721,7 +10686,7 @@
         <p:spPr>
           <a:xfrm>
             <a:off x="457200" y="365760"/>
-            <a:ext cx="11430000" cy="822960"/>
+            <a:ext cx="11430000" cy="914400"/>
           </a:xfrm>
           <a:prstGeom prst="rect">
             <a:avLst/>
@@ -10736,7 +10701,7 @@
           <a:p>
             <a:pPr algn="l"/>
             <a:r>
-              <a:rPr sz="2600" b="1">
+              <a:rPr sz="3000" b="1">
                 <a:solidFill>
                   <a:srgbClr val="3D1E36"/>
                 </a:solidFill>
@@ -10755,8 +10720,8 @@
         </p:nvSpPr>
         <p:spPr>
           <a:xfrm>
-            <a:off x="548640" y="1371600"/>
-            <a:ext cx="10972800" cy="3200400"/>
+            <a:off x="548640" y="1463040"/>
+            <a:ext cx="10972800" cy="3566160"/>
           </a:xfrm>
           <a:prstGeom prst="rect">
             <a:avLst/>
@@ -10771,7 +10736,7 @@
           <a:p>
             <a:pPr algn="l"/>
             <a:r>
-              <a:rPr sz="1400" b="0">
+              <a:rPr sz="1800" b="0">
                 <a:solidFill>
                   <a:srgbClr val="2E1A2B"/>
                 </a:solidFill>
@@ -10790,8 +10755,8 @@
         </p:nvSpPr>
         <p:spPr>
           <a:xfrm>
-            <a:off x="548640" y="2743200"/>
-            <a:ext cx="10972800" cy="2286000"/>
+            <a:off x="548640" y="3108960"/>
+            <a:ext cx="10972800" cy="2377439"/>
           </a:xfrm>
           <a:prstGeom prst="rect">
             <a:avLst/>
@@ -10805,7 +10770,7 @@
           <a:lstStyle/>
           <a:p>
             <a:r>
-              <a:rPr sz="1400">
+              <a:rPr sz="1800">
                 <a:solidFill>
                   <a:srgbClr val="2E1A2B"/>
                 </a:solidFill>
@@ -10816,7 +10781,7 @@
           </a:p>
           <a:p>
             <a:r>
-              <a:rPr sz="1400">
+              <a:rPr sz="1800">
                 <a:solidFill>
                   <a:srgbClr val="2E1A2B"/>
                 </a:solidFill>
@@ -10827,7 +10792,7 @@
           </a:p>
           <a:p>
             <a:r>
-              <a:rPr sz="1400">
+              <a:rPr sz="1800">
                 <a:solidFill>
                   <a:srgbClr val="2E1A2B"/>
                 </a:solidFill>
@@ -10838,7 +10803,7 @@
           </a:p>
           <a:p>
             <a:r>
-              <a:rPr sz="1400">
+              <a:rPr sz="1800">
                 <a:solidFill>
                   <a:srgbClr val="2E1A2B"/>
                 </a:solidFill>
@@ -10857,7 +10822,42 @@
         </p:nvSpPr>
         <p:spPr>
           <a:xfrm>
-            <a:off x="11247120" y="6446520"/>
+            <a:off x="457200" y="6492240"/>
+            <a:ext cx="9601200" cy="320040"/>
+          </a:xfrm>
+          <a:prstGeom prst="rect">
+            <a:avLst/>
+          </a:prstGeom>
+          <a:noFill/>
+        </p:spPr>
+        <p:txBody>
+          <a:bodyPr wrap="square" lIns="45720" rIns="45720" tIns="27432" bIns="27432">
+            <a:spAutoFit/>
+          </a:bodyPr>
+          <a:lstStyle/>
+          <a:p>
+            <a:pPr algn="l"/>
+            <a:r>
+              <a:rPr sz="1000" b="0">
+                <a:solidFill>
+                  <a:srgbClr val="A08A9C"/>
+                </a:solidFill>
+                <a:latin typeface="Yu Gothic"/>
+              </a:rPr>
+              <a:t>藪医者の学び / 2026-04-09 / 行動経済学×メンタルヘルス</a:t>
+            </a:r>
+          </a:p>
+        </p:txBody>
+      </p:sp>
+      <p:sp>
+        <p:nvSpPr>
+          <p:cNvPr id="7" name="TextBox 6"/>
+          <p:cNvSpPr txBox="1"/>
+          <p:nvPr/>
+        </p:nvSpPr>
+        <p:spPr>
+          <a:xfrm>
+            <a:off x="11247120" y="6492240"/>
             <a:ext cx="914400" cy="320040"/>
           </a:xfrm>
           <a:prstGeom prst="rect">
@@ -10873,48 +10873,13 @@
           <a:p>
             <a:pPr algn="r"/>
             <a:r>
-              <a:rPr sz="900" b="0">
+              <a:rPr sz="1000" b="0">
                 <a:solidFill>
                   <a:srgbClr val="A08A9C"/>
                 </a:solidFill>
                 <a:latin typeface="Yu Gothic"/>
               </a:rPr>
               <a:t>9 / 29</a:t>
-            </a:r>
-          </a:p>
-        </p:txBody>
-      </p:sp>
-      <p:sp>
-        <p:nvSpPr>
-          <p:cNvPr id="7" name="TextBox 6"/>
-          <p:cNvSpPr txBox="1"/>
-          <p:nvPr/>
-        </p:nvSpPr>
-        <p:spPr>
-          <a:xfrm>
-            <a:off x="457200" y="6446520"/>
-            <a:ext cx="7315200" cy="320040"/>
-          </a:xfrm>
-          <a:prstGeom prst="rect">
-            <a:avLst/>
-          </a:prstGeom>
-          <a:noFill/>
-        </p:spPr>
-        <p:txBody>
-          <a:bodyPr wrap="square" lIns="45720" rIns="45720" tIns="27432" bIns="27432">
-            <a:spAutoFit/>
-          </a:bodyPr>
-          <a:lstStyle/>
-          <a:p>
-            <a:pPr algn="l"/>
-            <a:r>
-              <a:rPr sz="900" b="0">
-                <a:solidFill>
-                  <a:srgbClr val="A08A9C"/>
-                </a:solidFill>
-                <a:latin typeface="Yu Gothic"/>
-              </a:rPr>
-              <a:t>家庭医療科 勉強会 / 2026-04-09</a:t>
             </a:r>
           </a:p>
         </p:txBody>

--- a/output/education/2026-04-09_behavioral-economics-mental-health-residents/behavioral-economics-mental-health-residents_slides_residents.pptx
+++ b/output/education/2026-04-09_behavioral-economics-mental-health-residents/behavioral-economics-mental-health-residents_slides_residents.pptx
@@ -3163,7 +3163,9 @@
           <a:bodyPr rtlCol="0" anchor="ctr"/>
           <a:lstStyle/>
           <a:p>
-            <a:pPr algn="ctr"/>
+            <a:pPr algn="ctr">
+              <a:defRPr/>
+            </a:pPr>
           </a:p>
         </p:txBody>
       </p:sp>
@@ -3189,7 +3191,9 @@
           </a:bodyPr>
           <a:lstStyle/>
           <a:p>
-            <a:pPr algn="l"/>
+            <a:pPr algn="l">
+              <a:defRPr/>
+            </a:pPr>
             <a:r>
               <a:rPr sz="3600" b="1">
                 <a:solidFill>
@@ -3210,7 +3214,7 @@
         </p:nvSpPr>
         <p:spPr>
           <a:xfrm>
-            <a:off x="457200" y="1234440"/>
+            <a:off x="457200" y="1298448"/>
             <a:ext cx="11430000" cy="731520"/>
           </a:xfrm>
           <a:prstGeom prst="rect">
@@ -3224,7 +3228,9 @@
           </a:bodyPr>
           <a:lstStyle/>
           <a:p>
-            <a:pPr algn="l"/>
+            <a:pPr algn="l">
+              <a:defRPr/>
+            </a:pPr>
             <a:r>
               <a:rPr sz="2000" b="0">
                 <a:solidFill>
@@ -3259,7 +3265,9 @@
           </a:bodyPr>
           <a:lstStyle/>
           <a:p>
-            <a:pPr algn="l"/>
+            <a:pPr algn="l">
+              <a:defRPr/>
+            </a:pPr>
             <a:r>
               <a:rPr sz="1000" b="0">
                 <a:solidFill>
@@ -3294,7 +3302,9 @@
           </a:bodyPr>
           <a:lstStyle/>
           <a:p>
-            <a:pPr algn="r"/>
+            <a:pPr algn="r">
+              <a:defRPr/>
+            </a:pPr>
             <a:r>
               <a:rPr sz="1000" b="0">
                 <a:solidFill>
@@ -3353,7 +3363,9 @@
           </a:bodyPr>
           <a:lstStyle/>
           <a:p>
-            <a:pPr algn="l"/>
+            <a:pPr algn="l">
+              <a:defRPr/>
+            </a:pPr>
             <a:r>
               <a:rPr sz="900" b="1">
                 <a:solidFill>
@@ -3431,7 +3443,9 @@
           <a:bodyPr rtlCol="0" anchor="ctr"/>
           <a:lstStyle/>
           <a:p>
-            <a:pPr algn="ctr"/>
+            <a:pPr algn="ctr">
+              <a:defRPr/>
+            </a:pPr>
           </a:p>
         </p:txBody>
       </p:sp>
@@ -3457,7 +3471,9 @@
           </a:bodyPr>
           <a:lstStyle/>
           <a:p>
-            <a:pPr algn="l"/>
+            <a:pPr algn="l">
+              <a:defRPr/>
+            </a:pPr>
             <a:r>
               <a:rPr sz="3000" b="1">
                 <a:solidFill>
@@ -3492,7 +3508,9 @@
           </a:bodyPr>
           <a:lstStyle/>
           <a:p>
-            <a:pPr algn="l"/>
+            <a:pPr algn="l">
+              <a:defRPr/>
+            </a:pPr>
             <a:r>
               <a:rPr sz="1800" b="0">
                 <a:solidFill>
@@ -3527,6 +3545,9 @@
           </a:bodyPr>
           <a:lstStyle/>
           <a:p>
+            <a:pPr>
+              <a:defRPr/>
+            </a:pPr>
             <a:r>
               <a:rPr sz="1800">
                 <a:solidFill>
@@ -3538,6 +3559,9 @@
             </a:r>
           </a:p>
           <a:p>
+            <a:pPr>
+              <a:defRPr/>
+            </a:pPr>
             <a:r>
               <a:rPr sz="1800">
                 <a:solidFill>
@@ -3549,6 +3573,9 @@
             </a:r>
           </a:p>
           <a:p>
+            <a:pPr>
+              <a:defRPr/>
+            </a:pPr>
             <a:r>
               <a:rPr sz="1800">
                 <a:solidFill>
@@ -3583,7 +3610,9 @@
           </a:bodyPr>
           <a:lstStyle/>
           <a:p>
-            <a:pPr algn="l"/>
+            <a:pPr algn="l">
+              <a:defRPr/>
+            </a:pPr>
             <a:r>
               <a:rPr sz="1000" b="0">
                 <a:solidFill>
@@ -3618,7 +3647,9 @@
           </a:bodyPr>
           <a:lstStyle/>
           <a:p>
-            <a:pPr algn="r"/>
+            <a:pPr algn="r">
+              <a:defRPr/>
+            </a:pPr>
             <a:r>
               <a:rPr sz="1000" b="0">
                 <a:solidFill>
@@ -3696,7 +3727,9 @@
           <a:bodyPr rtlCol="0" anchor="ctr"/>
           <a:lstStyle/>
           <a:p>
-            <a:pPr algn="ctr"/>
+            <a:pPr algn="ctr">
+              <a:defRPr/>
+            </a:pPr>
           </a:p>
         </p:txBody>
       </p:sp>
@@ -3722,7 +3755,9 @@
           </a:bodyPr>
           <a:lstStyle/>
           <a:p>
-            <a:pPr algn="l"/>
+            <a:pPr algn="l">
+              <a:defRPr/>
+            </a:pPr>
             <a:r>
               <a:rPr sz="3000" b="1">
                 <a:solidFill>
@@ -3757,7 +3792,9 @@
           </a:bodyPr>
           <a:lstStyle/>
           <a:p>
-            <a:pPr algn="l"/>
+            <a:pPr algn="l">
+              <a:defRPr/>
+            </a:pPr>
             <a:r>
               <a:rPr sz="1800" b="0">
                 <a:solidFill>
@@ -3792,6 +3829,9 @@
           </a:bodyPr>
           <a:lstStyle/>
           <a:p>
+            <a:pPr>
+              <a:defRPr/>
+            </a:pPr>
             <a:r>
               <a:rPr sz="1800">
                 <a:solidFill>
@@ -3803,6 +3843,9 @@
             </a:r>
           </a:p>
           <a:p>
+            <a:pPr>
+              <a:defRPr/>
+            </a:pPr>
             <a:r>
               <a:rPr sz="1800">
                 <a:solidFill>
@@ -3814,6 +3857,9 @@
             </a:r>
           </a:p>
           <a:p>
+            <a:pPr>
+              <a:defRPr/>
+            </a:pPr>
             <a:r>
               <a:rPr sz="1800">
                 <a:solidFill>
@@ -3825,6 +3871,9 @@
             </a:r>
           </a:p>
           <a:p>
+            <a:pPr>
+              <a:defRPr/>
+            </a:pPr>
             <a:r>
               <a:rPr sz="1800">
                 <a:solidFill>
@@ -3859,7 +3908,9 @@
           </a:bodyPr>
           <a:lstStyle/>
           <a:p>
-            <a:pPr algn="l"/>
+            <a:pPr algn="l">
+              <a:defRPr/>
+            </a:pPr>
             <a:r>
               <a:rPr sz="1000" b="0">
                 <a:solidFill>
@@ -3894,7 +3945,9 @@
           </a:bodyPr>
           <a:lstStyle/>
           <a:p>
-            <a:pPr algn="r"/>
+            <a:pPr algn="r">
+              <a:defRPr/>
+            </a:pPr>
             <a:r>
               <a:rPr sz="1000" b="0">
                 <a:solidFill>
@@ -3972,7 +4025,9 @@
           <a:bodyPr rtlCol="0" anchor="ctr"/>
           <a:lstStyle/>
           <a:p>
-            <a:pPr algn="ctr"/>
+            <a:pPr algn="ctr">
+              <a:defRPr/>
+            </a:pPr>
           </a:p>
         </p:txBody>
       </p:sp>
@@ -3998,7 +4053,9 @@
           </a:bodyPr>
           <a:lstStyle/>
           <a:p>
-            <a:pPr algn="l"/>
+            <a:pPr algn="l">
+              <a:defRPr/>
+            </a:pPr>
             <a:r>
               <a:rPr sz="3000" b="1">
                 <a:solidFill>
@@ -4033,7 +4090,9 @@
           </a:bodyPr>
           <a:lstStyle/>
           <a:p>
-            <a:pPr algn="l"/>
+            <a:pPr algn="l">
+              <a:defRPr/>
+            </a:pPr>
             <a:r>
               <a:rPr sz="1800" b="0">
                 <a:solidFill>
@@ -4138,7 +4197,9 @@
           </a:bodyPr>
           <a:lstStyle/>
           <a:p>
-            <a:pPr algn="l"/>
+            <a:pPr algn="l">
+              <a:defRPr/>
+            </a:pPr>
             <a:r>
               <a:rPr sz="1000" b="0">
                 <a:solidFill>
@@ -4173,7 +4234,9 @@
           </a:bodyPr>
           <a:lstStyle/>
           <a:p>
-            <a:pPr algn="r"/>
+            <a:pPr algn="r">
+              <a:defRPr/>
+            </a:pPr>
             <a:r>
               <a:rPr sz="1000" b="0">
                 <a:solidFill>
@@ -4251,7 +4314,9 @@
           <a:bodyPr rtlCol="0" anchor="ctr"/>
           <a:lstStyle/>
           <a:p>
-            <a:pPr algn="ctr"/>
+            <a:pPr algn="ctr">
+              <a:defRPr/>
+            </a:pPr>
           </a:p>
         </p:txBody>
       </p:sp>
@@ -4277,7 +4342,9 @@
           </a:bodyPr>
           <a:lstStyle/>
           <a:p>
-            <a:pPr algn="l"/>
+            <a:pPr algn="l">
+              <a:defRPr/>
+            </a:pPr>
             <a:r>
               <a:rPr sz="3000" b="1">
                 <a:solidFill>
@@ -4522,7 +4589,9 @@
           </a:bodyPr>
           <a:lstStyle/>
           <a:p>
-            <a:pPr algn="l"/>
+            <a:pPr algn="l">
+              <a:defRPr/>
+            </a:pPr>
             <a:r>
               <a:rPr sz="1000" b="0">
                 <a:solidFill>
@@ -4557,7 +4626,9 @@
           </a:bodyPr>
           <a:lstStyle/>
           <a:p>
-            <a:pPr algn="r"/>
+            <a:pPr algn="r">
+              <a:defRPr/>
+            </a:pPr>
             <a:r>
               <a:rPr sz="1000" b="0">
                 <a:solidFill>
@@ -4635,7 +4706,9 @@
           <a:bodyPr rtlCol="0" anchor="ctr"/>
           <a:lstStyle/>
           <a:p>
-            <a:pPr algn="ctr"/>
+            <a:pPr algn="ctr">
+              <a:defRPr/>
+            </a:pPr>
           </a:p>
         </p:txBody>
       </p:sp>
@@ -4661,7 +4734,9 @@
           </a:bodyPr>
           <a:lstStyle/>
           <a:p>
-            <a:pPr algn="l"/>
+            <a:pPr algn="l">
+              <a:defRPr/>
+            </a:pPr>
             <a:r>
               <a:rPr sz="3000" b="1">
                 <a:solidFill>
@@ -4696,7 +4771,9 @@
           </a:bodyPr>
           <a:lstStyle/>
           <a:p>
-            <a:pPr algn="l"/>
+            <a:pPr algn="l">
+              <a:defRPr/>
+            </a:pPr>
             <a:r>
               <a:rPr sz="1000" b="0">
                 <a:solidFill>
@@ -4731,7 +4808,9 @@
           </a:bodyPr>
           <a:lstStyle/>
           <a:p>
-            <a:pPr algn="r"/>
+            <a:pPr algn="r">
+              <a:defRPr/>
+            </a:pPr>
             <a:r>
               <a:rPr sz="1000" b="0">
                 <a:solidFill>
@@ -4809,7 +4888,9 @@
           <a:bodyPr rtlCol="0" anchor="ctr"/>
           <a:lstStyle/>
           <a:p>
-            <a:pPr algn="ctr"/>
+            <a:pPr algn="ctr">
+              <a:defRPr/>
+            </a:pPr>
           </a:p>
         </p:txBody>
       </p:sp>
@@ -4835,7 +4916,9 @@
           </a:bodyPr>
           <a:lstStyle/>
           <a:p>
-            <a:pPr algn="l"/>
+            <a:pPr algn="l">
+              <a:defRPr/>
+            </a:pPr>
             <a:r>
               <a:rPr sz="3000" b="1">
                 <a:solidFill>
@@ -5080,7 +5163,9 @@
           </a:bodyPr>
           <a:lstStyle/>
           <a:p>
-            <a:pPr algn="l"/>
+            <a:pPr algn="l">
+              <a:defRPr/>
+            </a:pPr>
             <a:r>
               <a:rPr sz="1800" b="0">
                 <a:solidFill>
@@ -5115,7 +5200,9 @@
           </a:bodyPr>
           <a:lstStyle/>
           <a:p>
-            <a:pPr algn="l"/>
+            <a:pPr algn="l">
+              <a:defRPr/>
+            </a:pPr>
             <a:r>
               <a:rPr sz="1000" b="0">
                 <a:solidFill>
@@ -5150,7 +5237,9 @@
           </a:bodyPr>
           <a:lstStyle/>
           <a:p>
-            <a:pPr algn="r"/>
+            <a:pPr algn="r">
+              <a:defRPr/>
+            </a:pPr>
             <a:r>
               <a:rPr sz="1000" b="0">
                 <a:solidFill>
@@ -5228,7 +5317,9 @@
           <a:bodyPr rtlCol="0" anchor="ctr"/>
           <a:lstStyle/>
           <a:p>
-            <a:pPr algn="ctr"/>
+            <a:pPr algn="ctr">
+              <a:defRPr/>
+            </a:pPr>
           </a:p>
         </p:txBody>
       </p:sp>
@@ -5254,7 +5345,9 @@
           </a:bodyPr>
           <a:lstStyle/>
           <a:p>
-            <a:pPr algn="l"/>
+            <a:pPr algn="l">
+              <a:defRPr/>
+            </a:pPr>
             <a:r>
               <a:rPr sz="3000" b="1">
                 <a:solidFill>
@@ -5289,7 +5382,9 @@
           </a:bodyPr>
           <a:lstStyle/>
           <a:p>
-            <a:pPr algn="l"/>
+            <a:pPr algn="l">
+              <a:defRPr/>
+            </a:pPr>
             <a:r>
               <a:rPr sz="1800" b="0">
                 <a:solidFill>
@@ -5354,7 +5449,9 @@
           </a:bodyPr>
           <a:lstStyle/>
           <a:p>
-            <a:pPr algn="l"/>
+            <a:pPr algn="l">
+              <a:defRPr/>
+            </a:pPr>
             <a:r>
               <a:rPr sz="1000" b="0">
                 <a:solidFill>
@@ -5389,7 +5486,9 @@
           </a:bodyPr>
           <a:lstStyle/>
           <a:p>
-            <a:pPr algn="r"/>
+            <a:pPr algn="r">
+              <a:defRPr/>
+            </a:pPr>
             <a:r>
               <a:rPr sz="1000" b="0">
                 <a:solidFill>
@@ -5467,7 +5566,9 @@
           <a:bodyPr rtlCol="0" anchor="ctr"/>
           <a:lstStyle/>
           <a:p>
-            <a:pPr algn="ctr"/>
+            <a:pPr algn="ctr">
+              <a:defRPr/>
+            </a:pPr>
           </a:p>
         </p:txBody>
       </p:sp>
@@ -5493,7 +5594,9 @@
           </a:bodyPr>
           <a:lstStyle/>
           <a:p>
-            <a:pPr algn="l"/>
+            <a:pPr algn="l">
+              <a:defRPr/>
+            </a:pPr>
             <a:r>
               <a:rPr sz="3000" b="1">
                 <a:solidFill>
@@ -5528,7 +5631,9 @@
           </a:bodyPr>
           <a:lstStyle/>
           <a:p>
-            <a:pPr algn="l"/>
+            <a:pPr algn="l">
+              <a:defRPr/>
+            </a:pPr>
             <a:r>
               <a:rPr sz="1800" b="0">
                 <a:solidFill>
@@ -5603,7 +5708,9 @@
           </a:bodyPr>
           <a:lstStyle/>
           <a:p>
-            <a:pPr algn="l"/>
+            <a:pPr algn="l">
+              <a:defRPr/>
+            </a:pPr>
             <a:r>
               <a:rPr sz="1000" b="0">
                 <a:solidFill>
@@ -5638,7 +5745,9 @@
           </a:bodyPr>
           <a:lstStyle/>
           <a:p>
-            <a:pPr algn="r"/>
+            <a:pPr algn="r">
+              <a:defRPr/>
+            </a:pPr>
             <a:r>
               <a:rPr sz="1000" b="0">
                 <a:solidFill>
@@ -5716,7 +5825,9 @@
           <a:bodyPr rtlCol="0" anchor="ctr"/>
           <a:lstStyle/>
           <a:p>
-            <a:pPr algn="ctr"/>
+            <a:pPr algn="ctr">
+              <a:defRPr/>
+            </a:pPr>
           </a:p>
         </p:txBody>
       </p:sp>
@@ -5742,7 +5853,9 @@
           </a:bodyPr>
           <a:lstStyle/>
           <a:p>
-            <a:pPr algn="l"/>
+            <a:pPr algn="l">
+              <a:defRPr/>
+            </a:pPr>
             <a:r>
               <a:rPr sz="3000" b="1">
                 <a:solidFill>
@@ -5777,7 +5890,9 @@
           </a:bodyPr>
           <a:lstStyle/>
           <a:p>
-            <a:pPr algn="l"/>
+            <a:pPr algn="l">
+              <a:defRPr/>
+            </a:pPr>
             <a:r>
               <a:rPr sz="1000" b="0">
                 <a:solidFill>
@@ -5812,7 +5927,9 @@
           </a:bodyPr>
           <a:lstStyle/>
           <a:p>
-            <a:pPr algn="r"/>
+            <a:pPr algn="r">
+              <a:defRPr/>
+            </a:pPr>
             <a:r>
               <a:rPr sz="1000" b="0">
                 <a:solidFill>
@@ -5890,7 +6007,9 @@
           <a:bodyPr rtlCol="0" anchor="ctr"/>
           <a:lstStyle/>
           <a:p>
-            <a:pPr algn="ctr"/>
+            <a:pPr algn="ctr">
+              <a:defRPr/>
+            </a:pPr>
           </a:p>
         </p:txBody>
       </p:sp>
@@ -5916,7 +6035,9 @@
           </a:bodyPr>
           <a:lstStyle/>
           <a:p>
-            <a:pPr algn="l"/>
+            <a:pPr algn="l">
+              <a:defRPr/>
+            </a:pPr>
             <a:r>
               <a:rPr sz="3000" b="1">
                 <a:solidFill>
@@ -5951,7 +6072,9 @@
           </a:bodyPr>
           <a:lstStyle/>
           <a:p>
-            <a:pPr algn="l"/>
+            <a:pPr algn="l">
+              <a:defRPr/>
+            </a:pPr>
             <a:r>
               <a:rPr sz="1800" b="0">
                 <a:solidFill>
@@ -5996,6 +6119,9 @@
           </a:bodyPr>
           <a:lstStyle/>
           <a:p>
+            <a:pPr>
+              <a:defRPr/>
+            </a:pPr>
             <a:r>
               <a:rPr sz="1800">
                 <a:solidFill>
@@ -6007,6 +6133,9 @@
             </a:r>
           </a:p>
           <a:p>
+            <a:pPr>
+              <a:defRPr/>
+            </a:pPr>
             <a:r>
               <a:rPr sz="1800">
                 <a:solidFill>
@@ -6018,6 +6147,9 @@
             </a:r>
           </a:p>
           <a:p>
+            <a:pPr>
+              <a:defRPr/>
+            </a:pPr>
             <a:r>
               <a:rPr sz="1800">
                 <a:solidFill>
@@ -6029,6 +6161,9 @@
             </a:r>
           </a:p>
           <a:p>
+            <a:pPr>
+              <a:defRPr/>
+            </a:pPr>
             <a:r>
               <a:rPr sz="1800">
                 <a:solidFill>
@@ -6063,7 +6198,9 @@
           </a:bodyPr>
           <a:lstStyle/>
           <a:p>
-            <a:pPr algn="l"/>
+            <a:pPr algn="l">
+              <a:defRPr/>
+            </a:pPr>
             <a:r>
               <a:rPr sz="1000" b="0">
                 <a:solidFill>
@@ -6098,7 +6235,9 @@
           </a:bodyPr>
           <a:lstStyle/>
           <a:p>
-            <a:pPr algn="r"/>
+            <a:pPr algn="r">
+              <a:defRPr/>
+            </a:pPr>
             <a:r>
               <a:rPr sz="1000" b="0">
                 <a:solidFill>
@@ -6176,7 +6315,9 @@
           <a:bodyPr rtlCol="0" anchor="ctr"/>
           <a:lstStyle/>
           <a:p>
-            <a:pPr algn="ctr"/>
+            <a:pPr algn="ctr">
+              <a:defRPr/>
+            </a:pPr>
           </a:p>
         </p:txBody>
       </p:sp>
@@ -6202,7 +6343,9 @@
           </a:bodyPr>
           <a:lstStyle/>
           <a:p>
-            <a:pPr algn="l"/>
+            <a:pPr algn="l">
+              <a:defRPr/>
+            </a:pPr>
             <a:r>
               <a:rPr sz="3000" b="1">
                 <a:solidFill>
@@ -6237,7 +6380,9 @@
           </a:bodyPr>
           <a:lstStyle/>
           <a:p>
-            <a:pPr algn="l"/>
+            <a:pPr algn="l">
+              <a:defRPr/>
+            </a:pPr>
             <a:r>
               <a:rPr sz="1800" b="0">
                 <a:solidFill>
@@ -6312,7 +6457,9 @@
           </a:bodyPr>
           <a:lstStyle/>
           <a:p>
-            <a:pPr algn="l"/>
+            <a:pPr algn="l">
+              <a:defRPr/>
+            </a:pPr>
             <a:r>
               <a:rPr sz="1000" b="0">
                 <a:solidFill>
@@ -6347,7 +6494,9 @@
           </a:bodyPr>
           <a:lstStyle/>
           <a:p>
-            <a:pPr algn="r"/>
+            <a:pPr algn="r">
+              <a:defRPr/>
+            </a:pPr>
             <a:r>
               <a:rPr sz="1000" b="0">
                 <a:solidFill>
@@ -6425,7 +6574,9 @@
           <a:bodyPr rtlCol="0" anchor="ctr"/>
           <a:lstStyle/>
           <a:p>
-            <a:pPr algn="ctr"/>
+            <a:pPr algn="ctr">
+              <a:defRPr/>
+            </a:pPr>
           </a:p>
         </p:txBody>
       </p:sp>
@@ -6451,7 +6602,9 @@
           </a:bodyPr>
           <a:lstStyle/>
           <a:p>
-            <a:pPr algn="l"/>
+            <a:pPr algn="l">
+              <a:defRPr/>
+            </a:pPr>
             <a:r>
               <a:rPr sz="3000" b="1">
                 <a:solidFill>
@@ -6486,7 +6639,9 @@
           </a:bodyPr>
           <a:lstStyle/>
           <a:p>
-            <a:pPr algn="l"/>
+            <a:pPr algn="l">
+              <a:defRPr/>
+            </a:pPr>
             <a:r>
               <a:rPr sz="1800" b="0">
                 <a:solidFill>
@@ -6531,6 +6686,9 @@
           </a:bodyPr>
           <a:lstStyle/>
           <a:p>
+            <a:pPr>
+              <a:defRPr/>
+            </a:pPr>
             <a:r>
               <a:rPr sz="1800">
                 <a:solidFill>
@@ -6542,6 +6700,9 @@
             </a:r>
           </a:p>
           <a:p>
+            <a:pPr>
+              <a:defRPr/>
+            </a:pPr>
             <a:r>
               <a:rPr sz="1800">
                 <a:solidFill>
@@ -6553,6 +6714,9 @@
             </a:r>
           </a:p>
           <a:p>
+            <a:pPr>
+              <a:defRPr/>
+            </a:pPr>
             <a:r>
               <a:rPr sz="1800">
                 <a:solidFill>
@@ -6564,6 +6728,9 @@
             </a:r>
           </a:p>
           <a:p>
+            <a:pPr>
+              <a:defRPr/>
+            </a:pPr>
             <a:r>
               <a:rPr sz="1800">
                 <a:solidFill>
@@ -6598,7 +6765,9 @@
           </a:bodyPr>
           <a:lstStyle/>
           <a:p>
-            <a:pPr algn="l"/>
+            <a:pPr algn="l">
+              <a:defRPr/>
+            </a:pPr>
             <a:r>
               <a:rPr sz="1000" b="0">
                 <a:solidFill>
@@ -6633,7 +6802,9 @@
           </a:bodyPr>
           <a:lstStyle/>
           <a:p>
-            <a:pPr algn="r"/>
+            <a:pPr algn="r">
+              <a:defRPr/>
+            </a:pPr>
             <a:r>
               <a:rPr sz="1000" b="0">
                 <a:solidFill>
@@ -6711,7 +6882,9 @@
           <a:bodyPr rtlCol="0" anchor="ctr"/>
           <a:lstStyle/>
           <a:p>
-            <a:pPr algn="ctr"/>
+            <a:pPr algn="ctr">
+              <a:defRPr/>
+            </a:pPr>
           </a:p>
         </p:txBody>
       </p:sp>
@@ -6737,7 +6910,9 @@
           </a:bodyPr>
           <a:lstStyle/>
           <a:p>
-            <a:pPr algn="l"/>
+            <a:pPr algn="l">
+              <a:defRPr/>
+            </a:pPr>
             <a:r>
               <a:rPr sz="3000" b="1">
                 <a:solidFill>
@@ -6772,7 +6947,9 @@
           </a:bodyPr>
           <a:lstStyle/>
           <a:p>
-            <a:pPr algn="l"/>
+            <a:pPr algn="l">
+              <a:defRPr/>
+            </a:pPr>
             <a:r>
               <a:rPr sz="1000" b="0">
                 <a:solidFill>
@@ -6807,7 +6984,9 @@
           </a:bodyPr>
           <a:lstStyle/>
           <a:p>
-            <a:pPr algn="r"/>
+            <a:pPr algn="r">
+              <a:defRPr/>
+            </a:pPr>
             <a:r>
               <a:rPr sz="1000" b="0">
                 <a:solidFill>
@@ -6885,7 +7064,9 @@
           <a:bodyPr rtlCol="0" anchor="ctr"/>
           <a:lstStyle/>
           <a:p>
-            <a:pPr algn="ctr"/>
+            <a:pPr algn="ctr">
+              <a:defRPr/>
+            </a:pPr>
           </a:p>
         </p:txBody>
       </p:sp>
@@ -6911,7 +7092,9 @@
           </a:bodyPr>
           <a:lstStyle/>
           <a:p>
-            <a:pPr algn="l"/>
+            <a:pPr algn="l">
+              <a:defRPr/>
+            </a:pPr>
             <a:r>
               <a:rPr sz="3000" b="1">
                 <a:solidFill>
@@ -6946,7 +7129,9 @@
           </a:bodyPr>
           <a:lstStyle/>
           <a:p>
-            <a:pPr algn="l"/>
+            <a:pPr algn="l">
+              <a:defRPr/>
+            </a:pPr>
             <a:r>
               <a:rPr sz="1800" b="0">
                 <a:solidFill>
@@ -6991,6 +7176,9 @@
           </a:bodyPr>
           <a:lstStyle/>
           <a:p>
+            <a:pPr>
+              <a:defRPr/>
+            </a:pPr>
             <a:r>
               <a:rPr sz="1800">
                 <a:solidFill>
@@ -7002,6 +7190,9 @@
             </a:r>
           </a:p>
           <a:p>
+            <a:pPr>
+              <a:defRPr/>
+            </a:pPr>
             <a:r>
               <a:rPr sz="1800">
                 <a:solidFill>
@@ -7013,6 +7204,9 @@
             </a:r>
           </a:p>
           <a:p>
+            <a:pPr>
+              <a:defRPr/>
+            </a:pPr>
             <a:r>
               <a:rPr sz="1800">
                 <a:solidFill>
@@ -7047,7 +7241,9 @@
           </a:bodyPr>
           <a:lstStyle/>
           <a:p>
-            <a:pPr algn="l"/>
+            <a:pPr algn="l">
+              <a:defRPr/>
+            </a:pPr>
             <a:r>
               <a:rPr sz="1000" b="0">
                 <a:solidFill>
@@ -7082,7 +7278,9 @@
           </a:bodyPr>
           <a:lstStyle/>
           <a:p>
-            <a:pPr algn="r"/>
+            <a:pPr algn="r">
+              <a:defRPr/>
+            </a:pPr>
             <a:r>
               <a:rPr sz="1000" b="0">
                 <a:solidFill>
@@ -7160,7 +7358,9 @@
           <a:bodyPr rtlCol="0" anchor="ctr"/>
           <a:lstStyle/>
           <a:p>
-            <a:pPr algn="ctr"/>
+            <a:pPr algn="ctr">
+              <a:defRPr/>
+            </a:pPr>
           </a:p>
         </p:txBody>
       </p:sp>
@@ -7186,7 +7386,9 @@
           </a:bodyPr>
           <a:lstStyle/>
           <a:p>
-            <a:pPr algn="l"/>
+            <a:pPr algn="l">
+              <a:defRPr/>
+            </a:pPr>
             <a:r>
               <a:rPr sz="3000" b="1">
                 <a:solidFill>
@@ -7221,7 +7423,9 @@
           </a:bodyPr>
           <a:lstStyle/>
           <a:p>
-            <a:pPr algn="l"/>
+            <a:pPr algn="l">
+              <a:defRPr/>
+            </a:pPr>
             <a:r>
               <a:rPr sz="1800" b="0">
                 <a:solidFill>
@@ -7276,6 +7480,9 @@
           </a:bodyPr>
           <a:lstStyle/>
           <a:p>
+            <a:pPr>
+              <a:defRPr/>
+            </a:pPr>
             <a:r>
               <a:rPr sz="1800">
                 <a:solidFill>
@@ -7287,6 +7494,9 @@
             </a:r>
           </a:p>
           <a:p>
+            <a:pPr>
+              <a:defRPr/>
+            </a:pPr>
             <a:r>
               <a:rPr sz="1800">
                 <a:solidFill>
@@ -7298,6 +7508,9 @@
             </a:r>
           </a:p>
           <a:p>
+            <a:pPr>
+              <a:defRPr/>
+            </a:pPr>
             <a:r>
               <a:rPr sz="1800">
                 <a:solidFill>
@@ -7332,7 +7545,9 @@
           </a:bodyPr>
           <a:lstStyle/>
           <a:p>
-            <a:pPr algn="l"/>
+            <a:pPr algn="l">
+              <a:defRPr/>
+            </a:pPr>
             <a:r>
               <a:rPr sz="1000" b="0">
                 <a:solidFill>
@@ -7367,7 +7582,9 @@
           </a:bodyPr>
           <a:lstStyle/>
           <a:p>
-            <a:pPr algn="r"/>
+            <a:pPr algn="r">
+              <a:defRPr/>
+            </a:pPr>
             <a:r>
               <a:rPr sz="1000" b="0">
                 <a:solidFill>
@@ -7445,7 +7662,9 @@
           <a:bodyPr rtlCol="0" anchor="ctr"/>
           <a:lstStyle/>
           <a:p>
-            <a:pPr algn="ctr"/>
+            <a:pPr algn="ctr">
+              <a:defRPr/>
+            </a:pPr>
           </a:p>
         </p:txBody>
       </p:sp>
@@ -7471,7 +7690,9 @@
           </a:bodyPr>
           <a:lstStyle/>
           <a:p>
-            <a:pPr algn="l"/>
+            <a:pPr algn="l">
+              <a:defRPr/>
+            </a:pPr>
             <a:r>
               <a:rPr sz="3000" b="1">
                 <a:solidFill>
@@ -7506,7 +7727,9 @@
           </a:bodyPr>
           <a:lstStyle/>
           <a:p>
-            <a:pPr algn="l"/>
+            <a:pPr algn="l">
+              <a:defRPr/>
+            </a:pPr>
             <a:r>
               <a:rPr sz="1800" b="0">
                 <a:solidFill>
@@ -7551,6 +7774,9 @@
           </a:bodyPr>
           <a:lstStyle/>
           <a:p>
+            <a:pPr>
+              <a:defRPr/>
+            </a:pPr>
             <a:r>
               <a:rPr sz="1800">
                 <a:solidFill>
@@ -7562,6 +7788,9 @@
             </a:r>
           </a:p>
           <a:p>
+            <a:pPr>
+              <a:defRPr/>
+            </a:pPr>
             <a:r>
               <a:rPr sz="1800">
                 <a:solidFill>
@@ -7573,6 +7802,9 @@
             </a:r>
           </a:p>
           <a:p>
+            <a:pPr>
+              <a:defRPr/>
+            </a:pPr>
             <a:r>
               <a:rPr sz="1800">
                 <a:solidFill>
@@ -7607,7 +7839,9 @@
           </a:bodyPr>
           <a:lstStyle/>
           <a:p>
-            <a:pPr algn="l"/>
+            <a:pPr algn="l">
+              <a:defRPr/>
+            </a:pPr>
             <a:r>
               <a:rPr sz="1000" b="0">
                 <a:solidFill>
@@ -7642,7 +7876,9 @@
           </a:bodyPr>
           <a:lstStyle/>
           <a:p>
-            <a:pPr algn="r"/>
+            <a:pPr algn="r">
+              <a:defRPr/>
+            </a:pPr>
             <a:r>
               <a:rPr sz="1000" b="0">
                 <a:solidFill>
@@ -7720,7 +7956,9 @@
           <a:bodyPr rtlCol="0" anchor="ctr"/>
           <a:lstStyle/>
           <a:p>
-            <a:pPr algn="ctr"/>
+            <a:pPr algn="ctr">
+              <a:defRPr/>
+            </a:pPr>
           </a:p>
         </p:txBody>
       </p:sp>
@@ -7746,7 +7984,9 @@
           </a:bodyPr>
           <a:lstStyle/>
           <a:p>
-            <a:pPr algn="l"/>
+            <a:pPr algn="l">
+              <a:defRPr/>
+            </a:pPr>
             <a:r>
               <a:rPr sz="3000" b="1">
                 <a:solidFill>
@@ -7781,7 +8021,9 @@
           </a:bodyPr>
           <a:lstStyle/>
           <a:p>
-            <a:pPr algn="l"/>
+            <a:pPr algn="l">
+              <a:defRPr/>
+            </a:pPr>
             <a:r>
               <a:rPr sz="1800" b="0">
                 <a:solidFill>
@@ -7856,7 +8098,9 @@
           </a:bodyPr>
           <a:lstStyle/>
           <a:p>
-            <a:pPr algn="l"/>
+            <a:pPr algn="l">
+              <a:defRPr/>
+            </a:pPr>
             <a:r>
               <a:rPr sz="1000" b="0">
                 <a:solidFill>
@@ -7891,7 +8135,9 @@
           </a:bodyPr>
           <a:lstStyle/>
           <a:p>
-            <a:pPr algn="r"/>
+            <a:pPr algn="r">
+              <a:defRPr/>
+            </a:pPr>
             <a:r>
               <a:rPr sz="1000" b="0">
                 <a:solidFill>
@@ -7969,7 +8215,9 @@
           <a:bodyPr rtlCol="0" anchor="ctr"/>
           <a:lstStyle/>
           <a:p>
-            <a:pPr algn="ctr"/>
+            <a:pPr algn="ctr">
+              <a:defRPr/>
+            </a:pPr>
           </a:p>
         </p:txBody>
       </p:sp>
@@ -7995,7 +8243,9 @@
           </a:bodyPr>
           <a:lstStyle/>
           <a:p>
-            <a:pPr algn="l"/>
+            <a:pPr algn="l">
+              <a:defRPr/>
+            </a:pPr>
             <a:r>
               <a:rPr sz="3000" b="1">
                 <a:solidFill>
@@ -8030,7 +8280,9 @@
           </a:bodyPr>
           <a:lstStyle/>
           <a:p>
-            <a:pPr algn="l"/>
+            <a:pPr algn="l">
+              <a:defRPr/>
+            </a:pPr>
             <a:r>
               <a:rPr sz="1800" b="0">
                 <a:solidFill>
@@ -8065,6 +8317,9 @@
           </a:bodyPr>
           <a:lstStyle/>
           <a:p>
+            <a:pPr>
+              <a:defRPr/>
+            </a:pPr>
             <a:r>
               <a:rPr sz="1800">
                 <a:solidFill>
@@ -8076,6 +8331,9 @@
             </a:r>
           </a:p>
           <a:p>
+            <a:pPr>
+              <a:defRPr/>
+            </a:pPr>
             <a:r>
               <a:rPr sz="1800">
                 <a:solidFill>
@@ -8087,6 +8345,9 @@
             </a:r>
           </a:p>
           <a:p>
+            <a:pPr>
+              <a:defRPr/>
+            </a:pPr>
             <a:r>
               <a:rPr sz="1800">
                 <a:solidFill>
@@ -8121,7 +8382,9 @@
           </a:bodyPr>
           <a:lstStyle/>
           <a:p>
-            <a:pPr algn="l"/>
+            <a:pPr algn="l">
+              <a:defRPr/>
+            </a:pPr>
             <a:r>
               <a:rPr sz="1000" b="0">
                 <a:solidFill>
@@ -8156,7 +8419,9 @@
           </a:bodyPr>
           <a:lstStyle/>
           <a:p>
-            <a:pPr algn="r"/>
+            <a:pPr algn="r">
+              <a:defRPr/>
+            </a:pPr>
             <a:r>
               <a:rPr sz="1000" b="0">
                 <a:solidFill>
@@ -8234,7 +8499,9 @@
           <a:bodyPr rtlCol="0" anchor="ctr"/>
           <a:lstStyle/>
           <a:p>
-            <a:pPr algn="ctr"/>
+            <a:pPr algn="ctr">
+              <a:defRPr/>
+            </a:pPr>
           </a:p>
         </p:txBody>
       </p:sp>
@@ -8260,7 +8527,9 @@
           </a:bodyPr>
           <a:lstStyle/>
           <a:p>
-            <a:pPr algn="l"/>
+            <a:pPr algn="l">
+              <a:defRPr/>
+            </a:pPr>
             <a:r>
               <a:rPr sz="3000" b="1">
                 <a:solidFill>
@@ -8295,7 +8564,9 @@
           </a:bodyPr>
           <a:lstStyle/>
           <a:p>
-            <a:pPr algn="l"/>
+            <a:pPr algn="l">
+              <a:defRPr/>
+            </a:pPr>
             <a:r>
               <a:rPr sz="1800" b="0">
                 <a:solidFill>
@@ -8340,6 +8611,9 @@
           </a:bodyPr>
           <a:lstStyle/>
           <a:p>
+            <a:pPr>
+              <a:defRPr/>
+            </a:pPr>
             <a:r>
               <a:rPr sz="1800">
                 <a:solidFill>
@@ -8351,6 +8625,9 @@
             </a:r>
           </a:p>
           <a:p>
+            <a:pPr>
+              <a:defRPr/>
+            </a:pPr>
             <a:r>
               <a:rPr sz="1800">
                 <a:solidFill>
@@ -8362,6 +8639,9 @@
             </a:r>
           </a:p>
           <a:p>
+            <a:pPr>
+              <a:defRPr/>
+            </a:pPr>
             <a:r>
               <a:rPr sz="1800">
                 <a:solidFill>
@@ -8373,6 +8653,9 @@
             </a:r>
           </a:p>
           <a:p>
+            <a:pPr>
+              <a:defRPr/>
+            </a:pPr>
             <a:r>
               <a:rPr sz="1800">
                 <a:solidFill>
@@ -8384,6 +8667,9 @@
             </a:r>
           </a:p>
           <a:p>
+            <a:pPr>
+              <a:defRPr/>
+            </a:pPr>
             <a:r>
               <a:rPr sz="1800">
                 <a:solidFill>
@@ -8395,6 +8681,9 @@
             </a:r>
           </a:p>
           <a:p>
+            <a:pPr>
+              <a:defRPr/>
+            </a:pPr>
             <a:r>
               <a:rPr sz="1800">
                 <a:solidFill>
@@ -8429,7 +8718,9 @@
           </a:bodyPr>
           <a:lstStyle/>
           <a:p>
-            <a:pPr algn="l"/>
+            <a:pPr algn="l">
+              <a:defRPr/>
+            </a:pPr>
             <a:r>
               <a:rPr sz="1000" b="0">
                 <a:solidFill>
@@ -8464,7 +8755,9 @@
           </a:bodyPr>
           <a:lstStyle/>
           <a:p>
-            <a:pPr algn="r"/>
+            <a:pPr algn="r">
+              <a:defRPr/>
+            </a:pPr>
             <a:r>
               <a:rPr sz="1000" b="0">
                 <a:solidFill>
@@ -8542,7 +8835,9 @@
           <a:bodyPr rtlCol="0" anchor="ctr"/>
           <a:lstStyle/>
           <a:p>
-            <a:pPr algn="ctr"/>
+            <a:pPr algn="ctr">
+              <a:defRPr/>
+            </a:pPr>
           </a:p>
         </p:txBody>
       </p:sp>
@@ -8568,7 +8863,9 @@
           </a:bodyPr>
           <a:lstStyle/>
           <a:p>
-            <a:pPr algn="l"/>
+            <a:pPr algn="l">
+              <a:defRPr/>
+            </a:pPr>
             <a:r>
               <a:rPr sz="3000" b="1">
                 <a:solidFill>
@@ -8603,7 +8900,9 @@
           </a:bodyPr>
           <a:lstStyle/>
           <a:p>
-            <a:pPr algn="l"/>
+            <a:pPr algn="l">
+              <a:defRPr/>
+            </a:pPr>
             <a:r>
               <a:rPr sz="1800" b="0">
                 <a:solidFill>
@@ -8638,6 +8937,9 @@
           </a:bodyPr>
           <a:lstStyle/>
           <a:p>
+            <a:pPr>
+              <a:defRPr/>
+            </a:pPr>
             <a:r>
               <a:rPr sz="1800">
                 <a:solidFill>
@@ -8649,6 +8951,9 @@
             </a:r>
           </a:p>
           <a:p>
+            <a:pPr>
+              <a:defRPr/>
+            </a:pPr>
             <a:r>
               <a:rPr sz="1800">
                 <a:solidFill>
@@ -8660,6 +8965,9 @@
             </a:r>
           </a:p>
           <a:p>
+            <a:pPr>
+              <a:defRPr/>
+            </a:pPr>
             <a:r>
               <a:rPr sz="1800">
                 <a:solidFill>
@@ -8671,6 +8979,9 @@
             </a:r>
           </a:p>
           <a:p>
+            <a:pPr>
+              <a:defRPr/>
+            </a:pPr>
             <a:r>
               <a:rPr sz="1800">
                 <a:solidFill>
@@ -8705,7 +9016,9 @@
           </a:bodyPr>
           <a:lstStyle/>
           <a:p>
-            <a:pPr algn="l"/>
+            <a:pPr algn="l">
+              <a:defRPr/>
+            </a:pPr>
             <a:r>
               <a:rPr sz="1000" b="0">
                 <a:solidFill>
@@ -8740,7 +9053,9 @@
           </a:bodyPr>
           <a:lstStyle/>
           <a:p>
-            <a:pPr algn="r"/>
+            <a:pPr algn="r">
+              <a:defRPr/>
+            </a:pPr>
             <a:r>
               <a:rPr sz="1000" b="0">
                 <a:solidFill>
@@ -8818,7 +9133,9 @@
           <a:bodyPr rtlCol="0" anchor="ctr"/>
           <a:lstStyle/>
           <a:p>
-            <a:pPr algn="ctr"/>
+            <a:pPr algn="ctr">
+              <a:defRPr/>
+            </a:pPr>
           </a:p>
         </p:txBody>
       </p:sp>
@@ -8844,7 +9161,9 @@
           </a:bodyPr>
           <a:lstStyle/>
           <a:p>
-            <a:pPr algn="l"/>
+            <a:pPr algn="l">
+              <a:defRPr/>
+            </a:pPr>
             <a:r>
               <a:rPr sz="1800" b="0">
                 <a:solidFill>
@@ -8879,7 +9198,9 @@
           </a:bodyPr>
           <a:lstStyle/>
           <a:p>
-            <a:pPr algn="l"/>
+            <a:pPr algn="l">
+              <a:defRPr/>
+            </a:pPr>
             <a:r>
               <a:rPr sz="1000" b="0">
                 <a:solidFill>
@@ -8914,7 +9235,9 @@
           </a:bodyPr>
           <a:lstStyle/>
           <a:p>
-            <a:pPr algn="r"/>
+            <a:pPr algn="r">
+              <a:defRPr/>
+            </a:pPr>
             <a:r>
               <a:rPr sz="1000" b="0">
                 <a:solidFill>
@@ -8973,7 +9296,9 @@
           </a:bodyPr>
           <a:lstStyle/>
           <a:p>
-            <a:pPr algn="l"/>
+            <a:pPr algn="l">
+              <a:defRPr/>
+            </a:pPr>
             <a:r>
               <a:rPr sz="900" b="1">
                 <a:solidFill>
@@ -9051,7 +9376,9 @@
           <a:bodyPr rtlCol="0" anchor="ctr"/>
           <a:lstStyle/>
           <a:p>
-            <a:pPr algn="ctr"/>
+            <a:pPr algn="ctr">
+              <a:defRPr/>
+            </a:pPr>
           </a:p>
         </p:txBody>
       </p:sp>
@@ -9077,7 +9404,9 @@
           </a:bodyPr>
           <a:lstStyle/>
           <a:p>
-            <a:pPr algn="l"/>
+            <a:pPr algn="l">
+              <a:defRPr/>
+            </a:pPr>
             <a:r>
               <a:rPr sz="3000" b="1">
                 <a:solidFill>
@@ -9112,6 +9441,9 @@
           </a:bodyPr>
           <a:lstStyle/>
           <a:p>
+            <a:pPr>
+              <a:defRPr/>
+            </a:pPr>
             <a:r>
               <a:rPr sz="1800">
                 <a:solidFill>
@@ -9123,6 +9455,9 @@
             </a:r>
           </a:p>
           <a:p>
+            <a:pPr>
+              <a:defRPr/>
+            </a:pPr>
             <a:r>
               <a:rPr sz="1800">
                 <a:solidFill>
@@ -9134,6 +9469,9 @@
             </a:r>
           </a:p>
           <a:p>
+            <a:pPr>
+              <a:defRPr/>
+            </a:pPr>
             <a:r>
               <a:rPr sz="1800">
                 <a:solidFill>
@@ -9145,6 +9483,9 @@
             </a:r>
           </a:p>
           <a:p>
+            <a:pPr>
+              <a:defRPr/>
+            </a:pPr>
             <a:r>
               <a:rPr sz="1800">
                 <a:solidFill>
@@ -9156,6 +9497,9 @@
             </a:r>
           </a:p>
           <a:p>
+            <a:pPr>
+              <a:defRPr/>
+            </a:pPr>
             <a:r>
               <a:rPr sz="1800">
                 <a:solidFill>
@@ -9167,6 +9511,9 @@
             </a:r>
           </a:p>
           <a:p>
+            <a:pPr>
+              <a:defRPr/>
+            </a:pPr>
             <a:r>
               <a:rPr sz="1800">
                 <a:solidFill>
@@ -9201,7 +9548,9 @@
           </a:bodyPr>
           <a:lstStyle/>
           <a:p>
-            <a:pPr algn="l"/>
+            <a:pPr algn="l">
+              <a:defRPr/>
+            </a:pPr>
             <a:r>
               <a:rPr sz="1000" b="0">
                 <a:solidFill>
@@ -9236,7 +9585,9 @@
           </a:bodyPr>
           <a:lstStyle/>
           <a:p>
-            <a:pPr algn="r"/>
+            <a:pPr algn="r">
+              <a:defRPr/>
+            </a:pPr>
             <a:r>
               <a:rPr sz="1000" b="0">
                 <a:solidFill>
@@ -9314,7 +9665,9 @@
           <a:bodyPr rtlCol="0" anchor="ctr"/>
           <a:lstStyle/>
           <a:p>
-            <a:pPr algn="ctr"/>
+            <a:pPr algn="ctr">
+              <a:defRPr/>
+            </a:pPr>
           </a:p>
         </p:txBody>
       </p:sp>
@@ -9340,7 +9693,9 @@
           </a:bodyPr>
           <a:lstStyle/>
           <a:p>
-            <a:pPr algn="l"/>
+            <a:pPr algn="l">
+              <a:defRPr/>
+            </a:pPr>
             <a:r>
               <a:rPr sz="3000" b="1">
                 <a:solidFill>
@@ -9375,7 +9730,9 @@
           </a:bodyPr>
           <a:lstStyle/>
           <a:p>
-            <a:pPr algn="l"/>
+            <a:pPr algn="l">
+              <a:defRPr/>
+            </a:pPr>
             <a:r>
               <a:rPr sz="1000" b="0">
                 <a:solidFill>
@@ -9410,7 +9767,9 @@
           </a:bodyPr>
           <a:lstStyle/>
           <a:p>
-            <a:pPr algn="r"/>
+            <a:pPr algn="r">
+              <a:defRPr/>
+            </a:pPr>
             <a:r>
               <a:rPr sz="1000" b="0">
                 <a:solidFill>
@@ -9488,7 +9847,9 @@
           <a:bodyPr rtlCol="0" anchor="ctr"/>
           <a:lstStyle/>
           <a:p>
-            <a:pPr algn="ctr"/>
+            <a:pPr algn="ctr">
+              <a:defRPr/>
+            </a:pPr>
           </a:p>
         </p:txBody>
       </p:sp>
@@ -9514,7 +9875,9 @@
           </a:bodyPr>
           <a:lstStyle/>
           <a:p>
-            <a:pPr algn="l"/>
+            <a:pPr algn="l">
+              <a:defRPr/>
+            </a:pPr>
             <a:r>
               <a:rPr sz="3000" b="1">
                 <a:solidFill>
@@ -9549,7 +9912,9 @@
           </a:bodyPr>
           <a:lstStyle/>
           <a:p>
-            <a:pPr algn="l"/>
+            <a:pPr algn="l">
+              <a:defRPr/>
+            </a:pPr>
             <a:r>
               <a:rPr sz="1800" b="0">
                 <a:solidFill>
@@ -9594,6 +9959,9 @@
           </a:bodyPr>
           <a:lstStyle/>
           <a:p>
+            <a:pPr>
+              <a:defRPr/>
+            </a:pPr>
             <a:r>
               <a:rPr sz="1800">
                 <a:solidFill>
@@ -9605,6 +9973,9 @@
             </a:r>
           </a:p>
           <a:p>
+            <a:pPr>
+              <a:defRPr/>
+            </a:pPr>
             <a:r>
               <a:rPr sz="1800">
                 <a:solidFill>
@@ -9616,6 +9987,9 @@
             </a:r>
           </a:p>
           <a:p>
+            <a:pPr>
+              <a:defRPr/>
+            </a:pPr>
             <a:r>
               <a:rPr sz="1800">
                 <a:solidFill>
@@ -9627,6 +10001,9 @@
             </a:r>
           </a:p>
           <a:p>
+            <a:pPr>
+              <a:defRPr/>
+            </a:pPr>
             <a:r>
               <a:rPr sz="1800">
                 <a:solidFill>
@@ -9638,6 +10015,9 @@
             </a:r>
           </a:p>
           <a:p>
+            <a:pPr>
+              <a:defRPr/>
+            </a:pPr>
             <a:r>
               <a:rPr sz="1800">
                 <a:solidFill>
@@ -9672,7 +10052,9 @@
           </a:bodyPr>
           <a:lstStyle/>
           <a:p>
-            <a:pPr algn="l"/>
+            <a:pPr algn="l">
+              <a:defRPr/>
+            </a:pPr>
             <a:r>
               <a:rPr sz="1000" b="0">
                 <a:solidFill>
@@ -9707,7 +10089,9 @@
           </a:bodyPr>
           <a:lstStyle/>
           <a:p>
-            <a:pPr algn="r"/>
+            <a:pPr algn="r">
+              <a:defRPr/>
+            </a:pPr>
             <a:r>
               <a:rPr sz="1000" b="0">
                 <a:solidFill>
@@ -9785,7 +10169,9 @@
           <a:bodyPr rtlCol="0" anchor="ctr"/>
           <a:lstStyle/>
           <a:p>
-            <a:pPr algn="ctr"/>
+            <a:pPr algn="ctr">
+              <a:defRPr/>
+            </a:pPr>
           </a:p>
         </p:txBody>
       </p:sp>
@@ -9811,7 +10197,9 @@
           </a:bodyPr>
           <a:lstStyle/>
           <a:p>
-            <a:pPr algn="l"/>
+            <a:pPr algn="l">
+              <a:defRPr/>
+            </a:pPr>
             <a:r>
               <a:rPr sz="3000" b="1">
                 <a:solidFill>
@@ -9846,7 +10234,9 @@
           </a:bodyPr>
           <a:lstStyle/>
           <a:p>
-            <a:pPr algn="l"/>
+            <a:pPr algn="l">
+              <a:defRPr/>
+            </a:pPr>
             <a:r>
               <a:rPr sz="1800" b="0">
                 <a:solidFill>
@@ -9901,6 +10291,9 @@
           </a:bodyPr>
           <a:lstStyle/>
           <a:p>
+            <a:pPr>
+              <a:defRPr/>
+            </a:pPr>
             <a:r>
               <a:rPr sz="1800">
                 <a:solidFill>
@@ -9912,6 +10305,9 @@
             </a:r>
           </a:p>
           <a:p>
+            <a:pPr>
+              <a:defRPr/>
+            </a:pPr>
             <a:r>
               <a:rPr sz="1800">
                 <a:solidFill>
@@ -9923,6 +10319,9 @@
             </a:r>
           </a:p>
           <a:p>
+            <a:pPr>
+              <a:defRPr/>
+            </a:pPr>
             <a:r>
               <a:rPr sz="1800">
                 <a:solidFill>
@@ -9957,7 +10356,9 @@
           </a:bodyPr>
           <a:lstStyle/>
           <a:p>
-            <a:pPr algn="l"/>
+            <a:pPr algn="l">
+              <a:defRPr/>
+            </a:pPr>
             <a:r>
               <a:rPr sz="1000" b="0">
                 <a:solidFill>
@@ -9992,7 +10393,9 @@
           </a:bodyPr>
           <a:lstStyle/>
           <a:p>
-            <a:pPr algn="r"/>
+            <a:pPr algn="r">
+              <a:defRPr/>
+            </a:pPr>
             <a:r>
               <a:rPr sz="1000" b="0">
                 <a:solidFill>
@@ -10070,7 +10473,9 @@
           <a:bodyPr rtlCol="0" anchor="ctr"/>
           <a:lstStyle/>
           <a:p>
-            <a:pPr algn="ctr"/>
+            <a:pPr algn="ctr">
+              <a:defRPr/>
+            </a:pPr>
           </a:p>
         </p:txBody>
       </p:sp>
@@ -10096,7 +10501,9 @@
           </a:bodyPr>
           <a:lstStyle/>
           <a:p>
-            <a:pPr algn="l"/>
+            <a:pPr algn="l">
+              <a:defRPr/>
+            </a:pPr>
             <a:r>
               <a:rPr sz="3000" b="1">
                 <a:solidFill>
@@ -10341,7 +10748,9 @@
           </a:bodyPr>
           <a:lstStyle/>
           <a:p>
-            <a:pPr algn="l"/>
+            <a:pPr algn="l">
+              <a:defRPr/>
+            </a:pPr>
             <a:r>
               <a:rPr sz="1800" b="0">
                 <a:solidFill>
@@ -10386,7 +10795,9 @@
           </a:bodyPr>
           <a:lstStyle/>
           <a:p>
-            <a:pPr algn="l"/>
+            <a:pPr algn="l">
+              <a:defRPr/>
+            </a:pPr>
             <a:r>
               <a:rPr sz="1000" b="0">
                 <a:solidFill>
@@ -10421,7 +10832,9 @@
           </a:bodyPr>
           <a:lstStyle/>
           <a:p>
-            <a:pPr algn="r"/>
+            <a:pPr algn="r">
+              <a:defRPr/>
+            </a:pPr>
             <a:r>
               <a:rPr sz="1000" b="0">
                 <a:solidFill>
@@ -10499,7 +10912,9 @@
           <a:bodyPr rtlCol="0" anchor="ctr"/>
           <a:lstStyle/>
           <a:p>
-            <a:pPr algn="ctr"/>
+            <a:pPr algn="ctr">
+              <a:defRPr/>
+            </a:pPr>
           </a:p>
         </p:txBody>
       </p:sp>
@@ -10525,7 +10940,9 @@
           </a:bodyPr>
           <a:lstStyle/>
           <a:p>
-            <a:pPr algn="l"/>
+            <a:pPr algn="l">
+              <a:defRPr/>
+            </a:pPr>
             <a:r>
               <a:rPr sz="3000" b="1">
                 <a:solidFill>
@@ -10560,7 +10977,9 @@
           </a:bodyPr>
           <a:lstStyle/>
           <a:p>
-            <a:pPr algn="l"/>
+            <a:pPr algn="l">
+              <a:defRPr/>
+            </a:pPr>
             <a:r>
               <a:rPr sz="1000" b="0">
                 <a:solidFill>
@@ -10595,7 +11014,9 @@
           </a:bodyPr>
           <a:lstStyle/>
           <a:p>
-            <a:pPr algn="r"/>
+            <a:pPr algn="r">
+              <a:defRPr/>
+            </a:pPr>
             <a:r>
               <a:rPr sz="1000" b="0">
                 <a:solidFill>
@@ -10673,7 +11094,9 @@
           <a:bodyPr rtlCol="0" anchor="ctr"/>
           <a:lstStyle/>
           <a:p>
-            <a:pPr algn="ctr"/>
+            <a:pPr algn="ctr">
+              <a:defRPr/>
+            </a:pPr>
           </a:p>
         </p:txBody>
       </p:sp>
@@ -10699,7 +11122,9 @@
           </a:bodyPr>
           <a:lstStyle/>
           <a:p>
-            <a:pPr algn="l"/>
+            <a:pPr algn="l">
+              <a:defRPr/>
+            </a:pPr>
             <a:r>
               <a:rPr sz="3000" b="1">
                 <a:solidFill>
@@ -10734,7 +11159,9 @@
           </a:bodyPr>
           <a:lstStyle/>
           <a:p>
-            <a:pPr algn="l"/>
+            <a:pPr algn="l">
+              <a:defRPr/>
+            </a:pPr>
             <a:r>
               <a:rPr sz="1800" b="0">
                 <a:solidFill>
@@ -10769,6 +11196,9 @@
           </a:bodyPr>
           <a:lstStyle/>
           <a:p>
+            <a:pPr>
+              <a:defRPr/>
+            </a:pPr>
             <a:r>
               <a:rPr sz="1800">
                 <a:solidFill>
@@ -10780,6 +11210,9 @@
             </a:r>
           </a:p>
           <a:p>
+            <a:pPr>
+              <a:defRPr/>
+            </a:pPr>
             <a:r>
               <a:rPr sz="1800">
                 <a:solidFill>
@@ -10791,6 +11224,9 @@
             </a:r>
           </a:p>
           <a:p>
+            <a:pPr>
+              <a:defRPr/>
+            </a:pPr>
             <a:r>
               <a:rPr sz="1800">
                 <a:solidFill>
@@ -10802,6 +11238,9 @@
             </a:r>
           </a:p>
           <a:p>
+            <a:pPr>
+              <a:defRPr/>
+            </a:pPr>
             <a:r>
               <a:rPr sz="1800">
                 <a:solidFill>
@@ -10836,7 +11275,9 @@
           </a:bodyPr>
           <a:lstStyle/>
           <a:p>
-            <a:pPr algn="l"/>
+            <a:pPr algn="l">
+              <a:defRPr/>
+            </a:pPr>
             <a:r>
               <a:rPr sz="1000" b="0">
                 <a:solidFill>
@@ -10871,7 +11312,9 @@
           </a:bodyPr>
           <a:lstStyle/>
           <a:p>
-            <a:pPr algn="r"/>
+            <a:pPr algn="r">
+              <a:defRPr/>
+            </a:pPr>
             <a:r>
               <a:rPr sz="1000" b="0">
                 <a:solidFill>
